--- a/docs/workshop-slides.pptx
+++ b/docs/workshop-slides.pptx
@@ -4,6 +4,9 @@
   <p:sldMasterIdLst>
     <p:sldMasterId id="2147483648" r:id="rId1"/>
   </p:sldMasterIdLst>
+  <p:notesMasterIdLst>
+    <p:notesMasterId r:id="rId41"/>
+  </p:notesMasterIdLst>
   <p:sldIdLst>
     <p:sldId id="256" r:id="rId2"/>
     <p:sldId id="257" r:id="rId3"/>
@@ -45,10 +48,7 @@
     <p:sldId id="293" r:id="rId39"/>
     <p:sldId id="294" r:id="rId40"/>
   </p:sldIdLst>
-  <p:notesMasterIdLst>
-    <p:notesMasterId r:id="rId41"/>
-  </p:notesMasterIdLst>
-  <p:sldSz cx="9144000" cy="5143500"/>
+  <p:sldSz cx="9144000" cy="5143500" type="screen16x9"/>
   <p:notesSz cx="5143500" cy="9144000"/>
   <p:defaultTextStyle>
     <a:lvl1pPr marL="0" algn="l" defTabSz="914400" rtl="0" eaLnBrk="1" latinLnBrk="0" hangingPunct="1">
@@ -145,7 +145,7 @@
   <p:extLst>
     <p:ext uri="{521415D9-36F7-43E2-AB2F-B90AF26B5E84}">
       <p14:sectionLst xmlns:p14="http://schemas.microsoft.com/office/powerpoint/2010/main">
-        <p14:section name="Opening" id="{60af5ed6-348a-a655-525d-bc1f89792661}">
+        <p14:section name="Opening" id="{60AF5ED6-348A-A655-525D-BC1F89792661}">
           <p14:sldIdLst>
             <p14:sldId id="256"/>
             <p14:sldId id="257"/>
@@ -153,7 +153,7 @@
             <p14:sldId id="259"/>
           </p14:sldIdLst>
         </p14:section>
-        <p14:section name="1. How agents work" id="{92bbf291-9ad0-49a4-d157-7417dcc0360e}">
+        <p14:section name="1. How agents work" id="{92BBF291-9AD0-49A4-D157-7417DCC0360E}">
           <p14:sldIdLst>
             <p14:sldId id="260"/>
             <p14:sldId id="261"/>
@@ -161,7 +161,7 @@
             <p14:sldId id="263"/>
           </p14:sldIdLst>
         </p14:section>
-        <p14:section name="2. Terminal, Git and GitHub" id="{97338e17-e45a-8178-be93-8f1d7f49c8c2}">
+        <p14:section name="2. Terminal, Git and GitHub" id="{97338E17-E45A-8178-BE93-8F1D7F49C8C2}">
           <p14:sldIdLst>
             <p14:sldId id="264"/>
             <p14:sldId id="265"/>
@@ -169,14 +169,14 @@
             <p14:sldId id="267"/>
           </p14:sldIdLst>
         </p14:section>
-        <p14:section name="3. Cursor" id="{fc925a53-c3b1-640f-f89b-7a75b4da167d}">
+        <p14:section name="3. Cursor" id="{FC925A53-C3B1-640F-F89B-7A75B4DA167D}">
           <p14:sldIdLst>
             <p14:sldId id="268"/>
             <p14:sldId id="269"/>
             <p14:sldId id="270"/>
           </p14:sldIdLst>
         </p14:section>
-        <p14:section name="4. Claude Code core" id="{fcbaf2a2-278e-c514-397a-667c211263ce}">
+        <p14:section name="4. Claude Code core" id="{FCBAF2A2-278E-C514-397A-667C211263CE}">
           <p14:sldIdLst>
             <p14:sldId id="271"/>
             <p14:sldId id="272"/>
@@ -187,14 +187,14 @@
             <p14:sldId id="277"/>
           </p14:sldIdLst>
         </p14:section>
-        <p14:section name="5. Environments and secrets" id="{4a9977a6-45f0-cbe2-f12e-51405f50959f}">
+        <p14:section name="5. Environments and secrets" id="{4A9977A6-45F0-CBE2-F12E-51405F50959F}">
           <p14:sldIdLst>
             <p14:sldId id="278"/>
             <p14:sldId id="279"/>
             <p14:sldId id="280"/>
           </p14:sldIdLst>
         </p14:section>
-        <p14:section name="6. Extending Claude Code" id="{6a7a5453-319b-2f07-774a-4d952082d7b2}">
+        <p14:section name="6. Extending Claude Code" id="{6A7A5453-319B-2F07-774A-4D952082D7B2}">
           <p14:sldIdLst>
             <p14:sldId id="281"/>
             <p14:sldId id="282"/>
@@ -202,13 +202,13 @@
             <p14:sldId id="284"/>
           </p14:sldIdLst>
         </p14:section>
-        <p14:section name="7. Worktrees" id="{f6492a3d-fd8e-e5d2-dbf0-e55db178138d}">
+        <p14:section name="7. Worktrees" id="{F6492A3D-FD8E-E5D2-DBF0-E55DB178138D}">
           <p14:sldIdLst>
             <p14:sldId id="285"/>
             <p14:sldId id="286"/>
           </p14:sldIdLst>
         </p14:section>
-        <p14:section name="8. Final project" id="{f4289584-4f3e-2f0e-c120-dee2294c6531}">
+        <p14:section name="8. Final project" id="{F4289584-4F3E-2F0E-C120-DEE2294C6531}">
           <p14:sldIdLst>
             <p14:sldId id="287"/>
             <p14:sldId id="288"/>
@@ -216,7 +216,7 @@
             <p14:sldId id="290"/>
           </p14:sldIdLst>
         </p14:section>
-        <p14:section name="9. Wrap-up" id="{e98327aa-3509-e8f0-725b-d7cf6535e714}">
+        <p14:section name="9. Wrap-up" id="{E98327AA-3509-E8F0-725B-D7CF6535E714}">
           <p14:sldIdLst>
             <p14:sldId id="291"/>
             <p14:sldId id="292"/>
@@ -255,234 +255,10 @@
           <a:chExt cx="0" cy="0"/>
         </a:xfrm>
       </p:grpSpPr>
-      <p:sp>
-        <p:nvSpPr>
-          <p:cNvPr id="2" name="Header Placeholder 1"/>
-          <p:cNvSpPr>
-            <a:spLocks noGrp="1"/>
-          </p:cNvSpPr>
-          <p:nvPr>
-            <p:ph type="hdr" sz="quarter"/>
-          </p:nvPr>
-        </p:nvSpPr>
-        <p:spPr>
-          <a:xfrm>
-            <a:off x="0" y="0"/>
-            <a:ext cx="2971800" cy="458788"/>
-          </a:xfrm>
-          <a:prstGeom prst="rect">
-            <a:avLst/>
-          </a:prstGeom>
-        </p:spPr>
-        <p:txBody>
-          <a:bodyPr vert="horz" lIns="91440" tIns="45720" rIns="91440" bIns="45720" rtlCol="0"/>
-          <a:lstStyle>
-            <a:lvl1pPr algn="l">
-              <a:defRPr sz="1200"/>
-            </a:lvl1pPr>
-          </a:lstStyle>
-          <a:p>
-            <a:endParaRPr lang="en-US"/>
-          </a:p>
-        </p:txBody>
-      </p:sp>
-      <p:sp>
-        <p:nvSpPr>
-          <p:cNvPr id="3" name="Date Placeholder 2"/>
-          <p:cNvSpPr>
-            <a:spLocks noGrp="1"/>
-          </p:cNvSpPr>
-          <p:nvPr>
-            <p:ph type="dt" idx="1"/>
-          </p:nvPr>
-        </p:nvSpPr>
-        <p:spPr>
-          <a:xfrm>
-            <a:off x="3884613" y="0"/>
-            <a:ext cx="2971800" cy="458788"/>
-          </a:xfrm>
-          <a:prstGeom prst="rect">
-            <a:avLst/>
-          </a:prstGeom>
-        </p:spPr>
-        <p:txBody>
-          <a:bodyPr vert="horz" lIns="91440" tIns="45720" rIns="91440" bIns="45720" rtlCol="0"/>
-          <a:lstStyle>
-            <a:lvl1pPr algn="r">
-              <a:defRPr sz="1200"/>
-            </a:lvl1pPr>
-          </a:lstStyle>
-          <a:p>
-            <a:fld id="{5282F153-3F37-0F45-9E97-73ACFA13230C}" type="datetimeFigureOut">
-              <a:rPr lang="en-US"/>
-              <a:t>7/23/19</a:t>
-            </a:fld>
-            <a:endParaRPr lang="en-US"/>
-          </a:p>
-        </p:txBody>
-      </p:sp>
-      <p:sp>
-        <p:nvSpPr>
-          <p:cNvPr id="4" name="Slide Image Placeholder 3"/>
-          <p:cNvSpPr>
-            <a:spLocks noGrp="1" noRot="1" noChangeAspect="1"/>
-          </p:cNvSpPr>
-          <p:nvPr>
-            <p:ph type="sldImg" idx="2"/>
-          </p:nvPr>
-        </p:nvSpPr>
-        <p:spPr>
-          <a:xfrm>
-            <a:off x="685800" y="1143000"/>
-            <a:ext cx="5486400" cy="3086100"/>
-          </a:xfrm>
-          <a:prstGeom prst="rect">
-            <a:avLst/>
-          </a:prstGeom>
-          <a:noFill/>
-          <a:ln w="12700">
-            <a:solidFill>
-              <a:prstClr val="black"/>
-            </a:solidFill>
-          </a:ln>
-        </p:spPr>
-        <p:txBody>
-          <a:bodyPr vert="horz" lIns="91440" tIns="45720" rIns="91440" bIns="45720" rtlCol="0" anchor="ctr"/>
-          <a:lstStyle/>
-          <a:p>
-            <a:endParaRPr lang="en-US"/>
-          </a:p>
-        </p:txBody>
-      </p:sp>
-      <p:sp>
-        <p:nvSpPr>
-          <p:cNvPr id="5" name="Notes Placeholder 4"/>
-          <p:cNvSpPr>
-            <a:spLocks noGrp="1"/>
-          </p:cNvSpPr>
-          <p:nvPr>
-            <p:ph type="body" sz="quarter" idx="3"/>
-          </p:nvPr>
-        </p:nvSpPr>
-        <p:spPr>
-          <a:xfrm>
-            <a:off x="685800" y="4400550"/>
-            <a:ext cx="5486400" cy="3600450"/>
-          </a:xfrm>
-          <a:prstGeom prst="rect">
-            <a:avLst/>
-          </a:prstGeom>
-        </p:spPr>
-        <p:txBody>
-          <a:bodyPr vert="horz" lIns="91440" tIns="45720" rIns="91440" bIns="45720" rtlCol="0"/>
-          <a:lstStyle/>
-          <a:p>
-            <a:pPr lvl="0"/>
-            <a:r>
-              <a:rPr lang="en-US"/>
-              <a:t>Click to edit Master text styles</a:t>
-            </a:r>
-          </a:p>
-          <a:p>
-            <a:pPr lvl="1"/>
-            <a:r>
-              <a:rPr lang="en-US"/>
-              <a:t>Second level</a:t>
-            </a:r>
-          </a:p>
-          <a:p>
-            <a:pPr lvl="2"/>
-            <a:r>
-              <a:rPr lang="en-US"/>
-              <a:t>Third level</a:t>
-            </a:r>
-          </a:p>
-          <a:p>
-            <a:pPr lvl="3"/>
-            <a:r>
-              <a:rPr lang="en-US"/>
-              <a:t>Fourth level</a:t>
-            </a:r>
-          </a:p>
-          <a:p>
-            <a:pPr lvl="4"/>
-            <a:r>
-              <a:rPr lang="en-US"/>
-              <a:t>Fifth level</a:t>
-            </a:r>
-          </a:p>
-        </p:txBody>
-      </p:sp>
-      <p:sp>
-        <p:nvSpPr>
-          <p:cNvPr id="6" name="Footer Placeholder 5"/>
-          <p:cNvSpPr>
-            <a:spLocks noGrp="1"/>
-          </p:cNvSpPr>
-          <p:nvPr>
-            <p:ph type="ftr" sz="quarter" idx="4"/>
-          </p:nvPr>
-        </p:nvSpPr>
-        <p:spPr>
-          <a:xfrm>
-            <a:off x="0" y="8685213"/>
-            <a:ext cx="2971800" cy="458787"/>
-          </a:xfrm>
-          <a:prstGeom prst="rect">
-            <a:avLst/>
-          </a:prstGeom>
-        </p:spPr>
-        <p:txBody>
-          <a:bodyPr vert="horz" lIns="91440" tIns="45720" rIns="91440" bIns="45720" rtlCol="0" anchor="b"/>
-          <a:lstStyle>
-            <a:lvl1pPr algn="l">
-              <a:defRPr sz="1200"/>
-            </a:lvl1pPr>
-          </a:lstStyle>
-          <a:p>
-            <a:endParaRPr lang="en-US"/>
-          </a:p>
-        </p:txBody>
-      </p:sp>
-      <p:sp>
-        <p:nvSpPr>
-          <p:cNvPr id="7" name="Slide Number Placeholder 6"/>
-          <p:cNvSpPr>
-            <a:spLocks noGrp="1"/>
-          </p:cNvSpPr>
-          <p:nvPr>
-            <p:ph type="sldNum" sz="quarter" idx="5"/>
-          </p:nvPr>
-        </p:nvSpPr>
-        <p:spPr>
-          <a:xfrm>
-            <a:off x="3884613" y="8685213"/>
-            <a:ext cx="2971800" cy="458787"/>
-          </a:xfrm>
-          <a:prstGeom prst="rect">
-            <a:avLst/>
-          </a:prstGeom>
-        </p:spPr>
-        <p:txBody>
-          <a:bodyPr vert="horz" lIns="91440" tIns="45720" rIns="91440" bIns="45720" rtlCol="0" anchor="b"/>
-          <a:lstStyle>
-            <a:lvl1pPr algn="r">
-              <a:defRPr sz="1200"/>
-            </a:lvl1pPr>
-          </a:lstStyle>
-          <a:p>
-            <a:fld id="{CE5E9CC1-C706-0F49-92D6-E571CC5EEA8F}" type="slidenum">
-              <a:rPr lang="en-US"/>
-              <a:t>‹#›</a:t>
-            </a:fld>
-            <a:endParaRPr lang="en-US"/>
-          </a:p>
-        </p:txBody>
-      </p:sp>
     </p:spTree>
     <p:extLst>
       <p:ext uri="{BB962C8B-B14F-4D97-AF65-F5344CB8AC3E}">
-        <p14:creationId xmlns:p14="http://schemas.microsoft.com/office/powerpoint/2010/main" val="1024086991"/>
+        <p14:creationId xmlns:p14="http://schemas.microsoft.com/office/powerpoint/2010/main" val="3987400618"/>
       </p:ext>
     </p:extLst>
   </p:cSld>
@@ -630,7 +406,6 @@
               <a:rPr lang="en-US" dirty="0"/>
               <a:t>Welcome. Quick round of names. Check that everyone finished docs/install.md: anyone whose last step is not all OK sits next to someone who can help. Point at the repo URL; everyone should already have their own copy.</a:t>
             </a:r>
-            <a:endParaRPr lang="en-US" dirty="0"/>
           </a:p>
         </p:txBody>
       </p:sp>
@@ -718,7 +493,6 @@
               <a:rPr lang="en-US" dirty="0"/>
               <a:t>Open Cursor's terminal. Windows uses PowerShell, macOS and Linux use zsh or bash; these commands work in all of them. Do each one live. Show what an error looks like and how to read it.</a:t>
             </a:r>
-            <a:endParaRPr lang="en-US" dirty="0"/>
           </a:p>
         </p:txBody>
       </p:sp>
@@ -806,7 +580,6 @@
               <a:rPr lang="en-US" dirty="0"/>
               <a:t>Keep it conceptual first, then the exercise. Emphasise .gitignore: .env and node_modules must never be committed.</a:t>
             </a:r>
-            <a:endParaRPr lang="en-US" dirty="0"/>
           </a:p>
         </p:txBody>
       </p:sp>
@@ -894,7 +667,6 @@
               <a:rPr lang="en-US" dirty="0"/>
               <a:t>Everyone works in their own copy of the template, so pushes go to their own repo. Walk the room after step 2; the common problem is an unset git name/email or gh not logged in.</a:t>
             </a:r>
-            <a:endParaRPr lang="en-US" dirty="0"/>
           </a:p>
         </p:txBody>
       </p:sp>
@@ -982,7 +754,6 @@
               <a:rPr lang="en-US" dirty="0"/>
               <a:t>Tour the editor. Cursor is our editor and diff viewer; Claude Code is the agent. Teaching two agents side by side confuses beginners.</a:t>
             </a:r>
-            <a:endParaRPr lang="en-US" dirty="0"/>
           </a:p>
         </p:txBody>
       </p:sp>
@@ -1070,7 +841,6 @@
               <a:rPr lang="en-US" dirty="0"/>
               <a:t>Show each panel live. Shortcuts: Ctrl on Windows and Linux, Cmd on macOS. Show the Source Control diff view, because that is where people will review Claude's changes.</a:t>
             </a:r>
-            <a:endParaRPr lang="en-US" dirty="0"/>
           </a:p>
         </p:txBody>
       </p:sp>
@@ -1158,7 +928,6 @@
               <a:rPr lang="en-US" dirty="0"/>
               <a:t>Both tools read CLAUDE.md, so it is the single source of truth. Show a glob-scoped Cursor rule as a live example and create it together. Show inline edit (select code, ask) vs the agent (multi-step task).</a:t>
             </a:r>
-            <a:endParaRPr lang="en-US" dirty="0"/>
           </a:p>
         </p:txBody>
       </p:sp>
@@ -1246,7 +1015,6 @@
               <a:rPr lang="en-US" dirty="0"/>
               <a:t>The heart of the day. Sessions, CLAUDE.md, plan mode then accept edits, permissions, rewind, context commands. Then the first real step of the project.</a:t>
             </a:r>
-            <a:endParaRPr lang="en-US" dirty="0"/>
           </a:p>
         </p:txBody>
       </p:sp>
@@ -1334,7 +1102,6 @@
               <a:rPr lang="en-US" dirty="0"/>
               <a:t>Run claude in the repo root. Approve the MCP servers. Open CLAUDE.md and walk through it: this is the habit that pays off most. Run /init to show how it refreshes, then edit by hand.</a:t>
             </a:r>
-            <a:endParaRPr lang="en-US" dirty="0"/>
           </a:p>
         </p:txBody>
       </p:sp>
@@ -1422,7 +1189,6 @@
               <a:rPr lang="en-US" dirty="0"/>
               <a:t>Demo the full cycle on a tiny change. Stress: read the plan before accepting, and read the diff in Cursor before committing.</a:t>
             </a:r>
-            <a:endParaRPr lang="en-US" dirty="0"/>
           </a:p>
         </p:txBody>
       </p:sp>
@@ -1510,7 +1276,6 @@
               <a:rPr lang="en-US" dirty="0"/>
               <a:t>Show /permissions. Open .claude/settings.json. Demo: ask Claude to show .env and watch the deny rule block it. Explain why --dangerously-skip-permissions is risky: one bad instruction from a web page and it runs unchecked.</a:t>
             </a:r>
-            <a:endParaRPr lang="en-US" dirty="0"/>
           </a:p>
         </p:txBody>
       </p:sp>
@@ -1598,7 +1363,6 @@
               <a:rPr lang="en-US" dirty="0"/>
               <a:t>Two half days. Morning: foundations and the core Claude Code workflow. Afternoon: environments, extending Claude Code, parallel agents, then the final project. Times are guides; protect the final project block.</a:t>
             </a:r>
-            <a:endParaRPr lang="en-US" dirty="0"/>
           </a:p>
         </p:txBody>
       </p:sp>
@@ -1686,7 +1450,6 @@
               <a:rPr lang="en-US" dirty="0"/>
               <a:t>Break something on purpose during the demo (have Claude edit a file badly) and recover with Esc Esc. Then show that rewind does NOT undo a deleted file: recover that one with git restore. People remember this part.</a:t>
             </a:r>
-            <a:endParaRPr lang="en-US" dirty="0"/>
           </a:p>
         </p:txBody>
       </p:sp>
@@ -1774,7 +1537,6 @@
               <a:rPr lang="en-US" dirty="0"/>
               <a:t>Show /context so people can see the window filling. One task per session; /clear when switching topics. /usage answers 'how much have I used'.</a:t>
             </a:r>
-            <a:endParaRPr lang="en-US" dirty="0"/>
           </a:p>
         </p:txBody>
       </p:sp>
@@ -1862,7 +1624,6 @@
               <a:rPr lang="en-US" dirty="0"/>
               <a:t>First real step of the project. Everyone in plan mode. Walk the room while plans are read. Common issue: someone accepts without reading; ask them what the plan said.</a:t>
             </a:r>
-            <a:endParaRPr lang="en-US" dirty="0"/>
           </a:p>
         </p:txBody>
       </p:sp>
@@ -1950,7 +1711,6 @@
               <a:rPr lang="en-US" dirty="0"/>
               <a:t>Where packages live, which files to commit, and how to keep secrets out of git and out of Claude's reach.</a:t>
             </a:r>
-            <a:endParaRPr lang="en-US" dirty="0"/>
           </a:p>
         </p:txBody>
       </p:sp>
@@ -2038,7 +1798,6 @@
               <a:rPr lang="en-US" dirty="0"/>
               <a:t>Same idea in both languages: a manifest, a lock file you commit, and an installed folder you never commit. Always go through uv for Python; never pip directly.</a:t>
             </a:r>
-            <a:endParaRPr lang="en-US" dirty="0"/>
           </a:p>
         </p:txBody>
       </p:sp>
@@ -2126,7 +1885,6 @@
               <a:rPr lang="en-US" dirty="0"/>
               <a:t>Demo: ask Claude to read .env, show the block. Then the trust checklist. If the group works with research or student data, spend a minute on what university policy allows them to send to a cloud model.</a:t>
             </a:r>
-            <a:endParaRPr lang="en-US" dirty="0"/>
           </a:p>
         </p:txBody>
       </p:sp>
@@ -2214,7 +1972,6 @@
               <a:rPr lang="en-US" dirty="0"/>
               <a:t>MCP servers, a custom skill and one hook. One quick demo of each is enough.</a:t>
             </a:r>
-            <a:endParaRPr lang="en-US" dirty="0"/>
           </a:p>
         </p:txBody>
       </p:sp>
@@ -2302,7 +2059,6 @@
               <a:rPr lang="en-US" dirty="0"/>
               <a:t>Run /mcp to show context7 and playwright from .mcp.json. Demo Context7 with a pandas question. Demo Playwright opening a page and taking a screenshot. GitHub access comes from the gh CLI, no extra server needed.</a:t>
             </a:r>
-            <a:endParaRPr lang="en-US" dirty="0"/>
           </a:p>
         </p:txBody>
       </p:sp>
@@ -2390,7 +2146,6 @@
               <a:rPr lang="en-US" dirty="0"/>
               <a:t>Open .claude/skills/new-feature/SKILL.md and read it together: a skill is just written instructions. Point out the two stops where it waits for a human.</a:t>
             </a:r>
-            <a:endParaRPr lang="en-US" dirty="0"/>
           </a:p>
         </p:txBody>
       </p:sp>
@@ -2478,7 +2233,6 @@
               <a:rPr lang="en-US" dirty="0"/>
               <a:t>Add the hook live with /hooks or by editing settings.json, make an ugly edit, watch it get formatted. Mention subagents briefly: a reviewer agent with its own context.</a:t>
             </a:r>
-            <a:endParaRPr lang="en-US" dirty="0"/>
           </a:p>
         </p:txBody>
       </p:sp>
@@ -2566,7 +2320,6 @@
               <a:rPr lang="en-US" dirty="0"/>
               <a:t>This is the thread through the whole day. From block 4 on, every concept gets used on this project in the same repo. Python does the analysis and writes JSON; the web page only displays it, so there is no server and it deploys to GitHub Pages.</a:t>
             </a:r>
-            <a:endParaRPr lang="en-US" dirty="0"/>
           </a:p>
         </p:txBody>
       </p:sp>
@@ -2654,7 +2407,6 @@
               <a:rPr lang="en-US" dirty="0"/>
               <a:t>Two agents building two features in parallel, each in its own copy of the repo, then merge both.</a:t>
             </a:r>
-            <a:endParaRPr lang="en-US" dirty="0"/>
           </a:p>
         </p:txBody>
       </p:sp>
@@ -2742,7 +2494,6 @@
               <a:rPr lang="en-US" dirty="0"/>
               <a:t>Two terminals side by side. One feature each, then merge both into main. If both touch the same file, resolve the conflict together: good learning moment.</a:t>
             </a:r>
-            <a:endParaRPr lang="en-US" dirty="0"/>
           </a:p>
         </p:txBody>
       </p:sp>
@@ -2830,7 +2581,6 @@
               <a:rPr lang="en-US" dirty="0"/>
               <a:t>Everything together. I do the one-shot build first, then pairs extend it with the build loop and deploy.</a:t>
             </a:r>
-            <a:endParaRPr lang="en-US" dirty="0"/>
           </a:p>
         </p:txBody>
       </p:sp>
@@ -2918,7 +2668,6 @@
               <a:rPr lang="en-US" dirty="0"/>
               <a:t>This is the loop for every feature from now on. Pairs: one person drives, one reviews; swap after each feature.</a:t>
             </a:r>
-            <a:endParaRPr lang="en-US" dirty="0"/>
           </a:p>
         </p:txBody>
       </p:sp>
@@ -3006,7 +2755,6 @@
               <a:rPr lang="en-US" dirty="0"/>
               <a:t>Paste the prompt from docs/prompt.md. Narrate the two stops: approve the plan, then look at the page yourself before approving the merge. Enable Pages before pushing or the first deploy fails. If the room already scaffolded the Python side in block 4, Claude builds on it instead of starting over.</a:t>
             </a:r>
-            <a:endParaRPr lang="en-US" dirty="0"/>
           </a:p>
         </p:txBody>
       </p:sp>
@@ -3094,7 +2842,6 @@
               <a:rPr lang="en-US" dirty="0"/>
               <a:t>Each pair picks one or two. Every feature goes through the build loop and ends deployed. Celebrate the first live URL in the room.</a:t>
             </a:r>
-            <a:endParaRPr lang="en-US" dirty="0"/>
           </a:p>
         </p:txBody>
       </p:sp>
@@ -3182,7 +2929,6 @@
               <a:rPr lang="en-US" dirty="0"/>
               <a:t>Pitfalls, costs and plans, the cheat sheet, and where to go next.</a:t>
             </a:r>
-            <a:endParaRPr lang="en-US" dirty="0"/>
           </a:p>
         </p:txBody>
       </p:sp>
@@ -3270,7 +3016,6 @@
               <a:rPr lang="en-US" dirty="0"/>
               <a:t>Ask the room which of these bit them today.</a:t>
             </a:r>
-            <a:endParaRPr lang="en-US" dirty="0"/>
           </a:p>
         </p:txBody>
       </p:sp>
@@ -3358,7 +3103,6 @@
               <a:rPr lang="en-US" dirty="0"/>
               <a:t>Keep costs factual: plans change, so point to /usage and the pricing page rather than quoting numbers.</a:t>
             </a:r>
-            <a:endParaRPr lang="en-US" dirty="0"/>
           </a:p>
         </p:txBody>
       </p:sp>
@@ -3446,7 +3190,6 @@
               <a:rPr lang="en-US" dirty="0"/>
               <a:t>Collect live URLs in the chat. Remind people the cheat sheet is in docs/cheatsheet.md.</a:t>
             </a:r>
-            <a:endParaRPr lang="en-US" dirty="0"/>
           </a:p>
         </p:txBody>
       </p:sp>
@@ -3534,7 +3277,6 @@
               <a:rPr lang="en-US" dirty="0"/>
               <a:t>I do: watch, no typing. We do: same steps together, I wait for the room. You do: short solo exercise; raise a hand when stuck. Read the rule out loud and repeat it all day.</a:t>
             </a:r>
-            <a:endParaRPr lang="en-US" dirty="0"/>
           </a:p>
         </p:txBody>
       </p:sp>
@@ -3622,7 +3364,6 @@
               <a:rPr lang="en-US" dirty="0"/>
               <a:t>Goal: a mental model. Once people see the loop and the context window, plan mode, /clear and Context7 all make sense.</a:t>
             </a:r>
-            <a:endParaRPr lang="en-US" dirty="0"/>
           </a:p>
         </p:txBody>
       </p:sp>
@@ -3710,7 +3451,6 @@
               <a:rPr lang="en-US" dirty="0"/>
               <a:t>Walk through one real request: 'add a test for species counts'. Show which files it reads, what it runs, how it checks. Claude Code and Cursor's agent both do this.</a:t>
             </a:r>
-            <a:endParaRPr lang="en-US" dirty="0"/>
           </a:p>
         </p:txBody>
       </p:sp>
@@ -3798,7 +3538,6 @@
               <a:rPr lang="en-US" dirty="0"/>
               <a:t>Two failure modes cause most trouble. Context: everything shares one window, and quality drops as it fills. Making things up: models are confident about APIs that do not exist. Both have simple habits that fix them.</a:t>
             </a:r>
-            <a:endParaRPr lang="en-US" dirty="0"/>
           </a:p>
         </p:txBody>
       </p:sp>
@@ -3886,7 +3625,6 @@
               <a:rPr lang="en-US" dirty="0"/>
               <a:t>Vibecoding is fine for a throwaway. Anything you want to keep needs the right column. Today we practise the right column.</a:t>
             </a:r>
-            <a:endParaRPr lang="en-US" dirty="0"/>
           </a:p>
         </p:txBody>
       </p:sp>
@@ -3974,7 +3712,6 @@
               <a:rPr lang="en-US" dirty="0"/>
               <a:t>Git comes before any AI tool: it is the undo button that makes it safe to let an agent edit freely. Much 'vibecoding trouble' is really terminal trouble.</a:t>
             </a:r>
-            <a:endParaRPr lang="en-US" dirty="0"/>
           </a:p>
         </p:txBody>
       </p:sp>
@@ -4052,6 +3789,7 @@
         <a:solidFill>
           <a:schemeClr val="tx1"/>
         </a:solidFill>
+        <a:effectLst/>
       </p:bgPr>
     </p:bg>
     <p:spTree>
@@ -4071,9 +3809,11 @@
       <p:sp>
         <p:nvSpPr>
           <p:cNvPr id="2" name="Text 0"/>
-          <p:cNvSpPr/>
+          <p:cNvSpPr>
+            <a:spLocks noGrp="1"/>
+          </p:cNvSpPr>
           <p:nvPr>
-            <p:ph idx="100" type="title" hasCustomPrompt="1"/>
+            <p:ph type="title" idx="100" hasCustomPrompt="1"/>
           </p:nvPr>
         </p:nvSpPr>
         <p:spPr>
@@ -4090,7 +3830,7 @@
         <p:txBody>
           <a:bodyPr wrap="square" rtlCol="0"/>
           <a:lstStyle>
-            <a:lvl1pPr algn="l" indent="0" marL="0">
+            <a:lvl1pPr marL="0" indent="0" algn="l">
               <a:buNone/>
               <a:defRPr lang="en-US" sz="4000" b="1" dirty="0">
                 <a:solidFill>
@@ -4100,7 +3840,7 @@
             </a:lvl1pPr>
           </a:lstStyle>
           <a:p>
-            <a:pPr algn="l" indent="0" marL="0">
+            <a:pPr marL="0" indent="0" algn="l">
               <a:buNone/>
             </a:pPr>
             <a:endParaRPr lang="en-US" sz="4000" dirty="0"/>
@@ -4110,9 +3850,11 @@
       <p:sp>
         <p:nvSpPr>
           <p:cNvPr id="3" name="Text 0"/>
-          <p:cNvSpPr/>
+          <p:cNvSpPr>
+            <a:spLocks noGrp="1"/>
+          </p:cNvSpPr>
           <p:nvPr>
-            <p:ph idx="101" type="body" hasCustomPrompt="1"/>
+            <p:ph type="body" idx="101" hasCustomPrompt="1"/>
           </p:nvPr>
         </p:nvSpPr>
         <p:spPr>
@@ -4129,7 +3871,7 @@
         <p:txBody>
           <a:bodyPr wrap="square" rtlCol="0"/>
           <a:lstStyle>
-            <a:lvl1pPr indent="0" marL="0">
+            <a:lvl1pPr marL="0" indent="0">
               <a:buNone/>
               <a:defRPr lang="en-US" sz="1800" dirty="0">
                 <a:solidFill>
@@ -4139,7 +3881,7 @@
             </a:lvl1pPr>
           </a:lstStyle>
           <a:p>
-            <a:pPr indent="0" marL="0">
+            <a:pPr marL="0" indent="0">
               <a:buNone/>
             </a:pPr>
             <a:endParaRPr lang="en-US" sz="1800" dirty="0"/>
@@ -4162,6 +3904,7 @@
         <a:solidFill>
           <a:schemeClr val="tx1"/>
         </a:solidFill>
+        <a:effectLst/>
       </p:bgPr>
     </p:bg>
     <p:spTree>
@@ -4181,9 +3924,11 @@
       <p:sp>
         <p:nvSpPr>
           <p:cNvPr id="2" name="Text 0"/>
-          <p:cNvSpPr/>
+          <p:cNvSpPr>
+            <a:spLocks noGrp="1"/>
+          </p:cNvSpPr>
           <p:nvPr>
-            <p:ph idx="100" type="title" hasCustomPrompt="1"/>
+            <p:ph type="title" idx="100" hasCustomPrompt="1"/>
           </p:nvPr>
         </p:nvSpPr>
         <p:spPr>
@@ -4200,7 +3945,7 @@
         <p:txBody>
           <a:bodyPr wrap="square" rtlCol="0"/>
           <a:lstStyle>
-            <a:lvl1pPr algn="l" indent="0" marL="0">
+            <a:lvl1pPr marL="0" indent="0" algn="l">
               <a:buNone/>
               <a:defRPr lang="en-US" sz="4000" b="1" dirty="0">
                 <a:solidFill>
@@ -4210,7 +3955,7 @@
             </a:lvl1pPr>
           </a:lstStyle>
           <a:p>
-            <a:pPr algn="l" indent="0" marL="0">
+            <a:pPr marL="0" indent="0" algn="l">
               <a:buNone/>
             </a:pPr>
             <a:endParaRPr lang="en-US" sz="4000" dirty="0"/>
@@ -4220,9 +3965,11 @@
       <p:sp>
         <p:nvSpPr>
           <p:cNvPr id="3" name="Text 0"/>
-          <p:cNvSpPr/>
+          <p:cNvSpPr>
+            <a:spLocks noGrp="1"/>
+          </p:cNvSpPr>
           <p:nvPr>
-            <p:ph idx="101" type="body" hasCustomPrompt="1"/>
+            <p:ph type="body" idx="101" hasCustomPrompt="1"/>
           </p:nvPr>
         </p:nvSpPr>
         <p:spPr>
@@ -4239,7 +3986,7 @@
         <p:txBody>
           <a:bodyPr wrap="square" rtlCol="0"/>
           <a:lstStyle>
-            <a:lvl1pPr indent="0" marL="0">
+            <a:lvl1pPr marL="0" indent="0">
               <a:buNone/>
               <a:defRPr lang="en-US" sz="2000" dirty="0">
                 <a:solidFill>
@@ -4249,7 +3996,7 @@
             </a:lvl1pPr>
           </a:lstStyle>
           <a:p>
-            <a:pPr indent="0" marL="0">
+            <a:pPr marL="0" indent="0">
               <a:buNone/>
             </a:pPr>
             <a:endParaRPr lang="en-US" sz="2000" dirty="0"/>
@@ -4272,6 +4019,7 @@
         <a:solidFill>
           <a:schemeClr val="bg1"/>
         </a:solidFill>
+        <a:effectLst/>
       </p:bgPr>
     </p:bg>
     <p:spTree>
@@ -4291,9 +4039,11 @@
       <p:sp>
         <p:nvSpPr>
           <p:cNvPr id="2" name="Text 0"/>
-          <p:cNvSpPr/>
+          <p:cNvSpPr>
+            <a:spLocks noGrp="1"/>
+          </p:cNvSpPr>
           <p:nvPr>
-            <p:ph idx="100" type="title" hasCustomPrompt="1"/>
+            <p:ph type="title" idx="100" hasCustomPrompt="1"/>
           </p:nvPr>
         </p:nvSpPr>
         <p:spPr>
@@ -4310,7 +4060,7 @@
         <p:txBody>
           <a:bodyPr wrap="square" rtlCol="0"/>
           <a:lstStyle>
-            <a:lvl1pPr algn="l" indent="0" marL="0">
+            <a:lvl1pPr marL="0" indent="0" algn="l">
               <a:buNone/>
               <a:defRPr lang="en-US" sz="3000" b="1" dirty="0">
                 <a:solidFill>
@@ -4320,7 +4070,7 @@
             </a:lvl1pPr>
           </a:lstStyle>
           <a:p>
-            <a:pPr algn="l" indent="0" marL="0">
+            <a:pPr marL="0" indent="0" algn="l">
               <a:buNone/>
             </a:pPr>
             <a:endParaRPr lang="en-US" sz="3000" dirty="0"/>
@@ -4347,7 +4097,7 @@
           </a:prstGeom>
           <a:extLst>
             <a:ext uri="{C572A759-6A51-4108-AA02-DFA0A04FC94B}">
-              <ma14:wrappingTextBoxFlag xmlns:ma14="http://schemas.microsoft.com/office/mac/drawingml/2011/main" val="0"/>
+              <ma14:wrappingTextBoxFlag xmlns:ma14="http://schemas.microsoft.com/office/mac/drawingml/2011/main" xmlns="" val="0"/>
             </a:ext>
           </a:extLst>
         </p:spPr>
@@ -4365,8 +4115,8 @@
           <a:p>
             <a:pPr algn="r"/>
             <a:fld id="{F7021451-1387-4CA6-816F-3879F97B5CBC}" type="slidenum">
-              <a:rPr b="0" lang="en-US"/>
-              <a:t>1004</a:t>
+              <a:rPr lang="en-US" b="0"/>
+              <a:t>‹#›</a:t>
             </a:fld>
             <a:endParaRPr lang="en-US"/>
           </a:p>
@@ -4383,6 +4133,11 @@
 <file path=ppt/slideMasters/slideMaster1.xml><?xml version="1.0" encoding="utf-8"?>
 <p:sldMaster xmlns:a="http://schemas.openxmlformats.org/drawingml/2006/main" xmlns:r="http://schemas.openxmlformats.org/officeDocument/2006/relationships" xmlns:p="http://schemas.openxmlformats.org/presentationml/2006/main">
   <p:cSld>
+    <p:bg>
+      <p:bgRef idx="1001">
+        <a:schemeClr val="bg1"/>
+      </p:bgRef>
+    </p:bg>
     <p:spTree>
       <p:nvGrpSpPr>
         <p:cNvPr id="1" name=""/>
@@ -4417,7 +4172,7 @@
           </a:prstGeom>
           <a:extLst>
             <a:ext uri="{C572A759-6A51-4108-AA02-DFA0A04FC94B}">
-              <ma14:wrappingTextBoxFlag xmlns:ma14="http://schemas.microsoft.com/office/mac/drawingml/2011/main" val="0"/>
+              <ma14:wrappingTextBoxFlag xmlns:ma14="http://schemas.microsoft.com/office/mac/drawingml/2011/main" xmlns="" val="0"/>
             </a:ext>
           </a:extLst>
         </p:spPr>
@@ -4435,8 +4190,8 @@
           <a:p>
             <a:pPr algn="r"/>
             <a:fld id="{F7021451-1387-4CA6-816F-3879F97B5CBC}" type="slidenum">
-              <a:rPr b="0" lang="en-US"/>
-              <a:t>null</a:t>
+              <a:rPr lang="en-US" b="0"/>
+              <a:t>‹#›</a:t>
             </a:fld>
             <a:endParaRPr lang="en-US"/>
           </a:p>
@@ -4724,14 +4479,14 @@
       </p:grpSpPr>
       <p:pic>
         <p:nvPicPr>
-          <p:cNvPr id="2" name="penguin" descr="preencoded.png">    </p:cNvPr>
+          <p:cNvPr id="2" name="penguin" descr="preencoded.png"/>
           <p:cNvPicPr>
             <a:picLocks noChangeAspect="1"/>
           </p:cNvPicPr>
           <p:nvPr/>
         </p:nvPicPr>
         <p:blipFill>
-          <a:blip r:embed="rId1"/>
+          <a:blip r:embed="rId3"/>
           <a:stretch>
             <a:fillRect/>
           </a:stretch>
@@ -4749,9 +4504,11 @@
       <p:sp>
         <p:nvSpPr>
           <p:cNvPr id="3" name="Text 0"/>
-          <p:cNvSpPr/>
+          <p:cNvSpPr>
+            <a:spLocks noGrp="1"/>
+          </p:cNvSpPr>
           <p:nvPr>
-            <p:ph idx="100" type="title" hasCustomPrompt="1"/>
+            <p:ph type="title" idx="100" hasCustomPrompt="1"/>
           </p:nvPr>
         </p:nvSpPr>
         <p:spPr>
@@ -4769,7 +4526,7 @@
           <a:bodyPr wrap="square" lIns="0" tIns="0" rIns="0" bIns="0" rtlCol="0" anchor="b"/>
           <a:lstStyle/>
           <a:p>
-            <a:pPr algn="l" indent="0" marL="0">
+            <a:pPr marL="0" indent="0" algn="l">
               <a:buNone/>
             </a:pPr>
             <a:r>
@@ -4787,9 +4544,11 @@
       <p:sp>
         <p:nvSpPr>
           <p:cNvPr id="4" name="Text 0"/>
-          <p:cNvSpPr/>
+          <p:cNvSpPr>
+            <a:spLocks noGrp="1"/>
+          </p:cNvSpPr>
           <p:nvPr>
-            <p:ph idx="101" type="body" hasCustomPrompt="1"/>
+            <p:ph type="body" idx="101" hasCustomPrompt="1"/>
           </p:nvPr>
         </p:nvSpPr>
         <p:spPr>
@@ -4807,7 +4566,7 @@
           <a:bodyPr wrap="square" lIns="0" tIns="0" rIns="0" bIns="0" rtlCol="0" anchor="t"/>
           <a:lstStyle/>
           <a:p>
-            <a:pPr indent="0" marL="0">
+            <a:pPr marL="0" indent="0">
               <a:buNone/>
             </a:pPr>
             <a:r>
@@ -4821,7 +4580,7 @@
             <a:endParaRPr lang="en-US" sz="1800" dirty="0"/>
           </a:p>
           <a:p>
-            <a:pPr indent="0" marL="0">
+            <a:pPr marL="0" indent="0">
               <a:buNone/>
             </a:pPr>
             <a:r>
@@ -4835,7 +4594,7 @@
             <a:endParaRPr lang="en-US" sz="1800" dirty="0"/>
           </a:p>
           <a:p>
-            <a:pPr indent="0" marL="0">
+            <a:pPr marL="0" indent="0">
               <a:buNone/>
             </a:pPr>
             <a:r>
@@ -4849,7 +4608,7 @@
             <a:endParaRPr lang="en-US" sz="1800" dirty="0"/>
           </a:p>
           <a:p>
-            <a:pPr indent="0" marL="0">
+            <a:pPr marL="0" indent="0">
               <a:buNone/>
             </a:pPr>
             <a:r>
@@ -4892,9 +4651,11 @@
       <p:sp>
         <p:nvSpPr>
           <p:cNvPr id="2" name="Text 0"/>
-          <p:cNvSpPr/>
+          <p:cNvSpPr>
+            <a:spLocks noGrp="1"/>
+          </p:cNvSpPr>
           <p:nvPr>
-            <p:ph idx="100" type="title" hasCustomPrompt="1"/>
+            <p:ph type="title" idx="100" hasCustomPrompt="1"/>
           </p:nvPr>
         </p:nvSpPr>
         <p:spPr>
@@ -4912,7 +4673,7 @@
           <a:bodyPr wrap="square" lIns="0" tIns="0" rIns="0" bIns="0" rtlCol="0" anchor="ctr"/>
           <a:lstStyle/>
           <a:p>
-            <a:pPr algn="l" indent="0" marL="0">
+            <a:pPr marL="0" indent="0" algn="l">
               <a:buNone/>
             </a:pPr>
             <a:r>
@@ -4952,7 +4713,7 @@
           <a:bodyPr wrap="square" lIns="0" tIns="0" rIns="0" bIns="0" rtlCol="0" anchor="ctr"/>
           <a:lstStyle/>
           <a:p>
-            <a:pPr algn="ctr" indent="0" marL="0">
+            <a:pPr marL="0" indent="0" algn="ctr">
               <a:buNone/>
             </a:pPr>
             <a:r>
@@ -5082,6 +4843,13 @@
           </a:solidFill>
           <a:ln/>
         </p:spPr>
+        <p:txBody>
+          <a:bodyPr/>
+          <a:lstStyle/>
+          <a:p>
+            <a:endParaRPr lang="en-US"/>
+          </a:p>
+        </p:txBody>
       </p:sp>
       <p:sp>
         <p:nvSpPr>
@@ -5104,7 +4872,7 @@
           <a:bodyPr wrap="square" lIns="0" tIns="0" rIns="0" bIns="0" rtlCol="0" anchor="t"/>
           <a:lstStyle/>
           <a:p>
-            <a:pPr indent="0" marL="0">
+            <a:pPr marL="0" indent="0">
               <a:buNone/>
             </a:pPr>
             <a:r>
@@ -5118,9 +4886,6 @@
               </a:rPr>
               <a:t>pwd            </a:t>
             </a:r>
-            <a:pPr indent="0" marL="0">
-              <a:buNone/>
-            </a:pPr>
             <a:r>
               <a:rPr lang="en-US" sz="1300" dirty="0">
                 <a:solidFill>
@@ -5135,7 +4900,7 @@
             <a:endParaRPr lang="en-US" sz="1300" dirty="0"/>
           </a:p>
           <a:p>
-            <a:pPr indent="0" marL="0">
+            <a:pPr marL="0" indent="0">
               <a:buNone/>
             </a:pPr>
             <a:r>
@@ -5149,9 +4914,6 @@
               </a:rPr>
               <a:t>ls             </a:t>
             </a:r>
-            <a:pPr indent="0" marL="0">
-              <a:buNone/>
-            </a:pPr>
             <a:r>
               <a:rPr lang="en-US" sz="1300" dirty="0">
                 <a:solidFill>
@@ -5166,7 +4928,7 @@
             <a:endParaRPr lang="en-US" sz="1300" dirty="0"/>
           </a:p>
           <a:p>
-            <a:pPr indent="0" marL="0">
+            <a:pPr marL="0" indent="0">
               <a:buNone/>
             </a:pPr>
             <a:r>
@@ -5180,9 +4942,6 @@
               </a:rPr>
               <a:t>cd data        </a:t>
             </a:r>
-            <a:pPr indent="0" marL="0">
-              <a:buNone/>
-            </a:pPr>
             <a:r>
               <a:rPr lang="en-US" sz="1300" dirty="0">
                 <a:solidFill>
@@ -5197,7 +4956,7 @@
             <a:endParaRPr lang="en-US" sz="1300" dirty="0"/>
           </a:p>
           <a:p>
-            <a:pPr indent="0" marL="0">
+            <a:pPr marL="0" indent="0">
               <a:buNone/>
             </a:pPr>
             <a:r>
@@ -5211,9 +4970,6 @@
               </a:rPr>
               <a:t>cd ..          </a:t>
             </a:r>
-            <a:pPr indent="0" marL="0">
-              <a:buNone/>
-            </a:pPr>
             <a:r>
               <a:rPr lang="en-US" sz="1300" dirty="0">
                 <a:solidFill>
@@ -5228,7 +4984,7 @@
             <a:endParaRPr lang="en-US" sz="1300" dirty="0"/>
           </a:p>
           <a:p>
-            <a:pPr indent="0" marL="0">
+            <a:pPr marL="0" indent="0">
               <a:buNone/>
             </a:pPr>
             <a:r>
@@ -5242,9 +4998,6 @@
               </a:rPr>
               <a:t>node -v        </a:t>
             </a:r>
-            <a:pPr indent="0" marL="0">
-              <a:buNone/>
-            </a:pPr>
             <a:r>
               <a:rPr lang="en-US" sz="1300" dirty="0">
                 <a:solidFill>
@@ -5259,7 +5012,7 @@
             <a:endParaRPr lang="en-US" sz="1300" dirty="0"/>
           </a:p>
           <a:p>
-            <a:pPr indent="0" marL="0">
+            <a:pPr marL="0" indent="0">
               <a:buNone/>
             </a:pPr>
             <a:r>
@@ -5273,9 +5026,6 @@
               </a:rPr>
               <a:t>uv run pytest  </a:t>
             </a:r>
-            <a:pPr indent="0" marL="0">
-              <a:buNone/>
-            </a:pPr>
             <a:r>
               <a:rPr lang="en-US" sz="1300" dirty="0">
                 <a:solidFill>
@@ -5290,7 +5040,7 @@
             <a:endParaRPr lang="en-US" sz="1300" dirty="0"/>
           </a:p>
           <a:p>
-            <a:pPr indent="0" marL="0">
+            <a:pPr marL="0" indent="0">
               <a:buNone/>
             </a:pPr>
             <a:r>
@@ -5304,9 +5054,6 @@
               </a:rPr>
               <a:t>npm run dev    </a:t>
             </a:r>
-            <a:pPr indent="0" marL="0">
-              <a:buNone/>
-            </a:pPr>
             <a:r>
               <a:rPr lang="en-US" sz="1300" dirty="0">
                 <a:solidFill>
@@ -5342,7 +5089,7 @@
           </a:prstGeom>
           <a:extLst>
             <a:ext uri="{C572A759-6A51-4108-AA02-DFA0A04FC94B}">
-              <ma14:wrappingTextBoxFlag xmlns:ma14="http://schemas.microsoft.com/office/mac/drawingml/2011/main" val="0"/>
+              <ma14:wrappingTextBoxFlag xmlns:ma14="http://schemas.microsoft.com/office/mac/drawingml/2011/main" xmlns="" val="0"/>
             </a:ext>
           </a:extLst>
         </p:spPr>
@@ -5360,7 +5107,7 @@
           <a:p>
             <a:pPr algn="r"/>
             <a:fld id="{F7021451-1387-4CA6-816F-3879F97B5CBC}" type="slidenum">
-              <a:rPr b="0" lang="en-US"/>
+              <a:rPr lang="en-US" b="0"/>
               <a:t>10</a:t>
             </a:fld>
             <a:endParaRPr lang="en-US"/>
@@ -5395,9 +5142,11 @@
       <p:sp>
         <p:nvSpPr>
           <p:cNvPr id="2" name="Text 0"/>
-          <p:cNvSpPr/>
+          <p:cNvSpPr>
+            <a:spLocks noGrp="1"/>
+          </p:cNvSpPr>
           <p:nvPr>
-            <p:ph idx="100" type="title" hasCustomPrompt="1"/>
+            <p:ph type="title" idx="100" hasCustomPrompt="1"/>
           </p:nvPr>
         </p:nvSpPr>
         <p:spPr>
@@ -5415,7 +5164,7 @@
           <a:bodyPr wrap="square" lIns="0" tIns="0" rIns="0" bIns="0" rtlCol="0" anchor="ctr"/>
           <a:lstStyle/>
           <a:p>
-            <a:pPr algn="l" indent="0" marL="0">
+            <a:pPr marL="0" indent="0" algn="l">
               <a:buNone/>
             </a:pPr>
             <a:r>
@@ -5455,7 +5204,7 @@
           <a:bodyPr wrap="square" lIns="0" tIns="0" rIns="0" bIns="0" rtlCol="0" anchor="ctr"/>
           <a:lstStyle/>
           <a:p>
-            <a:pPr algn="ctr" indent="0" marL="0">
+            <a:pPr marL="0" indent="0" algn="ctr">
               <a:buNone/>
             </a:pPr>
             <a:r>
@@ -5491,6 +5240,13 @@
           </a:solidFill>
           <a:ln/>
         </p:spPr>
+        <p:txBody>
+          <a:bodyPr/>
+          <a:lstStyle/>
+          <a:p>
+            <a:endParaRPr lang="en-US"/>
+          </a:p>
+        </p:txBody>
       </p:sp>
       <p:sp>
         <p:nvSpPr>
@@ -5513,7 +5269,7 @@
           <a:bodyPr wrap="square" lIns="0" tIns="0" rIns="0" bIns="0" rtlCol="0" anchor="t"/>
           <a:lstStyle/>
           <a:p>
-            <a:pPr indent="0" marL="0">
+            <a:pPr marL="0" indent="0">
               <a:buNone/>
             </a:pPr>
             <a:r>
@@ -5549,7 +5305,7 @@
           <a:bodyPr wrap="square" lIns="0" tIns="0" rIns="0" bIns="0" rtlCol="0" anchor="t"/>
           <a:lstStyle/>
           <a:p>
-            <a:pPr indent="0" marL="0">
+            <a:pPr marL="0" indent="0">
               <a:buNone/>
             </a:pPr>
             <a:r>
@@ -5585,6 +5341,13 @@
           </a:solidFill>
           <a:ln/>
         </p:spPr>
+        <p:txBody>
+          <a:bodyPr/>
+          <a:lstStyle/>
+          <a:p>
+            <a:endParaRPr lang="en-US"/>
+          </a:p>
+        </p:txBody>
       </p:sp>
       <p:sp>
         <p:nvSpPr>
@@ -5607,7 +5370,7 @@
           <a:bodyPr wrap="square" lIns="0" tIns="0" rIns="0" bIns="0" rtlCol="0" anchor="t"/>
           <a:lstStyle/>
           <a:p>
-            <a:pPr indent="0" marL="0">
+            <a:pPr marL="0" indent="0">
               <a:buNone/>
             </a:pPr>
             <a:r>
@@ -5643,7 +5406,7 @@
           <a:bodyPr wrap="square" lIns="0" tIns="0" rIns="0" bIns="0" rtlCol="0" anchor="t"/>
           <a:lstStyle/>
           <a:p>
-            <a:pPr indent="0" marL="0">
+            <a:pPr marL="0" indent="0">
               <a:buNone/>
             </a:pPr>
             <a:r>
@@ -5679,6 +5442,13 @@
           </a:solidFill>
           <a:ln/>
         </p:spPr>
+        <p:txBody>
+          <a:bodyPr/>
+          <a:lstStyle/>
+          <a:p>
+            <a:endParaRPr lang="en-US"/>
+          </a:p>
+        </p:txBody>
       </p:sp>
       <p:sp>
         <p:nvSpPr>
@@ -5701,7 +5471,7 @@
           <a:bodyPr wrap="square" lIns="0" tIns="0" rIns="0" bIns="0" rtlCol="0" anchor="t"/>
           <a:lstStyle/>
           <a:p>
-            <a:pPr indent="0" marL="0">
+            <a:pPr marL="0" indent="0">
               <a:buNone/>
             </a:pPr>
             <a:r>
@@ -5737,7 +5507,7 @@
           <a:bodyPr wrap="square" lIns="0" tIns="0" rIns="0" bIns="0" rtlCol="0" anchor="t"/>
           <a:lstStyle/>
           <a:p>
-            <a:pPr indent="0" marL="0">
+            <a:pPr marL="0" indent="0">
               <a:buNone/>
             </a:pPr>
             <a:r>
@@ -5773,6 +5543,13 @@
           </a:solidFill>
           <a:ln/>
         </p:spPr>
+        <p:txBody>
+          <a:bodyPr/>
+          <a:lstStyle/>
+          <a:p>
+            <a:endParaRPr lang="en-US"/>
+          </a:p>
+        </p:txBody>
       </p:sp>
       <p:sp>
         <p:nvSpPr>
@@ -5795,7 +5572,7 @@
           <a:bodyPr wrap="square" lIns="0" tIns="0" rIns="0" bIns="0" rtlCol="0" anchor="t"/>
           <a:lstStyle/>
           <a:p>
-            <a:pPr indent="0" marL="0">
+            <a:pPr marL="0" indent="0">
               <a:buNone/>
             </a:pPr>
             <a:r>
@@ -5831,7 +5608,7 @@
           <a:bodyPr wrap="square" lIns="0" tIns="0" rIns="0" bIns="0" rtlCol="0" anchor="t"/>
           <a:lstStyle/>
           <a:p>
-            <a:pPr indent="0" marL="0">
+            <a:pPr marL="0" indent="0">
               <a:buNone/>
             </a:pPr>
             <a:r>
@@ -5854,7 +5631,7 @@
         </p:nvSpPr>
         <p:spPr>
           <a:xfrm>
-            <a:off x="3268980" y="2880360"/>
+            <a:off x="3374136" y="2926080"/>
             <a:ext cx="2606040" cy="1508760"/>
           </a:xfrm>
           <a:prstGeom prst="roundRect">
@@ -5867,6 +5644,13 @@
           </a:solidFill>
           <a:ln/>
         </p:spPr>
+        <p:txBody>
+          <a:bodyPr/>
+          <a:lstStyle/>
+          <a:p>
+            <a:endParaRPr lang="en-US"/>
+          </a:p>
+        </p:txBody>
       </p:sp>
       <p:sp>
         <p:nvSpPr>
@@ -5889,7 +5673,7 @@
           <a:bodyPr wrap="square" lIns="0" tIns="0" rIns="0" bIns="0" rtlCol="0" anchor="t"/>
           <a:lstStyle/>
           <a:p>
-            <a:pPr indent="0" marL="0">
+            <a:pPr marL="0" indent="0">
               <a:buNone/>
             </a:pPr>
             <a:r>
@@ -5925,7 +5709,7 @@
           <a:bodyPr wrap="square" lIns="0" tIns="0" rIns="0" bIns="0" rtlCol="0" anchor="t"/>
           <a:lstStyle/>
           <a:p>
-            <a:pPr indent="0" marL="0">
+            <a:pPr marL="0" indent="0">
               <a:buNone/>
             </a:pPr>
             <a:r>
@@ -5961,6 +5745,13 @@
           </a:solidFill>
           <a:ln/>
         </p:spPr>
+        <p:txBody>
+          <a:bodyPr/>
+          <a:lstStyle/>
+          <a:p>
+            <a:endParaRPr lang="en-US"/>
+          </a:p>
+        </p:txBody>
       </p:sp>
       <p:sp>
         <p:nvSpPr>
@@ -5983,7 +5774,7 @@
           <a:bodyPr wrap="square" lIns="0" tIns="0" rIns="0" bIns="0" rtlCol="0" anchor="t"/>
           <a:lstStyle/>
           <a:p>
-            <a:pPr indent="0" marL="0">
+            <a:pPr marL="0" indent="0">
               <a:buNone/>
             </a:pPr>
             <a:r>
@@ -6019,7 +5810,7 @@
           <a:bodyPr wrap="square" lIns="0" tIns="0" rIns="0" bIns="0" rtlCol="0" anchor="t"/>
           <a:lstStyle/>
           <a:p>
-            <a:pPr indent="0" marL="0">
+            <a:pPr marL="0" indent="0">
               <a:buNone/>
             </a:pPr>
             <a:r>
@@ -6054,7 +5845,7 @@
           </a:prstGeom>
           <a:extLst>
             <a:ext uri="{C572A759-6A51-4108-AA02-DFA0A04FC94B}">
-              <ma14:wrappingTextBoxFlag xmlns:ma14="http://schemas.microsoft.com/office/mac/drawingml/2011/main" val="0"/>
+              <ma14:wrappingTextBoxFlag xmlns:ma14="http://schemas.microsoft.com/office/mac/drawingml/2011/main" xmlns="" val="0"/>
             </a:ext>
           </a:extLst>
         </p:spPr>
@@ -6072,7 +5863,7 @@
           <a:p>
             <a:pPr algn="r"/>
             <a:fld id="{F7021451-1387-4CA6-816F-3879F97B5CBC}" type="slidenum">
-              <a:rPr b="0" lang="en-US"/>
+              <a:rPr lang="en-US" b="0"/>
               <a:t>11</a:t>
             </a:fld>
             <a:endParaRPr lang="en-US"/>
@@ -6107,9 +5898,11 @@
       <p:sp>
         <p:nvSpPr>
           <p:cNvPr id="2" name="Text 0"/>
-          <p:cNvSpPr/>
+          <p:cNvSpPr>
+            <a:spLocks noGrp="1"/>
+          </p:cNvSpPr>
           <p:nvPr>
-            <p:ph idx="100" type="title" hasCustomPrompt="1"/>
+            <p:ph type="title" idx="100" hasCustomPrompt="1"/>
           </p:nvPr>
         </p:nvSpPr>
         <p:spPr>
@@ -6127,7 +5920,7 @@
           <a:bodyPr wrap="square" lIns="0" tIns="0" rIns="0" bIns="0" rtlCol="0" anchor="ctr"/>
           <a:lstStyle/>
           <a:p>
-            <a:pPr algn="l" indent="0" marL="0">
+            <a:pPr marL="0" indent="0" algn="l">
               <a:buNone/>
             </a:pPr>
             <a:r>
@@ -6167,7 +5960,7 @@
           <a:bodyPr wrap="square" lIns="0" tIns="0" rIns="0" bIns="0" rtlCol="0" anchor="ctr"/>
           <a:lstStyle/>
           <a:p>
-            <a:pPr algn="ctr" indent="0" marL="0">
+            <a:pPr marL="0" indent="0" algn="ctr">
               <a:buNone/>
             </a:pPr>
             <a:r>
@@ -6205,7 +5998,7 @@
           <a:bodyPr wrap="square" lIns="0" tIns="0" rIns="0" bIns="0" rtlCol="0" anchor="ctr"/>
           <a:lstStyle/>
           <a:p>
-            <a:pPr algn="ctr" indent="0" marL="0">
+            <a:pPr marL="0" indent="0" algn="ctr">
               <a:buNone/>
             </a:pPr>
             <a:r>
@@ -6241,7 +6034,7 @@
           <a:bodyPr wrap="square" lIns="0" tIns="0" rIns="0" bIns="0" rtlCol="0" anchor="t"/>
           <a:lstStyle/>
           <a:p>
-            <a:pPr indent="0" marL="0">
+            <a:pPr marL="0" indent="0">
               <a:buNone/>
             </a:pPr>
             <a:r>
@@ -6279,7 +6072,7 @@
           <a:bodyPr wrap="square" lIns="0" tIns="0" rIns="0" bIns="0" rtlCol="0" anchor="ctr"/>
           <a:lstStyle/>
           <a:p>
-            <a:pPr algn="ctr" indent="0" marL="0">
+            <a:pPr marL="0" indent="0" algn="ctr">
               <a:buNone/>
             </a:pPr>
             <a:r>
@@ -6315,7 +6108,7 @@
           <a:bodyPr wrap="square" lIns="0" tIns="0" rIns="0" bIns="0" rtlCol="0" anchor="t"/>
           <a:lstStyle/>
           <a:p>
-            <a:pPr indent="0" marL="0">
+            <a:pPr marL="0" indent="0">
               <a:buNone/>
             </a:pPr>
             <a:r>
@@ -6353,7 +6146,7 @@
           <a:bodyPr wrap="square" lIns="0" tIns="0" rIns="0" bIns="0" rtlCol="0" anchor="ctr"/>
           <a:lstStyle/>
           <a:p>
-            <a:pPr algn="ctr" indent="0" marL="0">
+            <a:pPr marL="0" indent="0" algn="ctr">
               <a:buNone/>
             </a:pPr>
             <a:r>
@@ -6389,7 +6182,7 @@
           <a:bodyPr wrap="square" lIns="0" tIns="0" rIns="0" bIns="0" rtlCol="0" anchor="t"/>
           <a:lstStyle/>
           <a:p>
-            <a:pPr indent="0" marL="0">
+            <a:pPr marL="0" indent="0">
               <a:buNone/>
             </a:pPr>
             <a:r>
@@ -6427,7 +6220,7 @@
           <a:bodyPr wrap="square" lIns="0" tIns="0" rIns="0" bIns="0" rtlCol="0" anchor="ctr"/>
           <a:lstStyle/>
           <a:p>
-            <a:pPr algn="ctr" indent="0" marL="0">
+            <a:pPr marL="0" indent="0" algn="ctr">
               <a:buNone/>
             </a:pPr>
             <a:r>
@@ -6463,7 +6256,7 @@
           <a:bodyPr wrap="square" lIns="0" tIns="0" rIns="0" bIns="0" rtlCol="0" anchor="t"/>
           <a:lstStyle/>
           <a:p>
-            <a:pPr indent="0" marL="0">
+            <a:pPr marL="0" indent="0">
               <a:buNone/>
             </a:pPr>
             <a:r>
@@ -6501,7 +6294,7 @@
           <a:bodyPr wrap="square" lIns="0" tIns="0" rIns="0" bIns="0" rtlCol="0" anchor="ctr"/>
           <a:lstStyle/>
           <a:p>
-            <a:pPr algn="ctr" indent="0" marL="0">
+            <a:pPr marL="0" indent="0" algn="ctr">
               <a:buNone/>
             </a:pPr>
             <a:r>
@@ -6537,7 +6330,7 @@
           <a:bodyPr wrap="square" lIns="0" tIns="0" rIns="0" bIns="0" rtlCol="0" anchor="t"/>
           <a:lstStyle/>
           <a:p>
-            <a:pPr indent="0" marL="0">
+            <a:pPr marL="0" indent="0">
               <a:buNone/>
             </a:pPr>
             <a:r>
@@ -6573,6 +6366,13 @@
           </a:solidFill>
           <a:ln/>
         </p:spPr>
+        <p:txBody>
+          <a:bodyPr/>
+          <a:lstStyle/>
+          <a:p>
+            <a:endParaRPr lang="en-US"/>
+          </a:p>
+        </p:txBody>
       </p:sp>
       <p:sp>
         <p:nvSpPr>
@@ -6595,7 +6395,7 @@
           <a:bodyPr wrap="square" lIns="0" tIns="0" rIns="0" bIns="0" rtlCol="0" anchor="t"/>
           <a:lstStyle/>
           <a:p>
-            <a:pPr indent="0" marL="0">
+            <a:pPr marL="0" indent="0">
               <a:buNone/>
             </a:pPr>
             <a:r>
@@ -6612,7 +6412,7 @@
             <a:endParaRPr lang="en-US" sz="1500" dirty="0"/>
           </a:p>
           <a:p>
-            <a:pPr indent="0" marL="0">
+            <a:pPr marL="0" indent="0">
               <a:buNone/>
             </a:pPr>
             <a:r>
@@ -6629,7 +6429,7 @@
             <a:endParaRPr lang="en-US" sz="1500" dirty="0"/>
           </a:p>
           <a:p>
-            <a:pPr indent="0" marL="0">
+            <a:pPr marL="0" indent="0">
               <a:buNone/>
             </a:pPr>
             <a:r>
@@ -6646,7 +6446,7 @@
             <a:endParaRPr lang="en-US" sz="1500" dirty="0"/>
           </a:p>
           <a:p>
-            <a:pPr indent="0" marL="0">
+            <a:pPr marL="0" indent="0">
               <a:buNone/>
             </a:pPr>
             <a:r>
@@ -6663,7 +6463,7 @@
             <a:endParaRPr lang="en-US" sz="1500" dirty="0"/>
           </a:p>
           <a:p>
-            <a:pPr indent="0" marL="0">
+            <a:pPr marL="0" indent="0">
               <a:buNone/>
             </a:pPr>
             <a:r>
@@ -6680,7 +6480,7 @@
             <a:endParaRPr lang="en-US" sz="1500" dirty="0"/>
           </a:p>
           <a:p>
-            <a:pPr indent="0" marL="0">
+            <a:pPr marL="0" indent="0">
               <a:buNone/>
             </a:pPr>
             <a:r>
@@ -6697,7 +6497,7 @@
             <a:endParaRPr lang="en-US" sz="1500" dirty="0"/>
           </a:p>
           <a:p>
-            <a:pPr indent="0" marL="0">
+            <a:pPr marL="0" indent="0">
               <a:buNone/>
             </a:pPr>
             <a:r>
@@ -6714,7 +6514,7 @@
             <a:endParaRPr lang="en-US" sz="1500" dirty="0"/>
           </a:p>
           <a:p>
-            <a:pPr indent="0" marL="0">
+            <a:pPr marL="0" indent="0">
               <a:buNone/>
             </a:pPr>
             <a:r>
@@ -6731,7 +6531,7 @@
             <a:endParaRPr lang="en-US" sz="1500" dirty="0"/>
           </a:p>
           <a:p>
-            <a:pPr indent="0" marL="0">
+            <a:pPr marL="0" indent="0">
               <a:buNone/>
             </a:pPr>
             <a:r>
@@ -6748,7 +6548,7 @@
             <a:endParaRPr lang="en-US" sz="1500" dirty="0"/>
           </a:p>
           <a:p>
-            <a:pPr indent="0" marL="0">
+            <a:pPr marL="0" indent="0">
               <a:buNone/>
             </a:pPr>
             <a:r>
@@ -6765,7 +6565,7 @@
             <a:endParaRPr lang="en-US" sz="1500" dirty="0"/>
           </a:p>
           <a:p>
-            <a:pPr indent="0" marL="0">
+            <a:pPr marL="0" indent="0">
               <a:buNone/>
             </a:pPr>
             <a:r>
@@ -6803,7 +6603,7 @@
           </a:prstGeom>
           <a:extLst>
             <a:ext uri="{C572A759-6A51-4108-AA02-DFA0A04FC94B}">
-              <ma14:wrappingTextBoxFlag xmlns:ma14="http://schemas.microsoft.com/office/mac/drawingml/2011/main" val="0"/>
+              <ma14:wrappingTextBoxFlag xmlns:ma14="http://schemas.microsoft.com/office/mac/drawingml/2011/main" xmlns="" val="0"/>
             </a:ext>
           </a:extLst>
         </p:spPr>
@@ -6821,7 +6621,7 @@
           <a:p>
             <a:pPr algn="r"/>
             <a:fld id="{F7021451-1387-4CA6-816F-3879F97B5CBC}" type="slidenum">
-              <a:rPr b="0" lang="en-US"/>
+              <a:rPr lang="en-US" b="0"/>
               <a:t>12</a:t>
             </a:fld>
             <a:endParaRPr lang="en-US"/>
@@ -6878,7 +6678,7 @@
           <a:bodyPr wrap="square" lIns="0" tIns="0" rIns="0" bIns="0" rtlCol="0" anchor="ctr"/>
           <a:lstStyle/>
           <a:p>
-            <a:pPr algn="ctr" indent="0" marL="0">
+            <a:pPr marL="0" indent="0" algn="ctr">
               <a:buNone/>
             </a:pPr>
             <a:r>
@@ -6896,9 +6696,11 @@
       <p:sp>
         <p:nvSpPr>
           <p:cNvPr id="3" name="Text 0"/>
-          <p:cNvSpPr/>
+          <p:cNvSpPr>
+            <a:spLocks noGrp="1"/>
+          </p:cNvSpPr>
           <p:nvPr>
-            <p:ph idx="100" type="title" hasCustomPrompt="1"/>
+            <p:ph type="title" idx="100" hasCustomPrompt="1"/>
           </p:nvPr>
         </p:nvSpPr>
         <p:spPr>
@@ -6916,7 +6718,7 @@
           <a:bodyPr wrap="square" lIns="0" tIns="0" rIns="0" bIns="0" rtlCol="0" anchor="b"/>
           <a:lstStyle/>
           <a:p>
-            <a:pPr algn="l" indent="0" marL="0">
+            <a:pPr marL="0" indent="0" algn="l">
               <a:buNone/>
             </a:pPr>
             <a:r>
@@ -6934,9 +6736,11 @@
       <p:sp>
         <p:nvSpPr>
           <p:cNvPr id="4" name="Text 0"/>
-          <p:cNvSpPr/>
+          <p:cNvSpPr>
+            <a:spLocks noGrp="1"/>
+          </p:cNvSpPr>
           <p:nvPr>
-            <p:ph idx="101" type="body" hasCustomPrompt="1"/>
+            <p:ph type="body" idx="101" hasCustomPrompt="1"/>
           </p:nvPr>
         </p:nvSpPr>
         <p:spPr>
@@ -6954,7 +6758,7 @@
           <a:bodyPr wrap="square" lIns="0" tIns="0" rIns="0" bIns="0" rtlCol="0" anchor="t"/>
           <a:lstStyle/>
           <a:p>
-            <a:pPr indent="0" marL="0">
+            <a:pPr marL="0" indent="0">
               <a:buNone/>
             </a:pPr>
             <a:r>
@@ -6997,9 +6801,11 @@
       <p:sp>
         <p:nvSpPr>
           <p:cNvPr id="2" name="Text 0"/>
-          <p:cNvSpPr/>
+          <p:cNvSpPr>
+            <a:spLocks noGrp="1"/>
+          </p:cNvSpPr>
           <p:nvPr>
-            <p:ph idx="100" type="title" hasCustomPrompt="1"/>
+            <p:ph type="title" idx="100" hasCustomPrompt="1"/>
           </p:nvPr>
         </p:nvSpPr>
         <p:spPr>
@@ -7017,7 +6823,7 @@
           <a:bodyPr wrap="square" lIns="0" tIns="0" rIns="0" bIns="0" rtlCol="0" anchor="ctr"/>
           <a:lstStyle/>
           <a:p>
-            <a:pPr algn="l" indent="0" marL="0">
+            <a:pPr marL="0" indent="0" algn="l">
               <a:buNone/>
             </a:pPr>
             <a:r>
@@ -7057,7 +6863,7 @@
           <a:bodyPr wrap="square" lIns="0" tIns="0" rIns="0" bIns="0" rtlCol="0" anchor="ctr"/>
           <a:lstStyle/>
           <a:p>
-            <a:pPr algn="ctr" indent="0" marL="0">
+            <a:pPr marL="0" indent="0" algn="ctr">
               <a:buNone/>
             </a:pPr>
             <a:r>
@@ -7093,6 +6899,13 @@
           </a:solidFill>
           <a:ln/>
         </p:spPr>
+        <p:txBody>
+          <a:bodyPr/>
+          <a:lstStyle/>
+          <a:p>
+            <a:endParaRPr lang="en-US"/>
+          </a:p>
+        </p:txBody>
       </p:sp>
       <p:sp>
         <p:nvSpPr>
@@ -7115,7 +6928,7 @@
           <a:bodyPr wrap="square" lIns="0" tIns="0" rIns="0" bIns="0" rtlCol="0" anchor="t"/>
           <a:lstStyle/>
           <a:p>
-            <a:pPr indent="0" marL="0">
+            <a:pPr marL="0" indent="0">
               <a:buNone/>
             </a:pPr>
             <a:r>
@@ -7151,7 +6964,7 @@
           <a:bodyPr wrap="square" lIns="0" tIns="0" rIns="0" bIns="0" rtlCol="0" anchor="t"/>
           <a:lstStyle/>
           <a:p>
-            <a:pPr indent="0" marL="0">
+            <a:pPr marL="0" indent="0">
               <a:buNone/>
             </a:pPr>
             <a:r>
@@ -7187,6 +7000,13 @@
           </a:solidFill>
           <a:ln/>
         </p:spPr>
+        <p:txBody>
+          <a:bodyPr/>
+          <a:lstStyle/>
+          <a:p>
+            <a:endParaRPr lang="en-US"/>
+          </a:p>
+        </p:txBody>
       </p:sp>
       <p:sp>
         <p:nvSpPr>
@@ -7209,7 +7029,7 @@
           <a:bodyPr wrap="square" lIns="0" tIns="0" rIns="0" bIns="0" rtlCol="0" anchor="t"/>
           <a:lstStyle/>
           <a:p>
-            <a:pPr indent="0" marL="0">
+            <a:pPr marL="0" indent="0">
               <a:buNone/>
             </a:pPr>
             <a:r>
@@ -7245,7 +7065,7 @@
           <a:bodyPr wrap="square" lIns="0" tIns="0" rIns="0" bIns="0" rtlCol="0" anchor="t"/>
           <a:lstStyle/>
           <a:p>
-            <a:pPr indent="0" marL="0">
+            <a:pPr marL="0" indent="0">
               <a:buNone/>
             </a:pPr>
             <a:r>
@@ -7281,6 +7101,13 @@
           </a:solidFill>
           <a:ln/>
         </p:spPr>
+        <p:txBody>
+          <a:bodyPr/>
+          <a:lstStyle/>
+          <a:p>
+            <a:endParaRPr lang="en-US"/>
+          </a:p>
+        </p:txBody>
       </p:sp>
       <p:sp>
         <p:nvSpPr>
@@ -7303,7 +7130,7 @@
           <a:bodyPr wrap="square" lIns="0" tIns="0" rIns="0" bIns="0" rtlCol="0" anchor="t"/>
           <a:lstStyle/>
           <a:p>
-            <a:pPr indent="0" marL="0">
+            <a:pPr marL="0" indent="0">
               <a:buNone/>
             </a:pPr>
             <a:r>
@@ -7339,7 +7166,7 @@
           <a:bodyPr wrap="square" lIns="0" tIns="0" rIns="0" bIns="0" rtlCol="0" anchor="t"/>
           <a:lstStyle/>
           <a:p>
-            <a:pPr indent="0" marL="0">
+            <a:pPr marL="0" indent="0">
               <a:buNone/>
             </a:pPr>
             <a:r>
@@ -7375,6 +7202,13 @@
           </a:solidFill>
           <a:ln/>
         </p:spPr>
+        <p:txBody>
+          <a:bodyPr/>
+          <a:lstStyle/>
+          <a:p>
+            <a:endParaRPr lang="en-US"/>
+          </a:p>
+        </p:txBody>
       </p:sp>
       <p:sp>
         <p:nvSpPr>
@@ -7397,7 +7231,7 @@
           <a:bodyPr wrap="square" lIns="0" tIns="0" rIns="0" bIns="0" rtlCol="0" anchor="t"/>
           <a:lstStyle/>
           <a:p>
-            <a:pPr indent="0" marL="0">
+            <a:pPr marL="0" indent="0">
               <a:buNone/>
             </a:pPr>
             <a:r>
@@ -7433,7 +7267,7 @@
           <a:bodyPr wrap="square" lIns="0" tIns="0" rIns="0" bIns="0" rtlCol="0" anchor="t"/>
           <a:lstStyle/>
           <a:p>
-            <a:pPr indent="0" marL="0">
+            <a:pPr marL="0" indent="0">
               <a:buNone/>
             </a:pPr>
             <a:r>
@@ -7469,7 +7303,7 @@
           <a:bodyPr wrap="square" lIns="0" tIns="0" rIns="0" bIns="0" rtlCol="0" anchor="t"/>
           <a:lstStyle/>
           <a:p>
-            <a:pPr algn="l" indent="0" marL="0">
+            <a:pPr marL="0" indent="0" algn="l">
               <a:buNone/>
             </a:pPr>
             <a:r>
@@ -7504,7 +7338,7 @@
           </a:prstGeom>
           <a:extLst>
             <a:ext uri="{C572A759-6A51-4108-AA02-DFA0A04FC94B}">
-              <ma14:wrappingTextBoxFlag xmlns:ma14="http://schemas.microsoft.com/office/mac/drawingml/2011/main" val="0"/>
+              <ma14:wrappingTextBoxFlag xmlns:ma14="http://schemas.microsoft.com/office/mac/drawingml/2011/main" xmlns="" val="0"/>
             </a:ext>
           </a:extLst>
         </p:spPr>
@@ -7522,7 +7356,7 @@
           <a:p>
             <a:pPr algn="r"/>
             <a:fld id="{F7021451-1387-4CA6-816F-3879F97B5CBC}" type="slidenum">
-              <a:rPr b="0" lang="en-US"/>
+              <a:rPr lang="en-US" b="0"/>
               <a:t>14</a:t>
             </a:fld>
             <a:endParaRPr lang="en-US"/>
@@ -7557,9 +7391,11 @@
       <p:sp>
         <p:nvSpPr>
           <p:cNvPr id="2" name="Text 0"/>
-          <p:cNvSpPr/>
+          <p:cNvSpPr>
+            <a:spLocks noGrp="1"/>
+          </p:cNvSpPr>
           <p:nvPr>
-            <p:ph idx="100" type="title" hasCustomPrompt="1"/>
+            <p:ph type="title" idx="100" hasCustomPrompt="1"/>
           </p:nvPr>
         </p:nvSpPr>
         <p:spPr>
@@ -7577,7 +7413,7 @@
           <a:bodyPr wrap="square" lIns="0" tIns="0" rIns="0" bIns="0" rtlCol="0" anchor="ctr"/>
           <a:lstStyle/>
           <a:p>
-            <a:pPr algn="l" indent="0" marL="0">
+            <a:pPr marL="0" indent="0" algn="l">
               <a:buNone/>
             </a:pPr>
             <a:r>
@@ -7617,7 +7453,7 @@
           <a:bodyPr wrap="square" lIns="0" tIns="0" rIns="0" bIns="0" rtlCol="0" anchor="ctr"/>
           <a:lstStyle/>
           <a:p>
-            <a:pPr algn="ctr" indent="0" marL="0">
+            <a:pPr marL="0" indent="0" algn="ctr">
               <a:buNone/>
             </a:pPr>
             <a:r>
@@ -7765,6 +7601,13 @@
           </a:solidFill>
           <a:ln/>
         </p:spPr>
+        <p:txBody>
+          <a:bodyPr/>
+          <a:lstStyle/>
+          <a:p>
+            <a:endParaRPr lang="en-US"/>
+          </a:p>
+        </p:txBody>
       </p:sp>
       <p:sp>
         <p:nvSpPr>
@@ -7787,7 +7630,7 @@
           <a:bodyPr wrap="square" lIns="0" tIns="0" rIns="0" bIns="0" rtlCol="0" anchor="t"/>
           <a:lstStyle/>
           <a:p>
-            <a:pPr indent="0" marL="0">
+            <a:pPr marL="0" indent="0">
               <a:buNone/>
             </a:pPr>
             <a:r>
@@ -7804,7 +7647,7 @@
             <a:endParaRPr lang="en-US" sz="1400" dirty="0"/>
           </a:p>
           <a:p>
-            <a:pPr indent="0" marL="0">
+            <a:pPr marL="0" indent="0">
               <a:buNone/>
             </a:pPr>
             <a:r>
@@ -7821,7 +7664,7 @@
             <a:endParaRPr lang="en-US" sz="1400" dirty="0"/>
           </a:p>
           <a:p>
-            <a:pPr indent="0" marL="0">
+            <a:pPr marL="0" indent="0">
               <a:buNone/>
             </a:pPr>
             <a:r>
@@ -7838,7 +7681,7 @@
             <a:endParaRPr lang="en-US" sz="1400" dirty="0"/>
           </a:p>
           <a:p>
-            <a:pPr indent="0" marL="0">
+            <a:pPr marL="0" indent="0">
               <a:buNone/>
             </a:pPr>
             <a:r>
@@ -7855,7 +7698,7 @@
             <a:endParaRPr lang="en-US" sz="1400" dirty="0"/>
           </a:p>
           <a:p>
-            <a:pPr indent="0" marL="0">
+            <a:pPr marL="0" indent="0">
               <a:buNone/>
             </a:pPr>
             <a:r>
@@ -7872,7 +7715,7 @@
             <a:endParaRPr lang="en-US" sz="1400" dirty="0"/>
           </a:p>
           <a:p>
-            <a:pPr indent="0" marL="0">
+            <a:pPr marL="0" indent="0">
               <a:buNone/>
             </a:pPr>
             <a:r>
@@ -7889,7 +7732,7 @@
             <a:endParaRPr lang="en-US" sz="1400" dirty="0"/>
           </a:p>
           <a:p>
-            <a:pPr indent="0" marL="0">
+            <a:pPr marL="0" indent="0">
               <a:buNone/>
             </a:pPr>
             <a:r>
@@ -7906,7 +7749,7 @@
             <a:endParaRPr lang="en-US" sz="1400" dirty="0"/>
           </a:p>
           <a:p>
-            <a:pPr indent="0" marL="0">
+            <a:pPr marL="0" indent="0">
               <a:buNone/>
             </a:pPr>
             <a:r>
@@ -7945,7 +7788,7 @@
           <a:bodyPr wrap="square" lIns="0" tIns="0" rIns="0" bIns="0" rtlCol="0" anchor="ctr"/>
           <a:lstStyle/>
           <a:p>
-            <a:pPr indent="0" marL="0">
+            <a:pPr marL="0" indent="0">
               <a:buNone/>
             </a:pPr>
             <a:r>
@@ -7980,7 +7823,7 @@
           </a:prstGeom>
           <a:extLst>
             <a:ext uri="{C572A759-6A51-4108-AA02-DFA0A04FC94B}">
-              <ma14:wrappingTextBoxFlag xmlns:ma14="http://schemas.microsoft.com/office/mac/drawingml/2011/main" val="0"/>
+              <ma14:wrappingTextBoxFlag xmlns:ma14="http://schemas.microsoft.com/office/mac/drawingml/2011/main" xmlns="" val="0"/>
             </a:ext>
           </a:extLst>
         </p:spPr>
@@ -7998,7 +7841,7 @@
           <a:p>
             <a:pPr algn="r"/>
             <a:fld id="{F7021451-1387-4CA6-816F-3879F97B5CBC}" type="slidenum">
-              <a:rPr b="0" lang="en-US"/>
+              <a:rPr lang="en-US" b="0"/>
               <a:t>15</a:t>
             </a:fld>
             <a:endParaRPr lang="en-US"/>
@@ -8055,7 +7898,7 @@
           <a:bodyPr wrap="square" lIns="0" tIns="0" rIns="0" bIns="0" rtlCol="0" anchor="ctr"/>
           <a:lstStyle/>
           <a:p>
-            <a:pPr algn="ctr" indent="0" marL="0">
+            <a:pPr marL="0" indent="0" algn="ctr">
               <a:buNone/>
             </a:pPr>
             <a:r>
@@ -8073,9 +7916,11 @@
       <p:sp>
         <p:nvSpPr>
           <p:cNvPr id="3" name="Text 0"/>
-          <p:cNvSpPr/>
+          <p:cNvSpPr>
+            <a:spLocks noGrp="1"/>
+          </p:cNvSpPr>
           <p:nvPr>
-            <p:ph idx="100" type="title" hasCustomPrompt="1"/>
+            <p:ph type="title" idx="100" hasCustomPrompt="1"/>
           </p:nvPr>
         </p:nvSpPr>
         <p:spPr>
@@ -8093,7 +7938,7 @@
           <a:bodyPr wrap="square" lIns="0" tIns="0" rIns="0" bIns="0" rtlCol="0" anchor="b"/>
           <a:lstStyle/>
           <a:p>
-            <a:pPr algn="l" indent="0" marL="0">
+            <a:pPr marL="0" indent="0" algn="l">
               <a:buNone/>
             </a:pPr>
             <a:r>
@@ -8111,9 +7956,11 @@
       <p:sp>
         <p:nvSpPr>
           <p:cNvPr id="4" name="Text 0"/>
-          <p:cNvSpPr/>
+          <p:cNvSpPr>
+            <a:spLocks noGrp="1"/>
+          </p:cNvSpPr>
           <p:nvPr>
-            <p:ph idx="101" type="body" hasCustomPrompt="1"/>
+            <p:ph type="body" idx="101" hasCustomPrompt="1"/>
           </p:nvPr>
         </p:nvSpPr>
         <p:spPr>
@@ -8131,7 +7978,7 @@
           <a:bodyPr wrap="square" lIns="0" tIns="0" rIns="0" bIns="0" rtlCol="0" anchor="t"/>
           <a:lstStyle/>
           <a:p>
-            <a:pPr indent="0" marL="0">
+            <a:pPr marL="0" indent="0">
               <a:buNone/>
             </a:pPr>
             <a:r>
@@ -8174,9 +8021,11 @@
       <p:sp>
         <p:nvSpPr>
           <p:cNvPr id="2" name="Text 0"/>
-          <p:cNvSpPr/>
+          <p:cNvSpPr>
+            <a:spLocks noGrp="1"/>
+          </p:cNvSpPr>
           <p:nvPr>
-            <p:ph idx="100" type="title" hasCustomPrompt="1"/>
+            <p:ph type="title" idx="100" hasCustomPrompt="1"/>
           </p:nvPr>
         </p:nvSpPr>
         <p:spPr>
@@ -8194,7 +8043,7 @@
           <a:bodyPr wrap="square" lIns="0" tIns="0" rIns="0" bIns="0" rtlCol="0" anchor="ctr"/>
           <a:lstStyle/>
           <a:p>
-            <a:pPr algn="l" indent="0" marL="0">
+            <a:pPr marL="0" indent="0" algn="l">
               <a:buNone/>
             </a:pPr>
             <a:r>
@@ -8234,7 +8083,7 @@
           <a:bodyPr wrap="square" lIns="0" tIns="0" rIns="0" bIns="0" rtlCol="0" anchor="ctr"/>
           <a:lstStyle/>
           <a:p>
-            <a:pPr algn="ctr" indent="0" marL="0">
+            <a:pPr marL="0" indent="0" algn="ctr">
               <a:buNone/>
             </a:pPr>
             <a:r>
@@ -8270,6 +8119,13 @@
           </a:solidFill>
           <a:ln/>
         </p:spPr>
+        <p:txBody>
+          <a:bodyPr/>
+          <a:lstStyle/>
+          <a:p>
+            <a:endParaRPr lang="en-US"/>
+          </a:p>
+        </p:txBody>
       </p:sp>
       <p:sp>
         <p:nvSpPr>
@@ -8292,7 +8148,7 @@
           <a:bodyPr wrap="square" lIns="0" tIns="0" rIns="0" bIns="0" rtlCol="0" anchor="t"/>
           <a:lstStyle/>
           <a:p>
-            <a:pPr indent="0" marL="0">
+            <a:pPr marL="0" indent="0">
               <a:buNone/>
             </a:pPr>
             <a:r>
@@ -8306,9 +8162,6 @@
               </a:rPr>
               <a:t>claude     </a:t>
             </a:r>
-            <a:pPr indent="0" marL="0">
-              <a:buNone/>
-            </a:pPr>
             <a:r>
               <a:rPr lang="en-US" sz="1300" dirty="0">
                 <a:solidFill>
@@ -8323,7 +8176,7 @@
             <a:endParaRPr lang="en-US" sz="1300" dirty="0"/>
           </a:p>
           <a:p>
-            <a:pPr indent="0" marL="0">
+            <a:pPr marL="0" indent="0">
               <a:buNone/>
             </a:pPr>
             <a:r>
@@ -8337,9 +8190,6 @@
               </a:rPr>
               <a:t>claude -c  </a:t>
             </a:r>
-            <a:pPr indent="0" marL="0">
-              <a:buNone/>
-            </a:pPr>
             <a:r>
               <a:rPr lang="en-US" sz="1300" dirty="0">
                 <a:solidFill>
@@ -8354,7 +8204,7 @@
             <a:endParaRPr lang="en-US" sz="1300" dirty="0"/>
           </a:p>
           <a:p>
-            <a:pPr indent="0" marL="0">
+            <a:pPr marL="0" indent="0">
               <a:buNone/>
             </a:pPr>
             <a:r>
@@ -8368,9 +8218,6 @@
               </a:rPr>
               <a:t>/init      </a:t>
             </a:r>
-            <a:pPr indent="0" marL="0">
-              <a:buNone/>
-            </a:pPr>
             <a:r>
               <a:rPr lang="en-US" sz="1300" dirty="0">
                 <a:solidFill>
@@ -8385,7 +8232,7 @@
             <a:endParaRPr lang="en-US" sz="1300" dirty="0"/>
           </a:p>
           <a:p>
-            <a:pPr indent="0" marL="0">
+            <a:pPr marL="0" indent="0">
               <a:buNone/>
             </a:pPr>
             <a:r>
@@ -8399,9 +8246,6 @@
               </a:rPr>
               <a:t>/memory    </a:t>
             </a:r>
-            <a:pPr indent="0" marL="0">
-              <a:buNone/>
-            </a:pPr>
             <a:r>
               <a:rPr lang="en-US" sz="1300" dirty="0">
                 <a:solidFill>
@@ -8416,7 +8260,7 @@
             <a:endParaRPr lang="en-US" sz="1300" dirty="0"/>
           </a:p>
           <a:p>
-            <a:pPr indent="0" marL="0">
+            <a:pPr marL="0" indent="0">
               <a:buNone/>
             </a:pPr>
             <a:r>
@@ -8430,9 +8274,6 @@
               </a:rPr>
               <a:t>/exit      </a:t>
             </a:r>
-            <a:pPr indent="0" marL="0">
-              <a:buNone/>
-            </a:pPr>
             <a:r>
               <a:rPr lang="en-US" sz="1300" dirty="0">
                 <a:solidFill>
@@ -8469,6 +8310,13 @@
           </a:solidFill>
           <a:ln/>
         </p:spPr>
+        <p:txBody>
+          <a:bodyPr/>
+          <a:lstStyle/>
+          <a:p>
+            <a:endParaRPr lang="en-US"/>
+          </a:p>
+        </p:txBody>
       </p:sp>
       <p:sp>
         <p:nvSpPr>
@@ -8491,7 +8339,7 @@
           <a:bodyPr wrap="square" lIns="0" tIns="0" rIns="0" bIns="0" rtlCol="0" anchor="t"/>
           <a:lstStyle/>
           <a:p>
-            <a:pPr indent="0" marL="0">
+            <a:pPr marL="0" indent="0">
               <a:buNone/>
             </a:pPr>
             <a:r>
@@ -8639,7 +8487,7 @@
           <a:bodyPr wrap="square" lIns="0" tIns="0" rIns="0" bIns="0" rtlCol="0" anchor="t"/>
           <a:lstStyle/>
           <a:p>
-            <a:pPr algn="l" indent="0" marL="0">
+            <a:pPr marL="0" indent="0" algn="l">
               <a:buNone/>
             </a:pPr>
             <a:r>
@@ -8674,7 +8522,7 @@
           </a:prstGeom>
           <a:extLst>
             <a:ext uri="{C572A759-6A51-4108-AA02-DFA0A04FC94B}">
-              <ma14:wrappingTextBoxFlag xmlns:ma14="http://schemas.microsoft.com/office/mac/drawingml/2011/main" val="0"/>
+              <ma14:wrappingTextBoxFlag xmlns:ma14="http://schemas.microsoft.com/office/mac/drawingml/2011/main" xmlns="" val="0"/>
             </a:ext>
           </a:extLst>
         </p:spPr>
@@ -8692,7 +8540,7 @@
           <a:p>
             <a:pPr algn="r"/>
             <a:fld id="{F7021451-1387-4CA6-816F-3879F97B5CBC}" type="slidenum">
-              <a:rPr b="0" lang="en-US"/>
+              <a:rPr lang="en-US" b="0"/>
               <a:t>17</a:t>
             </a:fld>
             <a:endParaRPr lang="en-US"/>
@@ -8727,9 +8575,11 @@
       <p:sp>
         <p:nvSpPr>
           <p:cNvPr id="2" name="Text 0"/>
-          <p:cNvSpPr/>
+          <p:cNvSpPr>
+            <a:spLocks noGrp="1"/>
+          </p:cNvSpPr>
           <p:nvPr>
-            <p:ph idx="100" type="title" hasCustomPrompt="1"/>
+            <p:ph type="title" idx="100" hasCustomPrompt="1"/>
           </p:nvPr>
         </p:nvSpPr>
         <p:spPr>
@@ -8747,7 +8597,7 @@
           <a:bodyPr wrap="square" lIns="0" tIns="0" rIns="0" bIns="0" rtlCol="0" anchor="ctr"/>
           <a:lstStyle/>
           <a:p>
-            <a:pPr algn="l" indent="0" marL="0">
+            <a:pPr marL="0" indent="0" algn="l">
               <a:buNone/>
             </a:pPr>
             <a:r>
@@ -8787,7 +8637,7 @@
           <a:bodyPr wrap="square" lIns="0" tIns="0" rIns="0" bIns="0" rtlCol="0" anchor="ctr"/>
           <a:lstStyle/>
           <a:p>
-            <a:pPr algn="ctr" indent="0" marL="0">
+            <a:pPr marL="0" indent="0" algn="ctr">
               <a:buNone/>
             </a:pPr>
             <a:r>
@@ -8823,6 +8673,13 @@
           </a:solidFill>
           <a:ln/>
         </p:spPr>
+        <p:txBody>
+          <a:bodyPr/>
+          <a:lstStyle/>
+          <a:p>
+            <a:endParaRPr lang="en-US"/>
+          </a:p>
+        </p:txBody>
       </p:sp>
       <p:sp>
         <p:nvSpPr>
@@ -8845,7 +8702,7 @@
           <a:bodyPr wrap="square" lIns="0" tIns="0" rIns="0" bIns="0" rtlCol="0" anchor="t"/>
           <a:lstStyle/>
           <a:p>
-            <a:pPr algn="ctr" indent="0" marL="0">
+            <a:pPr marL="0" indent="0" algn="ctr">
               <a:buNone/>
             </a:pPr>
             <a:r>
@@ -8881,7 +8738,7 @@
           <a:bodyPr wrap="square" lIns="0" tIns="0" rIns="0" bIns="0" rtlCol="0" anchor="t"/>
           <a:lstStyle/>
           <a:p>
-            <a:pPr algn="ctr" indent="0" marL="0">
+            <a:pPr marL="0" indent="0" algn="ctr">
               <a:buNone/>
             </a:pPr>
             <a:r>
@@ -8919,6 +8776,13 @@
             <a:tailEnd type="triangle"/>
           </a:ln>
         </p:spPr>
+        <p:txBody>
+          <a:bodyPr/>
+          <a:lstStyle/>
+          <a:p>
+            <a:endParaRPr lang="en-US"/>
+          </a:p>
+        </p:txBody>
       </p:sp>
       <p:sp>
         <p:nvSpPr>
@@ -8941,6 +8805,13 @@
           </a:solidFill>
           <a:ln/>
         </p:spPr>
+        <p:txBody>
+          <a:bodyPr/>
+          <a:lstStyle/>
+          <a:p>
+            <a:endParaRPr lang="en-US"/>
+          </a:p>
+        </p:txBody>
       </p:sp>
       <p:sp>
         <p:nvSpPr>
@@ -8963,7 +8834,7 @@
           <a:bodyPr wrap="square" lIns="0" tIns="0" rIns="0" bIns="0" rtlCol="0" anchor="t"/>
           <a:lstStyle/>
           <a:p>
-            <a:pPr algn="ctr" indent="0" marL="0">
+            <a:pPr marL="0" indent="0" algn="ctr">
               <a:buNone/>
             </a:pPr>
             <a:r>
@@ -8999,7 +8870,7 @@
           <a:bodyPr wrap="square" lIns="0" tIns="0" rIns="0" bIns="0" rtlCol="0" anchor="t"/>
           <a:lstStyle/>
           <a:p>
-            <a:pPr algn="ctr" indent="0" marL="0">
+            <a:pPr marL="0" indent="0" algn="ctr">
               <a:buNone/>
             </a:pPr>
             <a:r>
@@ -9037,6 +8908,13 @@
             <a:tailEnd type="triangle"/>
           </a:ln>
         </p:spPr>
+        <p:txBody>
+          <a:bodyPr/>
+          <a:lstStyle/>
+          <a:p>
+            <a:endParaRPr lang="en-US"/>
+          </a:p>
+        </p:txBody>
       </p:sp>
       <p:sp>
         <p:nvSpPr>
@@ -9059,6 +8937,13 @@
           </a:solidFill>
           <a:ln/>
         </p:spPr>
+        <p:txBody>
+          <a:bodyPr/>
+          <a:lstStyle/>
+          <a:p>
+            <a:endParaRPr lang="en-US"/>
+          </a:p>
+        </p:txBody>
       </p:sp>
       <p:sp>
         <p:nvSpPr>
@@ -9081,7 +8966,7 @@
           <a:bodyPr wrap="square" lIns="0" tIns="0" rIns="0" bIns="0" rtlCol="0" anchor="t"/>
           <a:lstStyle/>
           <a:p>
-            <a:pPr algn="ctr" indent="0" marL="0">
+            <a:pPr marL="0" indent="0" algn="ctr">
               <a:buNone/>
             </a:pPr>
             <a:r>
@@ -9117,7 +9002,7 @@
           <a:bodyPr wrap="square" lIns="0" tIns="0" rIns="0" bIns="0" rtlCol="0" anchor="t"/>
           <a:lstStyle/>
           <a:p>
-            <a:pPr algn="ctr" indent="0" marL="0">
+            <a:pPr marL="0" indent="0" algn="ctr">
               <a:buNone/>
             </a:pPr>
             <a:r>
@@ -9155,6 +9040,13 @@
             <a:tailEnd type="triangle"/>
           </a:ln>
         </p:spPr>
+        <p:txBody>
+          <a:bodyPr/>
+          <a:lstStyle/>
+          <a:p>
+            <a:endParaRPr lang="en-US"/>
+          </a:p>
+        </p:txBody>
       </p:sp>
       <p:sp>
         <p:nvSpPr>
@@ -9177,6 +9069,13 @@
           </a:solidFill>
           <a:ln/>
         </p:spPr>
+        <p:txBody>
+          <a:bodyPr/>
+          <a:lstStyle/>
+          <a:p>
+            <a:endParaRPr lang="en-US"/>
+          </a:p>
+        </p:txBody>
       </p:sp>
       <p:sp>
         <p:nvSpPr>
@@ -9199,7 +9098,7 @@
           <a:bodyPr wrap="square" lIns="0" tIns="0" rIns="0" bIns="0" rtlCol="0" anchor="t"/>
           <a:lstStyle/>
           <a:p>
-            <a:pPr algn="ctr" indent="0" marL="0">
+            <a:pPr marL="0" indent="0" algn="ctr">
               <a:buNone/>
             </a:pPr>
             <a:r>
@@ -9235,7 +9134,7 @@
           <a:bodyPr wrap="square" lIns="0" tIns="0" rIns="0" bIns="0" rtlCol="0" anchor="t"/>
           <a:lstStyle/>
           <a:p>
-            <a:pPr algn="ctr" indent="0" marL="0">
+            <a:pPr marL="0" indent="0" algn="ctr">
               <a:buNone/>
             </a:pPr>
             <a:r>
@@ -9273,6 +9172,13 @@
             <a:tailEnd type="triangle"/>
           </a:ln>
         </p:spPr>
+        <p:txBody>
+          <a:bodyPr/>
+          <a:lstStyle/>
+          <a:p>
+            <a:endParaRPr lang="en-US"/>
+          </a:p>
+        </p:txBody>
       </p:sp>
       <p:sp>
         <p:nvSpPr>
@@ -9295,6 +9201,13 @@
           </a:solidFill>
           <a:ln/>
         </p:spPr>
+        <p:txBody>
+          <a:bodyPr/>
+          <a:lstStyle/>
+          <a:p>
+            <a:endParaRPr lang="en-US"/>
+          </a:p>
+        </p:txBody>
       </p:sp>
       <p:sp>
         <p:nvSpPr>
@@ -9317,7 +9230,7 @@
           <a:bodyPr wrap="square" lIns="0" tIns="0" rIns="0" bIns="0" rtlCol="0" anchor="t"/>
           <a:lstStyle/>
           <a:p>
-            <a:pPr algn="ctr" indent="0" marL="0">
+            <a:pPr marL="0" indent="0" algn="ctr">
               <a:buNone/>
             </a:pPr>
             <a:r>
@@ -9353,7 +9266,7 @@
           <a:bodyPr wrap="square" lIns="0" tIns="0" rIns="0" bIns="0" rtlCol="0" anchor="t"/>
           <a:lstStyle/>
           <a:p>
-            <a:pPr algn="ctr" indent="0" marL="0">
+            <a:pPr marL="0" indent="0" algn="ctr">
               <a:buNone/>
             </a:pPr>
             <a:r>
@@ -9391,6 +9304,13 @@
             <a:tailEnd type="triangle"/>
           </a:ln>
         </p:spPr>
+        <p:txBody>
+          <a:bodyPr/>
+          <a:lstStyle/>
+          <a:p>
+            <a:endParaRPr lang="en-US"/>
+          </a:p>
+        </p:txBody>
       </p:sp>
       <p:sp>
         <p:nvSpPr>
@@ -9413,6 +9333,13 @@
           </a:solidFill>
           <a:ln/>
         </p:spPr>
+        <p:txBody>
+          <a:bodyPr/>
+          <a:lstStyle/>
+          <a:p>
+            <a:endParaRPr lang="en-US"/>
+          </a:p>
+        </p:txBody>
       </p:sp>
       <p:sp>
         <p:nvSpPr>
@@ -9435,7 +9362,7 @@
           <a:bodyPr wrap="square" lIns="0" tIns="0" rIns="0" bIns="0" rtlCol="0" anchor="t"/>
           <a:lstStyle/>
           <a:p>
-            <a:pPr algn="ctr" indent="0" marL="0">
+            <a:pPr marL="0" indent="0" algn="ctr">
               <a:buNone/>
             </a:pPr>
             <a:r>
@@ -9471,7 +9398,7 @@
           <a:bodyPr wrap="square" lIns="0" tIns="0" rIns="0" bIns="0" rtlCol="0" anchor="t"/>
           <a:lstStyle/>
           <a:p>
-            <a:pPr algn="ctr" indent="0" marL="0">
+            <a:pPr marL="0" indent="0" algn="ctr">
               <a:buNone/>
             </a:pPr>
             <a:r>
@@ -9507,7 +9434,7 @@
           <a:bodyPr wrap="square" lIns="0" tIns="0" rIns="0" bIns="0" rtlCol="0" anchor="t"/>
           <a:lstStyle/>
           <a:p>
-            <a:pPr algn="l" indent="0" marL="0">
+            <a:pPr marL="0" indent="0" algn="l">
               <a:buNone/>
             </a:pPr>
             <a:r>
@@ -9543,6 +9470,13 @@
           </a:solidFill>
           <a:ln/>
         </p:spPr>
+        <p:txBody>
+          <a:bodyPr/>
+          <a:lstStyle/>
+          <a:p>
+            <a:endParaRPr lang="en-US"/>
+          </a:p>
+        </p:txBody>
       </p:sp>
       <p:sp>
         <p:nvSpPr>
@@ -9565,7 +9499,7 @@
           <a:bodyPr wrap="square" lIns="0" tIns="0" rIns="0" bIns="0" rtlCol="0" anchor="t"/>
           <a:lstStyle/>
           <a:p>
-            <a:pPr indent="0" marL="0">
+            <a:pPr marL="0" indent="0">
               <a:buNone/>
             </a:pPr>
             <a:r>
@@ -9601,7 +9535,7 @@
           <a:bodyPr wrap="square" lIns="0" tIns="0" rIns="0" bIns="0" rtlCol="0" anchor="t"/>
           <a:lstStyle/>
           <a:p>
-            <a:pPr indent="0" marL="0">
+            <a:pPr marL="0" indent="0">
               <a:buNone/>
             </a:pPr>
             <a:r>
@@ -9637,6 +9571,13 @@
           </a:solidFill>
           <a:ln/>
         </p:spPr>
+        <p:txBody>
+          <a:bodyPr/>
+          <a:lstStyle/>
+          <a:p>
+            <a:endParaRPr lang="en-US"/>
+          </a:p>
+        </p:txBody>
       </p:sp>
       <p:sp>
         <p:nvSpPr>
@@ -9659,7 +9600,7 @@
           <a:bodyPr wrap="square" lIns="0" tIns="0" rIns="0" bIns="0" rtlCol="0" anchor="t"/>
           <a:lstStyle/>
           <a:p>
-            <a:pPr indent="0" marL="0">
+            <a:pPr marL="0" indent="0">
               <a:buNone/>
             </a:pPr>
             <a:r>
@@ -9695,7 +9636,7 @@
           <a:bodyPr wrap="square" lIns="0" tIns="0" rIns="0" bIns="0" rtlCol="0" anchor="t"/>
           <a:lstStyle/>
           <a:p>
-            <a:pPr indent="0" marL="0">
+            <a:pPr marL="0" indent="0">
               <a:buNone/>
             </a:pPr>
             <a:r>
@@ -9731,6 +9672,13 @@
           </a:solidFill>
           <a:ln/>
         </p:spPr>
+        <p:txBody>
+          <a:bodyPr/>
+          <a:lstStyle/>
+          <a:p>
+            <a:endParaRPr lang="en-US"/>
+          </a:p>
+        </p:txBody>
       </p:sp>
       <p:sp>
         <p:nvSpPr>
@@ -9753,7 +9701,7 @@
           <a:bodyPr wrap="square" lIns="0" tIns="0" rIns="0" bIns="0" rtlCol="0" anchor="t"/>
           <a:lstStyle/>
           <a:p>
-            <a:pPr indent="0" marL="0">
+            <a:pPr marL="0" indent="0">
               <a:buNone/>
             </a:pPr>
             <a:r>
@@ -9789,7 +9737,7 @@
           <a:bodyPr wrap="square" lIns="0" tIns="0" rIns="0" bIns="0" rtlCol="0" anchor="t"/>
           <a:lstStyle/>
           <a:p>
-            <a:pPr indent="0" marL="0">
+            <a:pPr marL="0" indent="0">
               <a:buNone/>
             </a:pPr>
             <a:r>
@@ -9806,7 +9754,7 @@
       </p:sp>
       <p:sp>
         <p:nvSpPr>
-          <p:cNvPr id="25" name="Slide Number Placeholder 0"/>
+          <p:cNvPr id="4" name="Slide Number Placeholder 0"/>
           <p:cNvSpPr>
             <a:spLocks noGrp="1"/>
           </p:cNvSpPr>
@@ -9824,7 +9772,7 @@
           </a:prstGeom>
           <a:extLst>
             <a:ext uri="{C572A759-6A51-4108-AA02-DFA0A04FC94B}">
-              <ma14:wrappingTextBoxFlag xmlns:ma14="http://schemas.microsoft.com/office/mac/drawingml/2011/main" val="0"/>
+              <ma14:wrappingTextBoxFlag xmlns:ma14="http://schemas.microsoft.com/office/mac/drawingml/2011/main" xmlns="" val="0"/>
             </a:ext>
           </a:extLst>
         </p:spPr>
@@ -9842,7 +9790,7 @@
           <a:p>
             <a:pPr algn="r"/>
             <a:fld id="{F7021451-1387-4CA6-816F-3879F97B5CBC}" type="slidenum">
-              <a:rPr b="0" lang="en-US"/>
+              <a:rPr lang="en-US" b="0"/>
               <a:t>18</a:t>
             </a:fld>
             <a:endParaRPr lang="en-US"/>
@@ -9877,9 +9825,11 @@
       <p:sp>
         <p:nvSpPr>
           <p:cNvPr id="2" name="Text 0"/>
-          <p:cNvSpPr/>
+          <p:cNvSpPr>
+            <a:spLocks noGrp="1"/>
+          </p:cNvSpPr>
           <p:nvPr>
-            <p:ph idx="100" type="title" hasCustomPrompt="1"/>
+            <p:ph type="title" idx="100" hasCustomPrompt="1"/>
           </p:nvPr>
         </p:nvSpPr>
         <p:spPr>
@@ -9897,7 +9847,7 @@
           <a:bodyPr wrap="square" lIns="0" tIns="0" rIns="0" bIns="0" rtlCol="0" anchor="ctr"/>
           <a:lstStyle/>
           <a:p>
-            <a:pPr algn="l" indent="0" marL="0">
+            <a:pPr marL="0" indent="0" algn="l">
               <a:buNone/>
             </a:pPr>
             <a:r>
@@ -9937,7 +9887,7 @@
           <a:bodyPr wrap="square" lIns="0" tIns="0" rIns="0" bIns="0" rtlCol="0" anchor="ctr"/>
           <a:lstStyle/>
           <a:p>
-            <a:pPr algn="ctr" indent="0" marL="0">
+            <a:pPr marL="0" indent="0" algn="ctr">
               <a:buNone/>
             </a:pPr>
             <a:r>
@@ -10067,7 +10017,7 @@
           <a:bodyPr wrap="square" lIns="0" tIns="0" rIns="0" bIns="0" rtlCol="0" anchor="t"/>
           <a:lstStyle/>
           <a:p>
-            <a:pPr algn="l" indent="0" marL="0">
+            <a:pPr marL="0" indent="0" algn="l">
               <a:buNone/>
             </a:pPr>
             <a:r>
@@ -10103,6 +10053,13 @@
           </a:solidFill>
           <a:ln/>
         </p:spPr>
+        <p:txBody>
+          <a:bodyPr/>
+          <a:lstStyle/>
+          <a:p>
+            <a:endParaRPr lang="en-US"/>
+          </a:p>
+        </p:txBody>
       </p:sp>
       <p:sp>
         <p:nvSpPr>
@@ -10125,7 +10082,7 @@
           <a:bodyPr wrap="square" lIns="0" tIns="0" rIns="0" bIns="0" rtlCol="0" anchor="t"/>
           <a:lstStyle/>
           <a:p>
-            <a:pPr indent="0" marL="0">
+            <a:pPr marL="0" indent="0">
               <a:buNone/>
             </a:pPr>
             <a:r>
@@ -10142,7 +10099,7 @@
             <a:endParaRPr lang="en-US" sz="1500" dirty="0"/>
           </a:p>
           <a:p>
-            <a:pPr indent="0" marL="0">
+            <a:pPr marL="0" indent="0">
               <a:buNone/>
             </a:pPr>
             <a:r>
@@ -10159,7 +10116,7 @@
             <a:endParaRPr lang="en-US" sz="1500" dirty="0"/>
           </a:p>
           <a:p>
-            <a:pPr indent="0" marL="0">
+            <a:pPr marL="0" indent="0">
               <a:buNone/>
             </a:pPr>
             <a:r>
@@ -10176,7 +10133,7 @@
             <a:endParaRPr lang="en-US" sz="1500" dirty="0"/>
           </a:p>
           <a:p>
-            <a:pPr indent="0" marL="0">
+            <a:pPr marL="0" indent="0">
               <a:buNone/>
             </a:pPr>
             <a:r>
@@ -10193,7 +10150,7 @@
             <a:endParaRPr lang="en-US" sz="1500" dirty="0"/>
           </a:p>
           <a:p>
-            <a:pPr indent="0" marL="0">
+            <a:pPr marL="0" indent="0">
               <a:buNone/>
             </a:pPr>
             <a:r>
@@ -10210,7 +10167,7 @@
             <a:endParaRPr lang="en-US" sz="1500" dirty="0"/>
           </a:p>
           <a:p>
-            <a:pPr indent="0" marL="0">
+            <a:pPr marL="0" indent="0">
               <a:buNone/>
             </a:pPr>
             <a:r>
@@ -10227,7 +10184,7 @@
             <a:endParaRPr lang="en-US" sz="1500" dirty="0"/>
           </a:p>
           <a:p>
-            <a:pPr indent="0" marL="0">
+            <a:pPr marL="0" indent="0">
               <a:buNone/>
             </a:pPr>
             <a:r>
@@ -10244,7 +10201,7 @@
             <a:endParaRPr lang="en-US" sz="1500" dirty="0"/>
           </a:p>
           <a:p>
-            <a:pPr indent="0" marL="0">
+            <a:pPr marL="0" indent="0">
               <a:buNone/>
             </a:pPr>
             <a:r>
@@ -10261,7 +10218,7 @@
             <a:endParaRPr lang="en-US" sz="1500" dirty="0"/>
           </a:p>
           <a:p>
-            <a:pPr indent="0" marL="0">
+            <a:pPr marL="0" indent="0">
               <a:buNone/>
             </a:pPr>
             <a:r>
@@ -10300,7 +10257,7 @@
           <a:bodyPr wrap="square" lIns="0" tIns="0" rIns="0" bIns="0" rtlCol="0" anchor="ctr"/>
           <a:lstStyle/>
           <a:p>
-            <a:pPr indent="0" marL="0">
+            <a:pPr marL="0" indent="0">
               <a:buNone/>
             </a:pPr>
             <a:r>
@@ -10335,7 +10292,7 @@
           </a:prstGeom>
           <a:extLst>
             <a:ext uri="{C572A759-6A51-4108-AA02-DFA0A04FC94B}">
-              <ma14:wrappingTextBoxFlag xmlns:ma14="http://schemas.microsoft.com/office/mac/drawingml/2011/main" val="0"/>
+              <ma14:wrappingTextBoxFlag xmlns:ma14="http://schemas.microsoft.com/office/mac/drawingml/2011/main" xmlns="" val="0"/>
             </a:ext>
           </a:extLst>
         </p:spPr>
@@ -10353,7 +10310,7 @@
           <a:p>
             <a:pPr algn="r"/>
             <a:fld id="{F7021451-1387-4CA6-816F-3879F97B5CBC}" type="slidenum">
-              <a:rPr b="0" lang="en-US"/>
+              <a:rPr lang="en-US" b="0"/>
               <a:t>19</a:t>
             </a:fld>
             <a:endParaRPr lang="en-US"/>
@@ -10388,9 +10345,11 @@
       <p:sp>
         <p:nvSpPr>
           <p:cNvPr id="2" name="Text 0"/>
-          <p:cNvSpPr/>
+          <p:cNvSpPr>
+            <a:spLocks noGrp="1"/>
+          </p:cNvSpPr>
           <p:nvPr>
-            <p:ph idx="100" type="title" hasCustomPrompt="1"/>
+            <p:ph type="title" idx="100" hasCustomPrompt="1"/>
           </p:nvPr>
         </p:nvSpPr>
         <p:spPr>
@@ -10408,7 +10367,7 @@
           <a:bodyPr wrap="square" lIns="0" tIns="0" rIns="0" bIns="0" rtlCol="0" anchor="ctr"/>
           <a:lstStyle/>
           <a:p>
-            <a:pPr algn="l" indent="0" marL="0">
+            <a:pPr marL="0" indent="0" algn="l">
               <a:buNone/>
             </a:pPr>
             <a:r>
@@ -10444,7 +10403,7 @@
           <a:bodyPr wrap="square" lIns="0" tIns="0" rIns="0" bIns="0" rtlCol="0" anchor="t"/>
           <a:lstStyle/>
           <a:p>
-            <a:pPr algn="l" indent="0" marL="0">
+            <a:pPr marL="0" indent="0" algn="l">
               <a:buNone/>
             </a:pPr>
             <a:r>
@@ -10480,7 +10439,7 @@
           <a:bodyPr wrap="square" lIns="0" tIns="0" rIns="0" bIns="0" rtlCol="0" anchor="t"/>
           <a:lstStyle/>
           <a:p>
-            <a:pPr algn="l" indent="0" marL="0">
+            <a:pPr marL="0" indent="0" algn="l">
               <a:buNone/>
             </a:pPr>
             <a:r>
@@ -10518,7 +10477,7 @@
           <a:bodyPr wrap="square" lIns="0" tIns="0" rIns="0" bIns="0" rtlCol="0" anchor="ctr"/>
           <a:lstStyle/>
           <a:p>
-            <a:pPr algn="ctr" indent="0" marL="0">
+            <a:pPr marL="0" indent="0" algn="ctr">
               <a:buNone/>
             </a:pPr>
             <a:r>
@@ -10554,7 +10513,7 @@
           <a:bodyPr wrap="square" lIns="0" tIns="0" rIns="0" bIns="0" rtlCol="0" anchor="t"/>
           <a:lstStyle/>
           <a:p>
-            <a:pPr algn="l" indent="0" marL="0">
+            <a:pPr marL="0" indent="0" algn="l">
               <a:buNone/>
             </a:pPr>
             <a:r>
@@ -10590,7 +10549,7 @@
           <a:bodyPr wrap="square" lIns="0" tIns="0" rIns="0" bIns="0" rtlCol="0" anchor="t"/>
           <a:lstStyle/>
           <a:p>
-            <a:pPr algn="r" indent="0" marL="0">
+            <a:pPr marL="0" indent="0" algn="r">
               <a:buNone/>
             </a:pPr>
             <a:r>
@@ -10628,7 +10587,7 @@
           <a:bodyPr wrap="square" lIns="0" tIns="0" rIns="0" bIns="0" rtlCol="0" anchor="ctr"/>
           <a:lstStyle/>
           <a:p>
-            <a:pPr algn="ctr" indent="0" marL="0">
+            <a:pPr marL="0" indent="0" algn="ctr">
               <a:buNone/>
             </a:pPr>
             <a:r>
@@ -10664,7 +10623,7 @@
           <a:bodyPr wrap="square" lIns="0" tIns="0" rIns="0" bIns="0" rtlCol="0" anchor="t"/>
           <a:lstStyle/>
           <a:p>
-            <a:pPr algn="l" indent="0" marL="0">
+            <a:pPr marL="0" indent="0" algn="l">
               <a:buNone/>
             </a:pPr>
             <a:r>
@@ -10700,7 +10659,7 @@
           <a:bodyPr wrap="square" lIns="0" tIns="0" rIns="0" bIns="0" rtlCol="0" anchor="t"/>
           <a:lstStyle/>
           <a:p>
-            <a:pPr algn="r" indent="0" marL="0">
+            <a:pPr marL="0" indent="0" algn="r">
               <a:buNone/>
             </a:pPr>
             <a:r>
@@ -10738,7 +10697,7 @@
           <a:bodyPr wrap="square" lIns="0" tIns="0" rIns="0" bIns="0" rtlCol="0" anchor="ctr"/>
           <a:lstStyle/>
           <a:p>
-            <a:pPr algn="ctr" indent="0" marL="0">
+            <a:pPr marL="0" indent="0" algn="ctr">
               <a:buNone/>
             </a:pPr>
             <a:r>
@@ -10774,7 +10733,7 @@
           <a:bodyPr wrap="square" lIns="0" tIns="0" rIns="0" bIns="0" rtlCol="0" anchor="t"/>
           <a:lstStyle/>
           <a:p>
-            <a:pPr algn="l" indent="0" marL="0">
+            <a:pPr marL="0" indent="0" algn="l">
               <a:buNone/>
             </a:pPr>
             <a:r>
@@ -10810,7 +10769,7 @@
           <a:bodyPr wrap="square" lIns="0" tIns="0" rIns="0" bIns="0" rtlCol="0" anchor="t"/>
           <a:lstStyle/>
           <a:p>
-            <a:pPr algn="r" indent="0" marL="0">
+            <a:pPr marL="0" indent="0" algn="r">
               <a:buNone/>
             </a:pPr>
             <a:r>
@@ -10848,7 +10807,7 @@
           <a:bodyPr wrap="square" lIns="0" tIns="0" rIns="0" bIns="0" rtlCol="0" anchor="ctr"/>
           <a:lstStyle/>
           <a:p>
-            <a:pPr algn="ctr" indent="0" marL="0">
+            <a:pPr marL="0" indent="0" algn="ctr">
               <a:buNone/>
             </a:pPr>
             <a:r>
@@ -10884,7 +10843,7 @@
           <a:bodyPr wrap="square" lIns="0" tIns="0" rIns="0" bIns="0" rtlCol="0" anchor="t"/>
           <a:lstStyle/>
           <a:p>
-            <a:pPr algn="l" indent="0" marL="0">
+            <a:pPr marL="0" indent="0" algn="l">
               <a:buNone/>
             </a:pPr>
             <a:r>
@@ -10920,7 +10879,7 @@
           <a:bodyPr wrap="square" lIns="0" tIns="0" rIns="0" bIns="0" rtlCol="0" anchor="t"/>
           <a:lstStyle/>
           <a:p>
-            <a:pPr algn="r" indent="0" marL="0">
+            <a:pPr marL="0" indent="0" algn="r">
               <a:buNone/>
             </a:pPr>
             <a:r>
@@ -10958,7 +10917,7 @@
           <a:bodyPr wrap="square" lIns="0" tIns="0" rIns="0" bIns="0" rtlCol="0" anchor="ctr"/>
           <a:lstStyle/>
           <a:p>
-            <a:pPr algn="ctr" indent="0" marL="0">
+            <a:pPr marL="0" indent="0" algn="ctr">
               <a:buNone/>
             </a:pPr>
             <a:r>
@@ -10994,7 +10953,7 @@
           <a:bodyPr wrap="square" lIns="0" tIns="0" rIns="0" bIns="0" rtlCol="0" anchor="t"/>
           <a:lstStyle/>
           <a:p>
-            <a:pPr algn="l" indent="0" marL="0">
+            <a:pPr marL="0" indent="0" algn="l">
               <a:buNone/>
             </a:pPr>
             <a:r>
@@ -11030,7 +10989,7 @@
           <a:bodyPr wrap="square" lIns="0" tIns="0" rIns="0" bIns="0" rtlCol="0" anchor="t"/>
           <a:lstStyle/>
           <a:p>
-            <a:pPr algn="r" indent="0" marL="0">
+            <a:pPr marL="0" indent="0" algn="r">
               <a:buNone/>
             </a:pPr>
             <a:r>
@@ -11068,7 +11027,7 @@
           <a:bodyPr wrap="square" lIns="0" tIns="0" rIns="0" bIns="0" rtlCol="0" anchor="ctr"/>
           <a:lstStyle/>
           <a:p>
-            <a:pPr algn="ctr" indent="0" marL="0">
+            <a:pPr marL="0" indent="0" algn="ctr">
               <a:buNone/>
             </a:pPr>
             <a:r>
@@ -11104,7 +11063,7 @@
           <a:bodyPr wrap="square" lIns="0" tIns="0" rIns="0" bIns="0" rtlCol="0" anchor="t"/>
           <a:lstStyle/>
           <a:p>
-            <a:pPr algn="l" indent="0" marL="0">
+            <a:pPr marL="0" indent="0" algn="l">
               <a:buNone/>
             </a:pPr>
             <a:r>
@@ -11140,7 +11099,7 @@
           <a:bodyPr wrap="square" lIns="0" tIns="0" rIns="0" bIns="0" rtlCol="0" anchor="t"/>
           <a:lstStyle/>
           <a:p>
-            <a:pPr algn="r" indent="0" marL="0">
+            <a:pPr marL="0" indent="0" algn="r">
               <a:buNone/>
             </a:pPr>
             <a:r>
@@ -11178,7 +11137,7 @@
           <a:bodyPr wrap="square" lIns="0" tIns="0" rIns="0" bIns="0" rtlCol="0" anchor="ctr"/>
           <a:lstStyle/>
           <a:p>
-            <a:pPr algn="ctr" indent="0" marL="0">
+            <a:pPr marL="0" indent="0" algn="ctr">
               <a:buNone/>
             </a:pPr>
             <a:r>
@@ -11214,7 +11173,7 @@
           <a:bodyPr wrap="square" lIns="0" tIns="0" rIns="0" bIns="0" rtlCol="0" anchor="t"/>
           <a:lstStyle/>
           <a:p>
-            <a:pPr algn="l" indent="0" marL="0">
+            <a:pPr marL="0" indent="0" algn="l">
               <a:buNone/>
             </a:pPr>
             <a:r>
@@ -11250,7 +11209,7 @@
           <a:bodyPr wrap="square" lIns="0" tIns="0" rIns="0" bIns="0" rtlCol="0" anchor="t"/>
           <a:lstStyle/>
           <a:p>
-            <a:pPr algn="r" indent="0" marL="0">
+            <a:pPr marL="0" indent="0" algn="r">
               <a:buNone/>
             </a:pPr>
             <a:r>
@@ -11288,7 +11247,7 @@
           <a:bodyPr wrap="square" lIns="0" tIns="0" rIns="0" bIns="0" rtlCol="0" anchor="ctr"/>
           <a:lstStyle/>
           <a:p>
-            <a:pPr algn="ctr" indent="0" marL="0">
+            <a:pPr marL="0" indent="0" algn="ctr">
               <a:buNone/>
             </a:pPr>
             <a:r>
@@ -11324,7 +11283,7 @@
           <a:bodyPr wrap="square" lIns="0" tIns="0" rIns="0" bIns="0" rtlCol="0" anchor="t"/>
           <a:lstStyle/>
           <a:p>
-            <a:pPr algn="l" indent="0" marL="0">
+            <a:pPr marL="0" indent="0" algn="l">
               <a:buNone/>
             </a:pPr>
             <a:r>
@@ -11360,7 +11319,7 @@
           <a:bodyPr wrap="square" lIns="0" tIns="0" rIns="0" bIns="0" rtlCol="0" anchor="t"/>
           <a:lstStyle/>
           <a:p>
-            <a:pPr algn="r" indent="0" marL="0">
+            <a:pPr marL="0" indent="0" algn="r">
               <a:buNone/>
             </a:pPr>
             <a:r>
@@ -11398,7 +11357,7 @@
           <a:bodyPr wrap="square" lIns="0" tIns="0" rIns="0" bIns="0" rtlCol="0" anchor="ctr"/>
           <a:lstStyle/>
           <a:p>
-            <a:pPr algn="ctr" indent="0" marL="0">
+            <a:pPr marL="0" indent="0" algn="ctr">
               <a:buNone/>
             </a:pPr>
             <a:r>
@@ -11434,7 +11393,7 @@
           <a:bodyPr wrap="square" lIns="0" tIns="0" rIns="0" bIns="0" rtlCol="0" anchor="t"/>
           <a:lstStyle/>
           <a:p>
-            <a:pPr algn="l" indent="0" marL="0">
+            <a:pPr marL="0" indent="0" algn="l">
               <a:buNone/>
             </a:pPr>
             <a:r>
@@ -11470,7 +11429,7 @@
           <a:bodyPr wrap="square" lIns="0" tIns="0" rIns="0" bIns="0" rtlCol="0" anchor="t"/>
           <a:lstStyle/>
           <a:p>
-            <a:pPr algn="r" indent="0" marL="0">
+            <a:pPr marL="0" indent="0" algn="r">
               <a:buNone/>
             </a:pPr>
             <a:r>
@@ -11506,7 +11465,7 @@
           <a:bodyPr wrap="square" lIns="0" tIns="0" rIns="0" bIns="0" rtlCol="0" anchor="t"/>
           <a:lstStyle/>
           <a:p>
-            <a:pPr algn="l" indent="0" marL="0">
+            <a:pPr marL="0" indent="0" algn="l">
               <a:buNone/>
             </a:pPr>
             <a:r>
@@ -11523,7 +11482,7 @@
       </p:sp>
       <p:sp>
         <p:nvSpPr>
-          <p:cNvPr id="25" name="Slide Number Placeholder 0"/>
+          <p:cNvPr id="3" name="Slide Number Placeholder 0"/>
           <p:cNvSpPr>
             <a:spLocks noGrp="1"/>
           </p:cNvSpPr>
@@ -11541,7 +11500,7 @@
           </a:prstGeom>
           <a:extLst>
             <a:ext uri="{C572A759-6A51-4108-AA02-DFA0A04FC94B}">
-              <ma14:wrappingTextBoxFlag xmlns:ma14="http://schemas.microsoft.com/office/mac/drawingml/2011/main" val="0"/>
+              <ma14:wrappingTextBoxFlag xmlns:ma14="http://schemas.microsoft.com/office/mac/drawingml/2011/main" xmlns="" val="0"/>
             </a:ext>
           </a:extLst>
         </p:spPr>
@@ -11559,7 +11518,7 @@
           <a:p>
             <a:pPr algn="r"/>
             <a:fld id="{F7021451-1387-4CA6-816F-3879F97B5CBC}" type="slidenum">
-              <a:rPr b="0" lang="en-US"/>
+              <a:rPr lang="en-US" b="0"/>
               <a:t>2</a:t>
             </a:fld>
             <a:endParaRPr lang="en-US"/>
@@ -11594,9 +11553,11 @@
       <p:sp>
         <p:nvSpPr>
           <p:cNvPr id="2" name="Text 0"/>
-          <p:cNvSpPr/>
+          <p:cNvSpPr>
+            <a:spLocks noGrp="1"/>
+          </p:cNvSpPr>
           <p:nvPr>
-            <p:ph idx="100" type="title" hasCustomPrompt="1"/>
+            <p:ph type="title" idx="100" hasCustomPrompt="1"/>
           </p:nvPr>
         </p:nvSpPr>
         <p:spPr>
@@ -11614,7 +11575,7 @@
           <a:bodyPr wrap="square" lIns="0" tIns="0" rIns="0" bIns="0" rtlCol="0" anchor="ctr"/>
           <a:lstStyle/>
           <a:p>
-            <a:pPr algn="l" indent="0" marL="0">
+            <a:pPr marL="0" indent="0" algn="l">
               <a:buNone/>
             </a:pPr>
             <a:r>
@@ -11654,7 +11615,7 @@
           <a:bodyPr wrap="square" lIns="0" tIns="0" rIns="0" bIns="0" rtlCol="0" anchor="ctr"/>
           <a:lstStyle/>
           <a:p>
-            <a:pPr algn="ctr" indent="0" marL="0">
+            <a:pPr marL="0" indent="0" algn="ctr">
               <a:buNone/>
             </a:pPr>
             <a:r>
@@ -11685,15 +11646,27 @@
         </p:nvGraphicFramePr>
         <p:xfrm>
           <a:off x="457200" y="1188720"/>
-          <a:ext cx="8229600" cy="914400"/>
+          <a:ext cx="8229600" cy="2357120"/>
         </p:xfrm>
         <a:graphic>
           <a:graphicData uri="http://schemas.openxmlformats.org/drawingml/2006/table">
             <a:tbl>
               <a:tblPr/>
               <a:tblGrid>
-                <a:gridCol w="3291840"/>
-                <a:gridCol w="4937760"/>
+                <a:gridCol w="3291840">
+                  <a:extLst>
+                    <a:ext uri="{9D8B030D-6E8A-4147-A177-3AD203B41FA5}">
+                      <a16:colId xmlns:a16="http://schemas.microsoft.com/office/drawing/2014/main" val="20000"/>
+                    </a:ext>
+                  </a:extLst>
+                </a:gridCol>
+                <a:gridCol w="4937760">
+                  <a:extLst>
+                    <a:ext uri="{9D8B030D-6E8A-4147-A177-3AD203B41FA5}">
+                      <a16:colId xmlns:a16="http://schemas.microsoft.com/office/drawing/2014/main" val="20001"/>
+                    </a:ext>
+                  </a:extLst>
+                </a:gridCol>
               </a:tblGrid>
               <a:tr h="457200">
                 <a:tc>
@@ -11701,7 +11674,7 @@
                     <a:bodyPr/>
                     <a:lstStyle/>
                     <a:p>
-                      <a:pPr indent="0" marL="0">
+                      <a:pPr marL="0" indent="0">
                         <a:buNone/>
                       </a:pPr>
                       <a:r>
@@ -11762,7 +11735,7 @@
                     <a:bodyPr/>
                     <a:lstStyle/>
                     <a:p>
-                      <a:pPr indent="0" marL="0">
+                      <a:pPr marL="0" indent="0">
                         <a:buNone/>
                       </a:pPr>
                       <a:r>
@@ -11818,6 +11791,11 @@
                     </a:solidFill>
                   </a:tcPr>
                 </a:tc>
+                <a:extLst>
+                  <a:ext uri="{0D108BD9-81ED-4DB2-BD59-A6C34878D82A}">
+                    <a16:rowId xmlns:a16="http://schemas.microsoft.com/office/drawing/2014/main" val="10000"/>
+                  </a:ext>
+                </a:extLst>
               </a:tr>
               <a:tr h="457200">
                 <a:tc>
@@ -11825,7 +11803,7 @@
                     <a:bodyPr/>
                     <a:lstStyle/>
                     <a:p>
-                      <a:pPr indent="0" marL="0">
+                      <a:pPr marL="0" indent="0">
                         <a:buNone/>
                       </a:pPr>
                       <a:r>
@@ -11886,7 +11864,7 @@
                     <a:bodyPr/>
                     <a:lstStyle/>
                     <a:p>
-                      <a:pPr indent="0" marL="0">
+                      <a:pPr marL="0" indent="0">
                         <a:buNone/>
                       </a:pPr>
                       <a:r>
@@ -11942,6 +11920,11 @@
                     </a:solidFill>
                   </a:tcPr>
                 </a:tc>
+                <a:extLst>
+                  <a:ext uri="{0D108BD9-81ED-4DB2-BD59-A6C34878D82A}">
+                    <a16:rowId xmlns:a16="http://schemas.microsoft.com/office/drawing/2014/main" val="10001"/>
+                  </a:ext>
+                </a:extLst>
               </a:tr>
               <a:tr h="457200">
                 <a:tc>
@@ -11949,7 +11932,7 @@
                     <a:bodyPr/>
                     <a:lstStyle/>
                     <a:p>
-                      <a:pPr indent="0" marL="0">
+                      <a:pPr marL="0" indent="0">
                         <a:buNone/>
                       </a:pPr>
                       <a:r>
@@ -12010,7 +11993,7 @@
                     <a:bodyPr/>
                     <a:lstStyle/>
                     <a:p>
-                      <a:pPr indent="0" marL="0">
+                      <a:pPr marL="0" indent="0">
                         <a:buNone/>
                       </a:pPr>
                       <a:r>
@@ -12066,6 +12049,11 @@
                     </a:solidFill>
                   </a:tcPr>
                 </a:tc>
+                <a:extLst>
+                  <a:ext uri="{0D108BD9-81ED-4DB2-BD59-A6C34878D82A}">
+                    <a16:rowId xmlns:a16="http://schemas.microsoft.com/office/drawing/2014/main" val="10002"/>
+                  </a:ext>
+                </a:extLst>
               </a:tr>
               <a:tr h="457200">
                 <a:tc>
@@ -12073,7 +12061,7 @@
                     <a:bodyPr/>
                     <a:lstStyle/>
                     <a:p>
-                      <a:pPr indent="0" marL="0">
+                      <a:pPr marL="0" indent="0">
                         <a:buNone/>
                       </a:pPr>
                       <a:r>
@@ -12134,7 +12122,7 @@
                     <a:bodyPr/>
                     <a:lstStyle/>
                     <a:p>
-                      <a:pPr indent="0" marL="0">
+                      <a:pPr marL="0" indent="0">
                         <a:buNone/>
                       </a:pPr>
                       <a:r>
@@ -12190,6 +12178,11 @@
                     </a:solidFill>
                   </a:tcPr>
                 </a:tc>
+                <a:extLst>
+                  <a:ext uri="{0D108BD9-81ED-4DB2-BD59-A6C34878D82A}">
+                    <a16:rowId xmlns:a16="http://schemas.microsoft.com/office/drawing/2014/main" val="10003"/>
+                  </a:ext>
+                </a:extLst>
               </a:tr>
               <a:tr h="457200">
                 <a:tc>
@@ -12197,7 +12190,7 @@
                     <a:bodyPr/>
                     <a:lstStyle/>
                     <a:p>
-                      <a:pPr indent="0" marL="0">
+                      <a:pPr marL="0" indent="0">
                         <a:buNone/>
                       </a:pPr>
                       <a:r>
@@ -12258,7 +12251,7 @@
                     <a:bodyPr/>
                     <a:lstStyle/>
                     <a:p>
-                      <a:pPr indent="0" marL="0">
+                      <a:pPr marL="0" indent="0">
                         <a:buNone/>
                       </a:pPr>
                       <a:r>
@@ -12314,6 +12307,11 @@
                     </a:solidFill>
                   </a:tcPr>
                 </a:tc>
+                <a:extLst>
+                  <a:ext uri="{0D108BD9-81ED-4DB2-BD59-A6C34878D82A}">
+                    <a16:rowId xmlns:a16="http://schemas.microsoft.com/office/drawing/2014/main" val="10004"/>
+                  </a:ext>
+                </a:extLst>
               </a:tr>
             </a:tbl>
           </a:graphicData>
@@ -12340,6 +12338,13 @@
           </a:solidFill>
           <a:ln/>
         </p:spPr>
+        <p:txBody>
+          <a:bodyPr/>
+          <a:lstStyle/>
+          <a:p>
+            <a:endParaRPr lang="en-US"/>
+          </a:p>
+        </p:txBody>
       </p:sp>
       <p:sp>
         <p:nvSpPr>
@@ -12362,7 +12367,7 @@
           <a:bodyPr wrap="square" lIns="0" tIns="0" rIns="0" bIns="0" rtlCol="0" anchor="ctr"/>
           <a:lstStyle/>
           <a:p>
-            <a:pPr algn="l" indent="0" marL="0">
+            <a:pPr marL="0" indent="0" algn="l">
               <a:buNone/>
             </a:pPr>
             <a:r>
@@ -12397,7 +12402,7 @@
           </a:prstGeom>
           <a:extLst>
             <a:ext uri="{C572A759-6A51-4108-AA02-DFA0A04FC94B}">
-              <ma14:wrappingTextBoxFlag xmlns:ma14="http://schemas.microsoft.com/office/mac/drawingml/2011/main" val="0"/>
+              <ma14:wrappingTextBoxFlag xmlns:ma14="http://schemas.microsoft.com/office/mac/drawingml/2011/main" xmlns="" val="0"/>
             </a:ext>
           </a:extLst>
         </p:spPr>
@@ -12415,7 +12420,7 @@
           <a:p>
             <a:pPr algn="r"/>
             <a:fld id="{F7021451-1387-4CA6-816F-3879F97B5CBC}" type="slidenum">
-              <a:rPr b="0" lang="en-US"/>
+              <a:rPr lang="en-US" b="0"/>
               <a:t>20</a:t>
             </a:fld>
             <a:endParaRPr lang="en-US"/>
@@ -12450,9 +12455,11 @@
       <p:sp>
         <p:nvSpPr>
           <p:cNvPr id="2" name="Text 0"/>
-          <p:cNvSpPr/>
+          <p:cNvSpPr>
+            <a:spLocks noGrp="1"/>
+          </p:cNvSpPr>
           <p:nvPr>
-            <p:ph idx="100" type="title" hasCustomPrompt="1"/>
+            <p:ph type="title" idx="100" hasCustomPrompt="1"/>
           </p:nvPr>
         </p:nvSpPr>
         <p:spPr>
@@ -12470,7 +12477,7 @@
           <a:bodyPr wrap="square" lIns="0" tIns="0" rIns="0" bIns="0" rtlCol="0" anchor="ctr"/>
           <a:lstStyle/>
           <a:p>
-            <a:pPr algn="l" indent="0" marL="0">
+            <a:pPr marL="0" indent="0" algn="l">
               <a:buNone/>
             </a:pPr>
             <a:r>
@@ -12510,7 +12517,7 @@
           <a:bodyPr wrap="square" lIns="0" tIns="0" rIns="0" bIns="0" rtlCol="0" anchor="ctr"/>
           <a:lstStyle/>
           <a:p>
-            <a:pPr algn="ctr" indent="0" marL="0">
+            <a:pPr marL="0" indent="0" algn="ctr">
               <a:buNone/>
             </a:pPr>
             <a:r>
@@ -12546,6 +12553,13 @@
           </a:solidFill>
           <a:ln/>
         </p:spPr>
+        <p:txBody>
+          <a:bodyPr/>
+          <a:lstStyle/>
+          <a:p>
+            <a:endParaRPr lang="en-US"/>
+          </a:p>
+        </p:txBody>
       </p:sp>
       <p:sp>
         <p:nvSpPr>
@@ -12568,7 +12582,7 @@
           <a:bodyPr wrap="square" lIns="0" tIns="0" rIns="0" bIns="0" rtlCol="0" anchor="ctr"/>
           <a:lstStyle/>
           <a:p>
-            <a:pPr algn="ctr" indent="0" marL="0">
+            <a:pPr marL="0" indent="0" algn="ctr">
               <a:buNone/>
             </a:pPr>
             <a:r>
@@ -12607,7 +12621,7 @@
           <a:bodyPr wrap="square" lIns="0" tIns="0" rIns="0" bIns="0" rtlCol="0" anchor="t"/>
           <a:lstStyle/>
           <a:p>
-            <a:pPr algn="ctr" indent="0" marL="0">
+            <a:pPr marL="0" indent="0" algn="ctr">
               <a:buNone/>
             </a:pPr>
             <a:r>
@@ -12643,6 +12657,13 @@
           </a:solidFill>
           <a:ln/>
         </p:spPr>
+        <p:txBody>
+          <a:bodyPr/>
+          <a:lstStyle/>
+          <a:p>
+            <a:endParaRPr lang="en-US"/>
+          </a:p>
+        </p:txBody>
       </p:sp>
       <p:sp>
         <p:nvSpPr>
@@ -12665,7 +12686,7 @@
           <a:bodyPr wrap="square" lIns="0" tIns="0" rIns="0" bIns="0" rtlCol="0" anchor="ctr"/>
           <a:lstStyle/>
           <a:p>
-            <a:pPr algn="ctr" indent="0" marL="0">
+            <a:pPr marL="0" indent="0" algn="ctr">
               <a:buNone/>
             </a:pPr>
             <a:r>
@@ -12704,7 +12725,7 @@
           <a:bodyPr wrap="square" lIns="0" tIns="0" rIns="0" bIns="0" rtlCol="0" anchor="t"/>
           <a:lstStyle/>
           <a:p>
-            <a:pPr algn="ctr" indent="0" marL="0">
+            <a:pPr marL="0" indent="0" algn="ctr">
               <a:buNone/>
             </a:pPr>
             <a:r>
@@ -12740,6 +12761,13 @@
           </a:solidFill>
           <a:ln/>
         </p:spPr>
+        <p:txBody>
+          <a:bodyPr/>
+          <a:lstStyle/>
+          <a:p>
+            <a:endParaRPr lang="en-US"/>
+          </a:p>
+        </p:txBody>
       </p:sp>
       <p:sp>
         <p:nvSpPr>
@@ -12762,7 +12790,7 @@
           <a:bodyPr wrap="square" lIns="0" tIns="0" rIns="0" bIns="0" rtlCol="0" anchor="ctr"/>
           <a:lstStyle/>
           <a:p>
-            <a:pPr algn="ctr" indent="0" marL="0">
+            <a:pPr marL="0" indent="0" algn="ctr">
               <a:buNone/>
             </a:pPr>
             <a:r>
@@ -12801,7 +12829,7 @@
           <a:bodyPr wrap="square" lIns="0" tIns="0" rIns="0" bIns="0" rtlCol="0" anchor="t"/>
           <a:lstStyle/>
           <a:p>
-            <a:pPr algn="ctr" indent="0" marL="0">
+            <a:pPr marL="0" indent="0" algn="ctr">
               <a:buNone/>
             </a:pPr>
             <a:r>
@@ -12837,6 +12865,13 @@
           </a:solidFill>
           <a:ln/>
         </p:spPr>
+        <p:txBody>
+          <a:bodyPr/>
+          <a:lstStyle/>
+          <a:p>
+            <a:endParaRPr lang="en-US"/>
+          </a:p>
+        </p:txBody>
       </p:sp>
       <p:sp>
         <p:nvSpPr>
@@ -12859,7 +12894,7 @@
           <a:bodyPr wrap="square" lIns="0" tIns="0" rIns="0" bIns="0" rtlCol="0" anchor="ctr"/>
           <a:lstStyle/>
           <a:p>
-            <a:pPr algn="ctr" indent="0" marL="0">
+            <a:pPr marL="0" indent="0" algn="ctr">
               <a:buNone/>
             </a:pPr>
             <a:r>
@@ -12898,7 +12933,7 @@
           <a:bodyPr wrap="square" lIns="0" tIns="0" rIns="0" bIns="0" rtlCol="0" anchor="t"/>
           <a:lstStyle/>
           <a:p>
-            <a:pPr algn="ctr" indent="0" marL="0">
+            <a:pPr marL="0" indent="0" algn="ctr">
               <a:buNone/>
             </a:pPr>
             <a:r>
@@ -12934,6 +12969,13 @@
           </a:solidFill>
           <a:ln/>
         </p:spPr>
+        <p:txBody>
+          <a:bodyPr/>
+          <a:lstStyle/>
+          <a:p>
+            <a:endParaRPr lang="en-US"/>
+          </a:p>
+        </p:txBody>
       </p:sp>
       <p:sp>
         <p:nvSpPr>
@@ -12956,7 +12998,7 @@
           <a:bodyPr wrap="square" lIns="0" tIns="0" rIns="0" bIns="0" rtlCol="0" anchor="ctr"/>
           <a:lstStyle/>
           <a:p>
-            <a:pPr algn="ctr" indent="0" marL="0">
+            <a:pPr marL="0" indent="0" algn="ctr">
               <a:buNone/>
             </a:pPr>
             <a:r>
@@ -12995,7 +13037,7 @@
           <a:bodyPr wrap="square" lIns="0" tIns="0" rIns="0" bIns="0" rtlCol="0" anchor="t"/>
           <a:lstStyle/>
           <a:p>
-            <a:pPr algn="ctr" indent="0" marL="0">
+            <a:pPr marL="0" indent="0" algn="ctr">
               <a:buNone/>
             </a:pPr>
             <a:r>
@@ -13031,6 +13073,13 @@
           </a:solidFill>
           <a:ln/>
         </p:spPr>
+        <p:txBody>
+          <a:bodyPr/>
+          <a:lstStyle/>
+          <a:p>
+            <a:endParaRPr lang="en-US"/>
+          </a:p>
+        </p:txBody>
       </p:sp>
       <p:sp>
         <p:nvSpPr>
@@ -13053,7 +13102,7 @@
           <a:bodyPr wrap="square" lIns="0" tIns="0" rIns="0" bIns="0" rtlCol="0" anchor="ctr"/>
           <a:lstStyle/>
           <a:p>
-            <a:pPr algn="l" indent="0" marL="0">
+            <a:pPr marL="0" indent="0" algn="l">
               <a:buNone/>
             </a:pPr>
             <a:r>
@@ -13088,7 +13137,7 @@
           </a:prstGeom>
           <a:extLst>
             <a:ext uri="{C572A759-6A51-4108-AA02-DFA0A04FC94B}">
-              <ma14:wrappingTextBoxFlag xmlns:ma14="http://schemas.microsoft.com/office/mac/drawingml/2011/main" val="0"/>
+              <ma14:wrappingTextBoxFlag xmlns:ma14="http://schemas.microsoft.com/office/mac/drawingml/2011/main" xmlns="" val="0"/>
             </a:ext>
           </a:extLst>
         </p:spPr>
@@ -13106,7 +13155,7 @@
           <a:p>
             <a:pPr algn="r"/>
             <a:fld id="{F7021451-1387-4CA6-816F-3879F97B5CBC}" type="slidenum">
-              <a:rPr b="0" lang="en-US"/>
+              <a:rPr lang="en-US" b="0"/>
               <a:t>21</a:t>
             </a:fld>
             <a:endParaRPr lang="en-US"/>
@@ -13141,9 +13190,11 @@
       <p:sp>
         <p:nvSpPr>
           <p:cNvPr id="2" name="Text 0"/>
-          <p:cNvSpPr/>
+          <p:cNvSpPr>
+            <a:spLocks noGrp="1"/>
+          </p:cNvSpPr>
           <p:nvPr>
-            <p:ph idx="100" type="title" hasCustomPrompt="1"/>
+            <p:ph type="title" idx="100" hasCustomPrompt="1"/>
           </p:nvPr>
         </p:nvSpPr>
         <p:spPr>
@@ -13161,7 +13212,7 @@
           <a:bodyPr wrap="square" lIns="0" tIns="0" rIns="0" bIns="0" rtlCol="0" anchor="ctr"/>
           <a:lstStyle/>
           <a:p>
-            <a:pPr algn="l" indent="0" marL="0">
+            <a:pPr marL="0" indent="0" algn="l">
               <a:buNone/>
             </a:pPr>
             <a:r>
@@ -13201,7 +13252,7 @@
           <a:bodyPr wrap="square" lIns="0" tIns="0" rIns="0" bIns="0" rtlCol="0" anchor="ctr"/>
           <a:lstStyle/>
           <a:p>
-            <a:pPr algn="ctr" indent="0" marL="0">
+            <a:pPr marL="0" indent="0" algn="ctr">
               <a:buNone/>
             </a:pPr>
             <a:r>
@@ -13239,7 +13290,7 @@
           <a:bodyPr wrap="square" lIns="0" tIns="0" rIns="0" bIns="0" rtlCol="0" anchor="ctr"/>
           <a:lstStyle/>
           <a:p>
-            <a:pPr algn="ctr" indent="0" marL="0">
+            <a:pPr marL="0" indent="0" algn="ctr">
               <a:buNone/>
             </a:pPr>
             <a:r>
@@ -13275,7 +13326,7 @@
           <a:bodyPr wrap="square" lIns="0" tIns="0" rIns="0" bIns="0" rtlCol="0" anchor="t"/>
           <a:lstStyle/>
           <a:p>
-            <a:pPr indent="0" marL="0">
+            <a:pPr marL="0" indent="0">
               <a:buNone/>
             </a:pPr>
             <a:r>
@@ -13313,7 +13364,7 @@
           <a:bodyPr wrap="square" lIns="0" tIns="0" rIns="0" bIns="0" rtlCol="0" anchor="ctr"/>
           <a:lstStyle/>
           <a:p>
-            <a:pPr algn="ctr" indent="0" marL="0">
+            <a:pPr marL="0" indent="0" algn="ctr">
               <a:buNone/>
             </a:pPr>
             <a:r>
@@ -13349,7 +13400,7 @@
           <a:bodyPr wrap="square" lIns="0" tIns="0" rIns="0" bIns="0" rtlCol="0" anchor="t"/>
           <a:lstStyle/>
           <a:p>
-            <a:pPr indent="0" marL="0">
+            <a:pPr marL="0" indent="0">
               <a:buNone/>
             </a:pPr>
             <a:r>
@@ -13387,7 +13438,7 @@
           <a:bodyPr wrap="square" lIns="0" tIns="0" rIns="0" bIns="0" rtlCol="0" anchor="ctr"/>
           <a:lstStyle/>
           <a:p>
-            <a:pPr algn="ctr" indent="0" marL="0">
+            <a:pPr marL="0" indent="0" algn="ctr">
               <a:buNone/>
             </a:pPr>
             <a:r>
@@ -13423,7 +13474,7 @@
           <a:bodyPr wrap="square" lIns="0" tIns="0" rIns="0" bIns="0" rtlCol="0" anchor="t"/>
           <a:lstStyle/>
           <a:p>
-            <a:pPr indent="0" marL="0">
+            <a:pPr marL="0" indent="0">
               <a:buNone/>
             </a:pPr>
             <a:r>
@@ -13461,7 +13512,7 @@
           <a:bodyPr wrap="square" lIns="0" tIns="0" rIns="0" bIns="0" rtlCol="0" anchor="ctr"/>
           <a:lstStyle/>
           <a:p>
-            <a:pPr algn="ctr" indent="0" marL="0">
+            <a:pPr marL="0" indent="0" algn="ctr">
               <a:buNone/>
             </a:pPr>
             <a:r>
@@ -13497,7 +13548,7 @@
           <a:bodyPr wrap="square" lIns="0" tIns="0" rIns="0" bIns="0" rtlCol="0" anchor="t"/>
           <a:lstStyle/>
           <a:p>
-            <a:pPr indent="0" marL="0">
+            <a:pPr marL="0" indent="0">
               <a:buNone/>
             </a:pPr>
             <a:r>
@@ -13535,7 +13586,7 @@
           <a:bodyPr wrap="square" lIns="0" tIns="0" rIns="0" bIns="0" rtlCol="0" anchor="ctr"/>
           <a:lstStyle/>
           <a:p>
-            <a:pPr algn="ctr" indent="0" marL="0">
+            <a:pPr marL="0" indent="0" algn="ctr">
               <a:buNone/>
             </a:pPr>
             <a:r>
@@ -13571,7 +13622,7 @@
           <a:bodyPr wrap="square" lIns="0" tIns="0" rIns="0" bIns="0" rtlCol="0" anchor="t"/>
           <a:lstStyle/>
           <a:p>
-            <a:pPr indent="0" marL="0">
+            <a:pPr marL="0" indent="0">
               <a:buNone/>
             </a:pPr>
             <a:r>
@@ -13607,6 +13658,13 @@
           </a:solidFill>
           <a:ln/>
         </p:spPr>
+        <p:txBody>
+          <a:bodyPr/>
+          <a:lstStyle/>
+          <a:p>
+            <a:endParaRPr lang="en-US"/>
+          </a:p>
+        </p:txBody>
       </p:sp>
       <p:sp>
         <p:nvSpPr>
@@ -13629,7 +13687,7 @@
           <a:bodyPr wrap="square" lIns="0" tIns="0" rIns="0" bIns="0" rtlCol="0" anchor="t"/>
           <a:lstStyle/>
           <a:p>
-            <a:pPr indent="0" marL="0">
+            <a:pPr marL="0" indent="0">
               <a:buNone/>
             </a:pPr>
             <a:r>
@@ -13665,7 +13723,7 @@
           <a:bodyPr wrap="square" lIns="0" tIns="0" rIns="0" bIns="0" rtlCol="0" anchor="t"/>
           <a:lstStyle/>
           <a:p>
-            <a:pPr indent="0" marL="0">
+            <a:pPr marL="0" indent="0">
               <a:buNone/>
             </a:pPr>
             <a:r>
@@ -13700,7 +13758,7 @@
           </a:prstGeom>
           <a:extLst>
             <a:ext uri="{C572A759-6A51-4108-AA02-DFA0A04FC94B}">
-              <ma14:wrappingTextBoxFlag xmlns:ma14="http://schemas.microsoft.com/office/mac/drawingml/2011/main" val="0"/>
+              <ma14:wrappingTextBoxFlag xmlns:ma14="http://schemas.microsoft.com/office/mac/drawingml/2011/main" xmlns="" val="0"/>
             </a:ext>
           </a:extLst>
         </p:spPr>
@@ -13718,7 +13776,7 @@
           <a:p>
             <a:pPr algn="r"/>
             <a:fld id="{F7021451-1387-4CA6-816F-3879F97B5CBC}" type="slidenum">
-              <a:rPr b="0" lang="en-US"/>
+              <a:rPr lang="en-US" b="0"/>
               <a:t>22</a:t>
             </a:fld>
             <a:endParaRPr lang="en-US"/>
@@ -13775,7 +13833,7 @@
           <a:bodyPr wrap="square" lIns="0" tIns="0" rIns="0" bIns="0" rtlCol="0" anchor="ctr"/>
           <a:lstStyle/>
           <a:p>
-            <a:pPr algn="ctr" indent="0" marL="0">
+            <a:pPr marL="0" indent="0" algn="ctr">
               <a:buNone/>
             </a:pPr>
             <a:r>
@@ -13793,9 +13851,11 @@
       <p:sp>
         <p:nvSpPr>
           <p:cNvPr id="3" name="Text 0"/>
-          <p:cNvSpPr/>
+          <p:cNvSpPr>
+            <a:spLocks noGrp="1"/>
+          </p:cNvSpPr>
           <p:nvPr>
-            <p:ph idx="100" type="title" hasCustomPrompt="1"/>
+            <p:ph type="title" idx="100" hasCustomPrompt="1"/>
           </p:nvPr>
         </p:nvSpPr>
         <p:spPr>
@@ -13813,7 +13873,7 @@
           <a:bodyPr wrap="square" lIns="0" tIns="0" rIns="0" bIns="0" rtlCol="0" anchor="b"/>
           <a:lstStyle/>
           <a:p>
-            <a:pPr algn="l" indent="0" marL="0">
+            <a:pPr marL="0" indent="0" algn="l">
               <a:buNone/>
             </a:pPr>
             <a:r>
@@ -13831,9 +13891,11 @@
       <p:sp>
         <p:nvSpPr>
           <p:cNvPr id="4" name="Text 0"/>
-          <p:cNvSpPr/>
+          <p:cNvSpPr>
+            <a:spLocks noGrp="1"/>
+          </p:cNvSpPr>
           <p:nvPr>
-            <p:ph idx="101" type="body" hasCustomPrompt="1"/>
+            <p:ph type="body" idx="101" hasCustomPrompt="1"/>
           </p:nvPr>
         </p:nvSpPr>
         <p:spPr>
@@ -13851,7 +13913,7 @@
           <a:bodyPr wrap="square" lIns="0" tIns="0" rIns="0" bIns="0" rtlCol="0" anchor="t"/>
           <a:lstStyle/>
           <a:p>
-            <a:pPr indent="0" marL="0">
+            <a:pPr marL="0" indent="0">
               <a:buNone/>
             </a:pPr>
             <a:r>
@@ -13894,9 +13956,11 @@
       <p:sp>
         <p:nvSpPr>
           <p:cNvPr id="2" name="Text 0"/>
-          <p:cNvSpPr/>
+          <p:cNvSpPr>
+            <a:spLocks noGrp="1"/>
+          </p:cNvSpPr>
           <p:nvPr>
-            <p:ph idx="100" type="title" hasCustomPrompt="1"/>
+            <p:ph type="title" idx="100" hasCustomPrompt="1"/>
           </p:nvPr>
         </p:nvSpPr>
         <p:spPr>
@@ -13914,7 +13978,7 @@
           <a:bodyPr wrap="square" lIns="0" tIns="0" rIns="0" bIns="0" rtlCol="0" anchor="ctr"/>
           <a:lstStyle/>
           <a:p>
-            <a:pPr algn="l" indent="0" marL="0">
+            <a:pPr marL="0" indent="0" algn="l">
               <a:buNone/>
             </a:pPr>
             <a:r>
@@ -13954,7 +14018,7 @@
           <a:bodyPr wrap="square" lIns="0" tIns="0" rIns="0" bIns="0" rtlCol="0" anchor="ctr"/>
           <a:lstStyle/>
           <a:p>
-            <a:pPr algn="ctr" indent="0" marL="0">
+            <a:pPr marL="0" indent="0" algn="ctr">
               <a:buNone/>
             </a:pPr>
             <a:r>
@@ -13990,17 +14054,24 @@
           </a:solidFill>
           <a:ln/>
         </p:spPr>
+        <p:txBody>
+          <a:bodyPr/>
+          <a:lstStyle/>
+          <a:p>
+            <a:endParaRPr lang="en-US"/>
+          </a:p>
+        </p:txBody>
       </p:sp>
       <p:pic>
         <p:nvPicPr>
-          <p:cNvPr id="6" name="icon Python with uv" descr="preencoded.png">    </p:cNvPr>
+          <p:cNvPr id="6" name="icon Python with uv" descr="preencoded.png"/>
           <p:cNvPicPr>
             <a:picLocks noChangeAspect="1"/>
           </p:cNvPicPr>
           <p:nvPr/>
         </p:nvPicPr>
         <p:blipFill>
-          <a:blip r:embed="rId1"/>
+          <a:blip r:embed="rId3"/>
           <a:stretch>
             <a:fillRect/>
           </a:stretch>
@@ -14036,7 +14107,7 @@
           <a:bodyPr wrap="square" lIns="0" tIns="0" rIns="0" bIns="0" rtlCol="0" anchor="t"/>
           <a:lstStyle/>
           <a:p>
-            <a:pPr indent="0" marL="0">
+            <a:pPr marL="0" indent="0">
               <a:buNone/>
             </a:pPr>
             <a:r>
@@ -14166,17 +14237,24 @@
           </a:solidFill>
           <a:ln/>
         </p:spPr>
+        <p:txBody>
+          <a:bodyPr/>
+          <a:lstStyle/>
+          <a:p>
+            <a:endParaRPr lang="en-US"/>
+          </a:p>
+        </p:txBody>
       </p:sp>
       <p:pic>
         <p:nvPicPr>
-          <p:cNvPr id="10" name="icon JavaScript with npm" descr="preencoded.png">    </p:cNvPr>
+          <p:cNvPr id="10" name="icon JavaScript with npm" descr="preencoded.png"/>
           <p:cNvPicPr>
             <a:picLocks noChangeAspect="1"/>
           </p:cNvPicPr>
           <p:nvPr/>
         </p:nvPicPr>
         <p:blipFill>
-          <a:blip r:embed="rId2"/>
+          <a:blip r:embed="rId4"/>
           <a:stretch>
             <a:fillRect/>
           </a:stretch>
@@ -14212,7 +14290,7 @@
           <a:bodyPr wrap="square" lIns="0" tIns="0" rIns="0" bIns="0" rtlCol="0" anchor="t"/>
           <a:lstStyle/>
           <a:p>
-            <a:pPr indent="0" marL="0">
+            <a:pPr marL="0" indent="0">
               <a:buNone/>
             </a:pPr>
             <a:r>
@@ -14341,7 +14419,7 @@
           </a:prstGeom>
           <a:extLst>
             <a:ext uri="{C572A759-6A51-4108-AA02-DFA0A04FC94B}">
-              <ma14:wrappingTextBoxFlag xmlns:ma14="http://schemas.microsoft.com/office/mac/drawingml/2011/main" val="0"/>
+              <ma14:wrappingTextBoxFlag xmlns:ma14="http://schemas.microsoft.com/office/mac/drawingml/2011/main" xmlns="" val="0"/>
             </a:ext>
           </a:extLst>
         </p:spPr>
@@ -14359,7 +14437,7 @@
           <a:p>
             <a:pPr algn="r"/>
             <a:fld id="{F7021451-1387-4CA6-816F-3879F97B5CBC}" type="slidenum">
-              <a:rPr b="0" lang="en-US"/>
+              <a:rPr lang="en-US" b="0"/>
               <a:t>24</a:t>
             </a:fld>
             <a:endParaRPr lang="en-US"/>
@@ -14394,9 +14472,11 @@
       <p:sp>
         <p:nvSpPr>
           <p:cNvPr id="2" name="Text 0"/>
-          <p:cNvSpPr/>
+          <p:cNvSpPr>
+            <a:spLocks noGrp="1"/>
+          </p:cNvSpPr>
           <p:nvPr>
-            <p:ph idx="100" type="title" hasCustomPrompt="1"/>
+            <p:ph type="title" idx="100" hasCustomPrompt="1"/>
           </p:nvPr>
         </p:nvSpPr>
         <p:spPr>
@@ -14414,7 +14494,7 @@
           <a:bodyPr wrap="square" lIns="0" tIns="0" rIns="0" bIns="0" rtlCol="0" anchor="ctr"/>
           <a:lstStyle/>
           <a:p>
-            <a:pPr algn="l" indent="0" marL="0">
+            <a:pPr marL="0" indent="0" algn="l">
               <a:buNone/>
             </a:pPr>
             <a:r>
@@ -14454,7 +14534,7 @@
           <a:bodyPr wrap="square" lIns="0" tIns="0" rIns="0" bIns="0" rtlCol="0" anchor="ctr"/>
           <a:lstStyle/>
           <a:p>
-            <a:pPr algn="ctr" indent="0" marL="0">
+            <a:pPr marL="0" indent="0" algn="ctr">
               <a:buNone/>
             </a:pPr>
             <a:r>
@@ -14490,6 +14570,13 @@
           </a:solidFill>
           <a:ln/>
         </p:spPr>
+        <p:txBody>
+          <a:bodyPr/>
+          <a:lstStyle/>
+          <a:p>
+            <a:endParaRPr lang="en-US"/>
+          </a:p>
+        </p:txBody>
       </p:sp>
       <p:sp>
         <p:nvSpPr>
@@ -14512,7 +14599,7 @@
           <a:bodyPr wrap="square" lIns="0" tIns="0" rIns="0" bIns="0" rtlCol="0" anchor="t"/>
           <a:lstStyle/>
           <a:p>
-            <a:pPr indent="0" marL="0">
+            <a:pPr marL="0" indent="0">
               <a:buNone/>
             </a:pPr>
             <a:r>
@@ -14548,7 +14635,7 @@
           <a:bodyPr wrap="square" lIns="0" tIns="0" rIns="0" bIns="0" rtlCol="0" anchor="t"/>
           <a:lstStyle/>
           <a:p>
-            <a:pPr indent="0" marL="0">
+            <a:pPr marL="0" indent="0">
               <a:buNone/>
             </a:pPr>
             <a:r>
@@ -14584,6 +14671,13 @@
           </a:solidFill>
           <a:ln/>
         </p:spPr>
+        <p:txBody>
+          <a:bodyPr/>
+          <a:lstStyle/>
+          <a:p>
+            <a:endParaRPr lang="en-US"/>
+          </a:p>
+        </p:txBody>
       </p:sp>
       <p:sp>
         <p:nvSpPr>
@@ -14606,7 +14700,7 @@
           <a:bodyPr wrap="square" lIns="0" tIns="0" rIns="0" bIns="0" rtlCol="0" anchor="t"/>
           <a:lstStyle/>
           <a:p>
-            <a:pPr indent="0" marL="0">
+            <a:pPr marL="0" indent="0">
               <a:buNone/>
             </a:pPr>
             <a:r>
@@ -14642,7 +14736,7 @@
           <a:bodyPr wrap="square" lIns="0" tIns="0" rIns="0" bIns="0" rtlCol="0" anchor="t"/>
           <a:lstStyle/>
           <a:p>
-            <a:pPr indent="0" marL="0">
+            <a:pPr marL="0" indent="0">
               <a:buNone/>
             </a:pPr>
             <a:r>
@@ -14678,7 +14772,7 @@
           <a:bodyPr wrap="square" lIns="0" tIns="0" rIns="0" bIns="0" rtlCol="0" anchor="t"/>
           <a:lstStyle/>
           <a:p>
-            <a:pPr algn="l" indent="0" marL="0">
+            <a:pPr marL="0" indent="0" algn="l">
               <a:buNone/>
             </a:pPr>
             <a:r>
@@ -14714,6 +14808,13 @@
           </a:solidFill>
           <a:ln/>
         </p:spPr>
+        <p:txBody>
+          <a:bodyPr/>
+          <a:lstStyle/>
+          <a:p>
+            <a:endParaRPr lang="en-US"/>
+          </a:p>
+        </p:txBody>
       </p:sp>
       <p:sp>
         <p:nvSpPr>
@@ -14736,7 +14837,7 @@
           <a:bodyPr wrap="square" lIns="0" tIns="0" rIns="0" bIns="0" rtlCol="0" anchor="t"/>
           <a:lstStyle/>
           <a:p>
-            <a:pPr indent="0" marL="0">
+            <a:pPr marL="0" indent="0">
               <a:buNone/>
             </a:pPr>
             <a:r>
@@ -14847,7 +14948,7 @@
           </a:prstGeom>
           <a:extLst>
             <a:ext uri="{C572A759-6A51-4108-AA02-DFA0A04FC94B}">
-              <ma14:wrappingTextBoxFlag xmlns:ma14="http://schemas.microsoft.com/office/mac/drawingml/2011/main" val="0"/>
+              <ma14:wrappingTextBoxFlag xmlns:ma14="http://schemas.microsoft.com/office/mac/drawingml/2011/main" xmlns="" val="0"/>
             </a:ext>
           </a:extLst>
         </p:spPr>
@@ -14865,7 +14966,7 @@
           <a:p>
             <a:pPr algn="r"/>
             <a:fld id="{F7021451-1387-4CA6-816F-3879F97B5CBC}" type="slidenum">
-              <a:rPr b="0" lang="en-US"/>
+              <a:rPr lang="en-US" b="0"/>
               <a:t>25</a:t>
             </a:fld>
             <a:endParaRPr lang="en-US"/>
@@ -14922,7 +15023,7 @@
           <a:bodyPr wrap="square" lIns="0" tIns="0" rIns="0" bIns="0" rtlCol="0" anchor="ctr"/>
           <a:lstStyle/>
           <a:p>
-            <a:pPr algn="ctr" indent="0" marL="0">
+            <a:pPr marL="0" indent="0" algn="ctr">
               <a:buNone/>
             </a:pPr>
             <a:r>
@@ -14940,9 +15041,11 @@
       <p:sp>
         <p:nvSpPr>
           <p:cNvPr id="3" name="Text 0"/>
-          <p:cNvSpPr/>
+          <p:cNvSpPr>
+            <a:spLocks noGrp="1"/>
+          </p:cNvSpPr>
           <p:nvPr>
-            <p:ph idx="100" type="title" hasCustomPrompt="1"/>
+            <p:ph type="title" idx="100" hasCustomPrompt="1"/>
           </p:nvPr>
         </p:nvSpPr>
         <p:spPr>
@@ -14960,7 +15063,7 @@
           <a:bodyPr wrap="square" lIns="0" tIns="0" rIns="0" bIns="0" rtlCol="0" anchor="b"/>
           <a:lstStyle/>
           <a:p>
-            <a:pPr algn="l" indent="0" marL="0">
+            <a:pPr marL="0" indent="0" algn="l">
               <a:buNone/>
             </a:pPr>
             <a:r>
@@ -14978,9 +15081,11 @@
       <p:sp>
         <p:nvSpPr>
           <p:cNvPr id="4" name="Text 0"/>
-          <p:cNvSpPr/>
+          <p:cNvSpPr>
+            <a:spLocks noGrp="1"/>
+          </p:cNvSpPr>
           <p:nvPr>
-            <p:ph idx="101" type="body" hasCustomPrompt="1"/>
+            <p:ph type="body" idx="101" hasCustomPrompt="1"/>
           </p:nvPr>
         </p:nvSpPr>
         <p:spPr>
@@ -14998,7 +15103,7 @@
           <a:bodyPr wrap="square" lIns="0" tIns="0" rIns="0" bIns="0" rtlCol="0" anchor="t"/>
           <a:lstStyle/>
           <a:p>
-            <a:pPr indent="0" marL="0">
+            <a:pPr marL="0" indent="0">
               <a:buNone/>
             </a:pPr>
             <a:r>
@@ -15041,9 +15146,11 @@
       <p:sp>
         <p:nvSpPr>
           <p:cNvPr id="2" name="Text 0"/>
-          <p:cNvSpPr/>
+          <p:cNvSpPr>
+            <a:spLocks noGrp="1"/>
+          </p:cNvSpPr>
           <p:nvPr>
-            <p:ph idx="100" type="title" hasCustomPrompt="1"/>
+            <p:ph type="title" idx="100" hasCustomPrompt="1"/>
           </p:nvPr>
         </p:nvSpPr>
         <p:spPr>
@@ -15061,7 +15168,7 @@
           <a:bodyPr wrap="square" lIns="0" tIns="0" rIns="0" bIns="0" rtlCol="0" anchor="ctr"/>
           <a:lstStyle/>
           <a:p>
-            <a:pPr algn="l" indent="0" marL="0">
+            <a:pPr marL="0" indent="0" algn="l">
               <a:buNone/>
             </a:pPr>
             <a:r>
@@ -15101,7 +15208,7 @@
           <a:bodyPr wrap="square" lIns="0" tIns="0" rIns="0" bIns="0" rtlCol="0" anchor="ctr"/>
           <a:lstStyle/>
           <a:p>
-            <a:pPr algn="ctr" indent="0" marL="0">
+            <a:pPr marL="0" indent="0" algn="ctr">
               <a:buNone/>
             </a:pPr>
             <a:r>
@@ -15137,246 +15244,17 @@
           </a:solidFill>
           <a:ln/>
         </p:spPr>
+        <p:txBody>
+          <a:bodyPr/>
+          <a:lstStyle/>
+          <a:p>
+            <a:endParaRPr lang="en-US"/>
+          </a:p>
+        </p:txBody>
       </p:sp>
       <p:pic>
         <p:nvPicPr>
-          <p:cNvPr id="6" name="icon Context7" descr="preencoded.png">    </p:cNvPr>
-          <p:cNvPicPr>
-            <a:picLocks noChangeAspect="1"/>
-          </p:cNvPicPr>
-          <p:nvPr/>
-        </p:nvPicPr>
-        <p:blipFill>
-          <a:blip r:embed="rId1"/>
-          <a:stretch>
-            <a:fillRect/>
-          </a:stretch>
-        </p:blipFill>
-        <p:spPr>
-          <a:xfrm>
-            <a:off x="658368" y="1371600"/>
-            <a:ext cx="411480" cy="411480"/>
-          </a:xfrm>
-          <a:prstGeom prst="rect">
-            <a:avLst/>
-          </a:prstGeom>
-        </p:spPr>
-      </p:pic>
-      <p:sp>
-        <p:nvSpPr>
-          <p:cNvPr id="7" name="Text 3"/>
-          <p:cNvSpPr txBox="1"/>
-          <p:nvPr/>
-        </p:nvSpPr>
-        <p:spPr>
-          <a:xfrm>
-            <a:off x="658368" y="1901952"/>
-            <a:ext cx="2203704" cy="365760"/>
-          </a:xfrm>
-          <a:prstGeom prst="rect">
-            <a:avLst/>
-          </a:prstGeom>
-          <a:noFill/>
-          <a:ln/>
-        </p:spPr>
-        <p:txBody>
-          <a:bodyPr wrap="square" lIns="0" tIns="0" rIns="0" bIns="0" rtlCol="0" anchor="t"/>
-          <a:lstStyle/>
-          <a:p>
-            <a:pPr indent="0" marL="0">
-              <a:buNone/>
-            </a:pPr>
-            <a:r>
-              <a:rPr lang="en-US" sz="1600" b="1" dirty="0">
-                <a:solidFill>
-                  <a:schemeClr val="tx1"/>
-                </a:solidFill>
-              </a:rPr>
-              <a:t>Context7</a:t>
-            </a:r>
-            <a:endParaRPr lang="en-US" sz="1600" dirty="0"/>
-          </a:p>
-        </p:txBody>
-      </p:sp>
-      <p:sp>
-        <p:nvSpPr>
-          <p:cNvPr id="8" name="Text 4"/>
-          <p:cNvSpPr txBox="1"/>
-          <p:nvPr/>
-        </p:nvSpPr>
-        <p:spPr>
-          <a:xfrm>
-            <a:off x="658368" y="2313432"/>
-            <a:ext cx="2203704" cy="1280160"/>
-          </a:xfrm>
-          <a:prstGeom prst="rect">
-            <a:avLst/>
-          </a:prstGeom>
-          <a:noFill/>
-          <a:ln/>
-        </p:spPr>
-        <p:txBody>
-          <a:bodyPr wrap="square" lIns="0" tIns="0" rIns="0" bIns="0" rtlCol="0" anchor="t"/>
-          <a:lstStyle/>
-          <a:p>
-            <a:pPr indent="0" marL="0">
-              <a:buNone/>
-            </a:pPr>
-            <a:r>
-              <a:rPr lang="en-US" sz="1600" dirty="0">
-                <a:solidFill>
-                  <a:schemeClr val="tx2"/>
-                </a:solidFill>
-              </a:rPr>
-              <a:t>Current library docs, so Claude stops guessing APIs</a:t>
-            </a:r>
-            <a:endParaRPr lang="en-US" sz="1600" dirty="0"/>
-          </a:p>
-        </p:txBody>
-      </p:sp>
-      <p:sp>
-        <p:nvSpPr>
-          <p:cNvPr id="9" name="card Playwright"/>
-          <p:cNvSpPr/>
-          <p:nvPr/>
-        </p:nvSpPr>
-        <p:spPr>
-          <a:xfrm>
-            <a:off x="3268980" y="1188720"/>
-            <a:ext cx="2606040" cy="2514600"/>
-          </a:xfrm>
-          <a:prstGeom prst="roundRect">
-            <a:avLst>
-              <a:gd name="adj" fmla="val 2909"/>
-            </a:avLst>
-          </a:prstGeom>
-          <a:solidFill>
-            <a:schemeClr val="bg2"/>
-          </a:solidFill>
-          <a:ln/>
-        </p:spPr>
-      </p:sp>
-      <p:pic>
-        <p:nvPicPr>
-          <p:cNvPr id="10" name="icon Playwright" descr="preencoded.png">    </p:cNvPr>
-          <p:cNvPicPr>
-            <a:picLocks noChangeAspect="1"/>
-          </p:cNvPicPr>
-          <p:nvPr/>
-        </p:nvPicPr>
-        <p:blipFill>
-          <a:blip r:embed="rId2"/>
-          <a:stretch>
-            <a:fillRect/>
-          </a:stretch>
-        </p:blipFill>
-        <p:spPr>
-          <a:xfrm>
-            <a:off x="3470148" y="1371600"/>
-            <a:ext cx="411480" cy="411480"/>
-          </a:xfrm>
-          <a:prstGeom prst="rect">
-            <a:avLst/>
-          </a:prstGeom>
-        </p:spPr>
-      </p:pic>
-      <p:sp>
-        <p:nvSpPr>
-          <p:cNvPr id="11" name="Text 6"/>
-          <p:cNvSpPr txBox="1"/>
-          <p:nvPr/>
-        </p:nvSpPr>
-        <p:spPr>
-          <a:xfrm>
-            <a:off x="3470148" y="1901952"/>
-            <a:ext cx="2203704" cy="365760"/>
-          </a:xfrm>
-          <a:prstGeom prst="rect">
-            <a:avLst/>
-          </a:prstGeom>
-          <a:noFill/>
-          <a:ln/>
-        </p:spPr>
-        <p:txBody>
-          <a:bodyPr wrap="square" lIns="0" tIns="0" rIns="0" bIns="0" rtlCol="0" anchor="t"/>
-          <a:lstStyle/>
-          <a:p>
-            <a:pPr indent="0" marL="0">
-              <a:buNone/>
-            </a:pPr>
-            <a:r>
-              <a:rPr lang="en-US" sz="1600" b="1" dirty="0">
-                <a:solidFill>
-                  <a:schemeClr val="tx1"/>
-                </a:solidFill>
-              </a:rPr>
-              <a:t>Playwright</a:t>
-            </a:r>
-            <a:endParaRPr lang="en-US" sz="1600" dirty="0"/>
-          </a:p>
-        </p:txBody>
-      </p:sp>
-      <p:sp>
-        <p:nvSpPr>
-          <p:cNvPr id="12" name="Text 7"/>
-          <p:cNvSpPr txBox="1"/>
-          <p:nvPr/>
-        </p:nvSpPr>
-        <p:spPr>
-          <a:xfrm>
-            <a:off x="3470148" y="2313432"/>
-            <a:ext cx="2203704" cy="1280160"/>
-          </a:xfrm>
-          <a:prstGeom prst="rect">
-            <a:avLst/>
-          </a:prstGeom>
-          <a:noFill/>
-          <a:ln/>
-        </p:spPr>
-        <p:txBody>
-          <a:bodyPr wrap="square" lIns="0" tIns="0" rIns="0" bIns="0" rtlCol="0" anchor="t"/>
-          <a:lstStyle/>
-          <a:p>
-            <a:pPr indent="0" marL="0">
-              <a:buNone/>
-            </a:pPr>
-            <a:r>
-              <a:rPr lang="en-US" sz="1600" dirty="0">
-                <a:solidFill>
-                  <a:schemeClr val="tx2"/>
-                </a:solidFill>
-              </a:rPr>
-              <a:t>Claude opens your page in Chrome, clicks and takes screenshots</a:t>
-            </a:r>
-            <a:endParaRPr lang="en-US" sz="1600" dirty="0"/>
-          </a:p>
-        </p:txBody>
-      </p:sp>
-      <p:sp>
-        <p:nvSpPr>
-          <p:cNvPr id="13" name="card GitHub"/>
-          <p:cNvSpPr/>
-          <p:nvPr/>
-        </p:nvSpPr>
-        <p:spPr>
-          <a:xfrm>
-            <a:off x="6080760" y="1188720"/>
-            <a:ext cx="2606040" cy="2514600"/>
-          </a:xfrm>
-          <a:prstGeom prst="roundRect">
-            <a:avLst>
-              <a:gd name="adj" fmla="val 2909"/>
-            </a:avLst>
-          </a:prstGeom>
-          <a:solidFill>
-            <a:schemeClr val="bg2"/>
-          </a:solidFill>
-          <a:ln/>
-        </p:spPr>
-      </p:sp>
-      <p:pic>
-        <p:nvPicPr>
-          <p:cNvPr id="14" name="icon GitHub" descr="preencoded.png">    </p:cNvPr>
+          <p:cNvPr id="6" name="icon Context7" descr="preencoded.png"/>
           <p:cNvPicPr>
             <a:picLocks noChangeAspect="1"/>
           </p:cNvPicPr>
@@ -15390,6 +15268,256 @@
         </p:blipFill>
         <p:spPr>
           <a:xfrm>
+            <a:off x="658368" y="1371600"/>
+            <a:ext cx="411480" cy="411480"/>
+          </a:xfrm>
+          <a:prstGeom prst="rect">
+            <a:avLst/>
+          </a:prstGeom>
+        </p:spPr>
+      </p:pic>
+      <p:sp>
+        <p:nvSpPr>
+          <p:cNvPr id="7" name="Text 3"/>
+          <p:cNvSpPr txBox="1"/>
+          <p:nvPr/>
+        </p:nvSpPr>
+        <p:spPr>
+          <a:xfrm>
+            <a:off x="658368" y="1901952"/>
+            <a:ext cx="2203704" cy="365760"/>
+          </a:xfrm>
+          <a:prstGeom prst="rect">
+            <a:avLst/>
+          </a:prstGeom>
+          <a:noFill/>
+          <a:ln/>
+        </p:spPr>
+        <p:txBody>
+          <a:bodyPr wrap="square" lIns="0" tIns="0" rIns="0" bIns="0" rtlCol="0" anchor="t"/>
+          <a:lstStyle/>
+          <a:p>
+            <a:pPr marL="0" indent="0">
+              <a:buNone/>
+            </a:pPr>
+            <a:r>
+              <a:rPr lang="en-US" sz="1600" b="1" dirty="0">
+                <a:solidFill>
+                  <a:schemeClr val="tx1"/>
+                </a:solidFill>
+              </a:rPr>
+              <a:t>Context7</a:t>
+            </a:r>
+            <a:endParaRPr lang="en-US" sz="1600" dirty="0"/>
+          </a:p>
+        </p:txBody>
+      </p:sp>
+      <p:sp>
+        <p:nvSpPr>
+          <p:cNvPr id="8" name="Text 4"/>
+          <p:cNvSpPr txBox="1"/>
+          <p:nvPr/>
+        </p:nvSpPr>
+        <p:spPr>
+          <a:xfrm>
+            <a:off x="658368" y="2313432"/>
+            <a:ext cx="2203704" cy="1280160"/>
+          </a:xfrm>
+          <a:prstGeom prst="rect">
+            <a:avLst/>
+          </a:prstGeom>
+          <a:noFill/>
+          <a:ln/>
+        </p:spPr>
+        <p:txBody>
+          <a:bodyPr wrap="square" lIns="0" tIns="0" rIns="0" bIns="0" rtlCol="0" anchor="t"/>
+          <a:lstStyle/>
+          <a:p>
+            <a:pPr marL="0" indent="0">
+              <a:buNone/>
+            </a:pPr>
+            <a:r>
+              <a:rPr lang="en-US" sz="1600" dirty="0">
+                <a:solidFill>
+                  <a:schemeClr val="tx2"/>
+                </a:solidFill>
+              </a:rPr>
+              <a:t>Current library docs, so Claude stops guessing APIs</a:t>
+            </a:r>
+            <a:endParaRPr lang="en-US" sz="1600" dirty="0"/>
+          </a:p>
+        </p:txBody>
+      </p:sp>
+      <p:sp>
+        <p:nvSpPr>
+          <p:cNvPr id="9" name="card Playwright"/>
+          <p:cNvSpPr/>
+          <p:nvPr/>
+        </p:nvSpPr>
+        <p:spPr>
+          <a:xfrm>
+            <a:off x="3268980" y="1188720"/>
+            <a:ext cx="2606040" cy="2514600"/>
+          </a:xfrm>
+          <a:prstGeom prst="roundRect">
+            <a:avLst>
+              <a:gd name="adj" fmla="val 2909"/>
+            </a:avLst>
+          </a:prstGeom>
+          <a:solidFill>
+            <a:schemeClr val="bg2"/>
+          </a:solidFill>
+          <a:ln/>
+        </p:spPr>
+        <p:txBody>
+          <a:bodyPr/>
+          <a:lstStyle/>
+          <a:p>
+            <a:endParaRPr lang="en-US"/>
+          </a:p>
+        </p:txBody>
+      </p:sp>
+      <p:pic>
+        <p:nvPicPr>
+          <p:cNvPr id="10" name="icon Playwright" descr="preencoded.png"/>
+          <p:cNvPicPr>
+            <a:picLocks noChangeAspect="1"/>
+          </p:cNvPicPr>
+          <p:nvPr/>
+        </p:nvPicPr>
+        <p:blipFill>
+          <a:blip r:embed="rId4"/>
+          <a:stretch>
+            <a:fillRect/>
+          </a:stretch>
+        </p:blipFill>
+        <p:spPr>
+          <a:xfrm>
+            <a:off x="3470148" y="1371600"/>
+            <a:ext cx="411480" cy="411480"/>
+          </a:xfrm>
+          <a:prstGeom prst="rect">
+            <a:avLst/>
+          </a:prstGeom>
+        </p:spPr>
+      </p:pic>
+      <p:sp>
+        <p:nvSpPr>
+          <p:cNvPr id="11" name="Text 6"/>
+          <p:cNvSpPr txBox="1"/>
+          <p:nvPr/>
+        </p:nvSpPr>
+        <p:spPr>
+          <a:xfrm>
+            <a:off x="3470148" y="1901952"/>
+            <a:ext cx="2203704" cy="365760"/>
+          </a:xfrm>
+          <a:prstGeom prst="rect">
+            <a:avLst/>
+          </a:prstGeom>
+          <a:noFill/>
+          <a:ln/>
+        </p:spPr>
+        <p:txBody>
+          <a:bodyPr wrap="square" lIns="0" tIns="0" rIns="0" bIns="0" rtlCol="0" anchor="t"/>
+          <a:lstStyle/>
+          <a:p>
+            <a:pPr marL="0" indent="0">
+              <a:buNone/>
+            </a:pPr>
+            <a:r>
+              <a:rPr lang="en-US" sz="1600" b="1" dirty="0">
+                <a:solidFill>
+                  <a:schemeClr val="tx1"/>
+                </a:solidFill>
+              </a:rPr>
+              <a:t>Playwright</a:t>
+            </a:r>
+            <a:endParaRPr lang="en-US" sz="1600" dirty="0"/>
+          </a:p>
+        </p:txBody>
+      </p:sp>
+      <p:sp>
+        <p:nvSpPr>
+          <p:cNvPr id="12" name="Text 7"/>
+          <p:cNvSpPr txBox="1"/>
+          <p:nvPr/>
+        </p:nvSpPr>
+        <p:spPr>
+          <a:xfrm>
+            <a:off x="3470148" y="2313432"/>
+            <a:ext cx="2203704" cy="1280160"/>
+          </a:xfrm>
+          <a:prstGeom prst="rect">
+            <a:avLst/>
+          </a:prstGeom>
+          <a:noFill/>
+          <a:ln/>
+        </p:spPr>
+        <p:txBody>
+          <a:bodyPr wrap="square" lIns="0" tIns="0" rIns="0" bIns="0" rtlCol="0" anchor="t"/>
+          <a:lstStyle/>
+          <a:p>
+            <a:pPr marL="0" indent="0">
+              <a:buNone/>
+            </a:pPr>
+            <a:r>
+              <a:rPr lang="en-US" sz="1600" dirty="0">
+                <a:solidFill>
+                  <a:schemeClr val="tx2"/>
+                </a:solidFill>
+              </a:rPr>
+              <a:t>Claude opens your page in Chrome, clicks and takes screenshots</a:t>
+            </a:r>
+            <a:endParaRPr lang="en-US" sz="1600" dirty="0"/>
+          </a:p>
+        </p:txBody>
+      </p:sp>
+      <p:sp>
+        <p:nvSpPr>
+          <p:cNvPr id="13" name="card GitHub"/>
+          <p:cNvSpPr/>
+          <p:nvPr/>
+        </p:nvSpPr>
+        <p:spPr>
+          <a:xfrm>
+            <a:off x="6080760" y="1188720"/>
+            <a:ext cx="2606040" cy="2514600"/>
+          </a:xfrm>
+          <a:prstGeom prst="roundRect">
+            <a:avLst>
+              <a:gd name="adj" fmla="val 2909"/>
+            </a:avLst>
+          </a:prstGeom>
+          <a:solidFill>
+            <a:schemeClr val="bg2"/>
+          </a:solidFill>
+          <a:ln/>
+        </p:spPr>
+        <p:txBody>
+          <a:bodyPr/>
+          <a:lstStyle/>
+          <a:p>
+            <a:endParaRPr lang="en-US"/>
+          </a:p>
+        </p:txBody>
+      </p:sp>
+      <p:pic>
+        <p:nvPicPr>
+          <p:cNvPr id="14" name="icon GitHub" descr="preencoded.png"/>
+          <p:cNvPicPr>
+            <a:picLocks noChangeAspect="1"/>
+          </p:cNvPicPr>
+          <p:nvPr/>
+        </p:nvPicPr>
+        <p:blipFill>
+          <a:blip r:embed="rId5"/>
+          <a:stretch>
+            <a:fillRect/>
+          </a:stretch>
+        </p:blipFill>
+        <p:spPr>
+          <a:xfrm>
             <a:off x="6281928" y="1371600"/>
             <a:ext cx="411480" cy="411480"/>
           </a:xfrm>
@@ -15419,7 +15547,7 @@
           <a:bodyPr wrap="square" lIns="0" tIns="0" rIns="0" bIns="0" rtlCol="0" anchor="t"/>
           <a:lstStyle/>
           <a:p>
-            <a:pPr indent="0" marL="0">
+            <a:pPr marL="0" indent="0">
               <a:buNone/>
             </a:pPr>
             <a:r>
@@ -15455,7 +15583,7 @@
           <a:bodyPr wrap="square" lIns="0" tIns="0" rIns="0" bIns="0" rtlCol="0" anchor="t"/>
           <a:lstStyle/>
           <a:p>
-            <a:pPr indent="0" marL="0">
+            <a:pPr marL="0" indent="0">
               <a:buNone/>
             </a:pPr>
             <a:r>
@@ -15491,7 +15619,7 @@
           <a:bodyPr wrap="square" lIns="0" tIns="0" rIns="0" bIns="0" rtlCol="0" anchor="t"/>
           <a:lstStyle/>
           <a:p>
-            <a:pPr algn="l" indent="0" marL="0">
+            <a:pPr marL="0" indent="0" algn="l">
               <a:buNone/>
             </a:pPr>
             <a:r>
@@ -15526,7 +15654,7 @@
           </a:prstGeom>
           <a:extLst>
             <a:ext uri="{C572A759-6A51-4108-AA02-DFA0A04FC94B}">
-              <ma14:wrappingTextBoxFlag xmlns:ma14="http://schemas.microsoft.com/office/mac/drawingml/2011/main" val="0"/>
+              <ma14:wrappingTextBoxFlag xmlns:ma14="http://schemas.microsoft.com/office/mac/drawingml/2011/main" xmlns="" val="0"/>
             </a:ext>
           </a:extLst>
         </p:spPr>
@@ -15544,7 +15672,7 @@
           <a:p>
             <a:pPr algn="r"/>
             <a:fld id="{F7021451-1387-4CA6-816F-3879F97B5CBC}" type="slidenum">
-              <a:rPr b="0" lang="en-US"/>
+              <a:rPr lang="en-US" b="0"/>
               <a:t>27</a:t>
             </a:fld>
             <a:endParaRPr lang="en-US"/>
@@ -15579,9 +15707,11 @@
       <p:sp>
         <p:nvSpPr>
           <p:cNvPr id="2" name="Text 0"/>
-          <p:cNvSpPr/>
+          <p:cNvSpPr>
+            <a:spLocks noGrp="1"/>
+          </p:cNvSpPr>
           <p:nvPr>
-            <p:ph idx="100" type="title" hasCustomPrompt="1"/>
+            <p:ph type="title" idx="100" hasCustomPrompt="1"/>
           </p:nvPr>
         </p:nvSpPr>
         <p:spPr>
@@ -15599,7 +15729,7 @@
           <a:bodyPr wrap="square" lIns="0" tIns="0" rIns="0" bIns="0" rtlCol="0" anchor="ctr"/>
           <a:lstStyle/>
           <a:p>
-            <a:pPr algn="l" indent="0" marL="0">
+            <a:pPr marL="0" indent="0" algn="l">
               <a:buNone/>
             </a:pPr>
             <a:r>
@@ -15639,7 +15769,7 @@
           <a:bodyPr wrap="square" lIns="0" tIns="0" rIns="0" bIns="0" rtlCol="0" anchor="ctr"/>
           <a:lstStyle/>
           <a:p>
-            <a:pPr algn="ctr" indent="0" marL="0">
+            <a:pPr marL="0" indent="0" algn="ctr">
               <a:buNone/>
             </a:pPr>
             <a:r>
@@ -15675,6 +15805,13 @@
           </a:solidFill>
           <a:ln/>
         </p:spPr>
+        <p:txBody>
+          <a:bodyPr/>
+          <a:lstStyle/>
+          <a:p>
+            <a:endParaRPr lang="en-US"/>
+          </a:p>
+        </p:txBody>
       </p:sp>
       <p:sp>
         <p:nvSpPr>
@@ -15697,7 +15834,7 @@
           <a:bodyPr wrap="square" lIns="0" tIns="0" rIns="0" bIns="0" rtlCol="0" anchor="t"/>
           <a:lstStyle/>
           <a:p>
-            <a:pPr indent="0" marL="0">
+            <a:pPr marL="0" indent="0">
               <a:buNone/>
             </a:pPr>
             <a:r>
@@ -15736,6 +15873,13 @@
           </a:solidFill>
           <a:ln/>
         </p:spPr>
+        <p:txBody>
+          <a:bodyPr/>
+          <a:lstStyle/>
+          <a:p>
+            <a:endParaRPr lang="en-US"/>
+          </a:p>
+        </p:txBody>
       </p:sp>
       <p:sp>
         <p:nvSpPr>
@@ -15758,7 +15902,7 @@
           <a:bodyPr wrap="square" lIns="0" tIns="0" rIns="0" bIns="0" rtlCol="0" anchor="t"/>
           <a:lstStyle/>
           <a:p>
-            <a:pPr algn="ctr" indent="0" marL="0">
+            <a:pPr marL="0" indent="0" algn="ctr">
               <a:buNone/>
             </a:pPr>
             <a:r>
@@ -15794,7 +15938,7 @@
           <a:bodyPr wrap="square" lIns="0" tIns="0" rIns="0" bIns="0" rtlCol="0" anchor="t"/>
           <a:lstStyle/>
           <a:p>
-            <a:pPr algn="ctr" indent="0" marL="0">
+            <a:pPr marL="0" indent="0" algn="ctr">
               <a:buNone/>
             </a:pPr>
             <a:r>
@@ -15832,6 +15976,13 @@
             <a:tailEnd type="triangle"/>
           </a:ln>
         </p:spPr>
+        <p:txBody>
+          <a:bodyPr/>
+          <a:lstStyle/>
+          <a:p>
+            <a:endParaRPr lang="en-US"/>
+          </a:p>
+        </p:txBody>
       </p:sp>
       <p:sp>
         <p:nvSpPr>
@@ -15854,6 +16005,13 @@
           </a:solidFill>
           <a:ln/>
         </p:spPr>
+        <p:txBody>
+          <a:bodyPr/>
+          <a:lstStyle/>
+          <a:p>
+            <a:endParaRPr lang="en-US"/>
+          </a:p>
+        </p:txBody>
       </p:sp>
       <p:sp>
         <p:nvSpPr>
@@ -15876,7 +16034,7 @@
           <a:bodyPr wrap="square" lIns="0" tIns="0" rIns="0" bIns="0" rtlCol="0" anchor="t"/>
           <a:lstStyle/>
           <a:p>
-            <a:pPr algn="ctr" indent="0" marL="0">
+            <a:pPr marL="0" indent="0" algn="ctr">
               <a:buNone/>
             </a:pPr>
             <a:r>
@@ -15912,7 +16070,7 @@
           <a:bodyPr wrap="square" lIns="0" tIns="0" rIns="0" bIns="0" rtlCol="0" anchor="t"/>
           <a:lstStyle/>
           <a:p>
-            <a:pPr algn="ctr" indent="0" marL="0">
+            <a:pPr marL="0" indent="0" algn="ctr">
               <a:buNone/>
             </a:pPr>
             <a:r>
@@ -15950,6 +16108,13 @@
             <a:tailEnd type="triangle"/>
           </a:ln>
         </p:spPr>
+        <p:txBody>
+          <a:bodyPr/>
+          <a:lstStyle/>
+          <a:p>
+            <a:endParaRPr lang="en-US"/>
+          </a:p>
+        </p:txBody>
       </p:sp>
       <p:sp>
         <p:nvSpPr>
@@ -15972,6 +16137,13 @@
           </a:solidFill>
           <a:ln/>
         </p:spPr>
+        <p:txBody>
+          <a:bodyPr/>
+          <a:lstStyle/>
+          <a:p>
+            <a:endParaRPr lang="en-US"/>
+          </a:p>
+        </p:txBody>
       </p:sp>
       <p:sp>
         <p:nvSpPr>
@@ -15994,7 +16166,7 @@
           <a:bodyPr wrap="square" lIns="0" tIns="0" rIns="0" bIns="0" rtlCol="0" anchor="t"/>
           <a:lstStyle/>
           <a:p>
-            <a:pPr algn="ctr" indent="0" marL="0">
+            <a:pPr marL="0" indent="0" algn="ctr">
               <a:buNone/>
             </a:pPr>
             <a:r>
@@ -16030,7 +16202,7 @@
           <a:bodyPr wrap="square" lIns="0" tIns="0" rIns="0" bIns="0" rtlCol="0" anchor="t"/>
           <a:lstStyle/>
           <a:p>
-            <a:pPr algn="ctr" indent="0" marL="0">
+            <a:pPr marL="0" indent="0" algn="ctr">
               <a:buNone/>
             </a:pPr>
             <a:r>
@@ -16068,6 +16240,13 @@
             <a:tailEnd type="triangle"/>
           </a:ln>
         </p:spPr>
+        <p:txBody>
+          <a:bodyPr/>
+          <a:lstStyle/>
+          <a:p>
+            <a:endParaRPr lang="en-US"/>
+          </a:p>
+        </p:txBody>
       </p:sp>
       <p:sp>
         <p:nvSpPr>
@@ -16090,6 +16269,13 @@
           </a:solidFill>
           <a:ln/>
         </p:spPr>
+        <p:txBody>
+          <a:bodyPr/>
+          <a:lstStyle/>
+          <a:p>
+            <a:endParaRPr lang="en-US"/>
+          </a:p>
+        </p:txBody>
       </p:sp>
       <p:sp>
         <p:nvSpPr>
@@ -16112,7 +16298,7 @@
           <a:bodyPr wrap="square" lIns="0" tIns="0" rIns="0" bIns="0" rtlCol="0" anchor="t"/>
           <a:lstStyle/>
           <a:p>
-            <a:pPr algn="ctr" indent="0" marL="0">
+            <a:pPr marL="0" indent="0" algn="ctr">
               <a:buNone/>
             </a:pPr>
             <a:r>
@@ -16148,7 +16334,7 @@
           <a:bodyPr wrap="square" lIns="0" tIns="0" rIns="0" bIns="0" rtlCol="0" anchor="t"/>
           <a:lstStyle/>
           <a:p>
-            <a:pPr algn="ctr" indent="0" marL="0">
+            <a:pPr marL="0" indent="0" algn="ctr">
               <a:buNone/>
             </a:pPr>
             <a:r>
@@ -16186,6 +16372,13 @@
             <a:tailEnd type="triangle"/>
           </a:ln>
         </p:spPr>
+        <p:txBody>
+          <a:bodyPr/>
+          <a:lstStyle/>
+          <a:p>
+            <a:endParaRPr lang="en-US"/>
+          </a:p>
+        </p:txBody>
       </p:sp>
       <p:sp>
         <p:nvSpPr>
@@ -16208,6 +16401,13 @@
           </a:solidFill>
           <a:ln/>
         </p:spPr>
+        <p:txBody>
+          <a:bodyPr/>
+          <a:lstStyle/>
+          <a:p>
+            <a:endParaRPr lang="en-US"/>
+          </a:p>
+        </p:txBody>
       </p:sp>
       <p:sp>
         <p:nvSpPr>
@@ -16230,7 +16430,7 @@
           <a:bodyPr wrap="square" lIns="0" tIns="0" rIns="0" bIns="0" rtlCol="0" anchor="t"/>
           <a:lstStyle/>
           <a:p>
-            <a:pPr algn="ctr" indent="0" marL="0">
+            <a:pPr marL="0" indent="0" algn="ctr">
               <a:buNone/>
             </a:pPr>
             <a:r>
@@ -16266,7 +16466,7 @@
           <a:bodyPr wrap="square" lIns="0" tIns="0" rIns="0" bIns="0" rtlCol="0" anchor="t"/>
           <a:lstStyle/>
           <a:p>
-            <a:pPr algn="ctr" indent="0" marL="0">
+            <a:pPr marL="0" indent="0" algn="ctr">
               <a:buNone/>
             </a:pPr>
             <a:r>
@@ -16304,6 +16504,13 @@
             <a:tailEnd type="triangle"/>
           </a:ln>
         </p:spPr>
+        <p:txBody>
+          <a:bodyPr/>
+          <a:lstStyle/>
+          <a:p>
+            <a:endParaRPr lang="en-US"/>
+          </a:p>
+        </p:txBody>
       </p:sp>
       <p:sp>
         <p:nvSpPr>
@@ -16326,6 +16533,13 @@
           </a:solidFill>
           <a:ln/>
         </p:spPr>
+        <p:txBody>
+          <a:bodyPr/>
+          <a:lstStyle/>
+          <a:p>
+            <a:endParaRPr lang="en-US"/>
+          </a:p>
+        </p:txBody>
       </p:sp>
       <p:sp>
         <p:nvSpPr>
@@ -16348,7 +16562,7 @@
           <a:bodyPr wrap="square" lIns="0" tIns="0" rIns="0" bIns="0" rtlCol="0" anchor="t"/>
           <a:lstStyle/>
           <a:p>
-            <a:pPr algn="ctr" indent="0" marL="0">
+            <a:pPr marL="0" indent="0" algn="ctr">
               <a:buNone/>
             </a:pPr>
             <a:r>
@@ -16384,7 +16598,7 @@
           <a:bodyPr wrap="square" lIns="0" tIns="0" rIns="0" bIns="0" rtlCol="0" anchor="t"/>
           <a:lstStyle/>
           <a:p>
-            <a:pPr algn="ctr" indent="0" marL="0">
+            <a:pPr marL="0" indent="0" algn="ctr">
               <a:buNone/>
             </a:pPr>
             <a:r>
@@ -16420,7 +16634,7 @@
           <a:bodyPr wrap="square" lIns="0" tIns="0" rIns="0" bIns="0" rtlCol="0" anchor="t"/>
           <a:lstStyle/>
           <a:p>
-            <a:pPr algn="l" indent="0" marL="0">
+            <a:pPr marL="0" indent="0" algn="l">
               <a:buNone/>
             </a:pPr>
             <a:r>
@@ -16437,7 +16651,7 @@
       </p:sp>
       <p:sp>
         <p:nvSpPr>
-          <p:cNvPr id="25" name="Slide Number Placeholder 0"/>
+          <p:cNvPr id="4" name="Slide Number Placeholder 0"/>
           <p:cNvSpPr>
             <a:spLocks noGrp="1"/>
           </p:cNvSpPr>
@@ -16455,7 +16669,7 @@
           </a:prstGeom>
           <a:extLst>
             <a:ext uri="{C572A759-6A51-4108-AA02-DFA0A04FC94B}">
-              <ma14:wrappingTextBoxFlag xmlns:ma14="http://schemas.microsoft.com/office/mac/drawingml/2011/main" val="0"/>
+              <ma14:wrappingTextBoxFlag xmlns:ma14="http://schemas.microsoft.com/office/mac/drawingml/2011/main" xmlns="" val="0"/>
             </a:ext>
           </a:extLst>
         </p:spPr>
@@ -16473,7 +16687,7 @@
           <a:p>
             <a:pPr algn="r"/>
             <a:fld id="{F7021451-1387-4CA6-816F-3879F97B5CBC}" type="slidenum">
-              <a:rPr b="0" lang="en-US"/>
+              <a:rPr lang="en-US" b="0"/>
               <a:t>28</a:t>
             </a:fld>
             <a:endParaRPr lang="en-US"/>
@@ -16508,9 +16722,11 @@
       <p:sp>
         <p:nvSpPr>
           <p:cNvPr id="2" name="Text 0"/>
-          <p:cNvSpPr/>
+          <p:cNvSpPr>
+            <a:spLocks noGrp="1"/>
+          </p:cNvSpPr>
           <p:nvPr>
-            <p:ph idx="100" type="title" hasCustomPrompt="1"/>
+            <p:ph type="title" idx="100" hasCustomPrompt="1"/>
           </p:nvPr>
         </p:nvSpPr>
         <p:spPr>
@@ -16528,7 +16744,7 @@
           <a:bodyPr wrap="square" lIns="0" tIns="0" rIns="0" bIns="0" rtlCol="0" anchor="ctr"/>
           <a:lstStyle/>
           <a:p>
-            <a:pPr algn="l" indent="0" marL="0">
+            <a:pPr marL="0" indent="0" algn="l">
               <a:buNone/>
             </a:pPr>
             <a:r>
@@ -16568,7 +16784,7 @@
           <a:bodyPr wrap="square" lIns="0" tIns="0" rIns="0" bIns="0" rtlCol="0" anchor="ctr"/>
           <a:lstStyle/>
           <a:p>
-            <a:pPr algn="ctr" indent="0" marL="0">
+            <a:pPr marL="0" indent="0" algn="ctr">
               <a:buNone/>
             </a:pPr>
             <a:r>
@@ -16698,6 +16914,13 @@
           </a:solidFill>
           <a:ln/>
         </p:spPr>
+        <p:txBody>
+          <a:bodyPr/>
+          <a:lstStyle/>
+          <a:p>
+            <a:endParaRPr lang="en-US"/>
+          </a:p>
+        </p:txBody>
       </p:sp>
       <p:sp>
         <p:nvSpPr>
@@ -16720,7 +16943,7 @@
           <a:bodyPr wrap="square" lIns="0" tIns="0" rIns="0" bIns="0" rtlCol="0" anchor="t"/>
           <a:lstStyle/>
           <a:p>
-            <a:pPr indent="0" marL="0">
+            <a:pPr marL="0" indent="0">
               <a:buNone/>
             </a:pPr>
             <a:r>
@@ -16737,7 +16960,7 @@
             <a:endParaRPr lang="en-US" sz="1200" dirty="0"/>
           </a:p>
           <a:p>
-            <a:pPr indent="0" marL="0">
+            <a:pPr marL="0" indent="0">
               <a:buNone/>
             </a:pPr>
             <a:r>
@@ -16754,7 +16977,7 @@
             <a:endParaRPr lang="en-US" sz="1200" dirty="0"/>
           </a:p>
           <a:p>
-            <a:pPr indent="0" marL="0">
+            <a:pPr marL="0" indent="0">
               <a:buNone/>
             </a:pPr>
             <a:r>
@@ -16771,7 +16994,7 @@
             <a:endParaRPr lang="en-US" sz="1200" dirty="0"/>
           </a:p>
           <a:p>
-            <a:pPr indent="0" marL="0">
+            <a:pPr marL="0" indent="0">
               <a:buNone/>
             </a:pPr>
             <a:r>
@@ -16788,7 +17011,7 @@
             <a:endParaRPr lang="en-US" sz="1200" dirty="0"/>
           </a:p>
           <a:p>
-            <a:pPr indent="0" marL="0">
+            <a:pPr marL="0" indent="0">
               <a:buNone/>
             </a:pPr>
             <a:r>
@@ -16805,7 +17028,7 @@
             <a:endParaRPr lang="en-US" sz="1200" dirty="0"/>
           </a:p>
           <a:p>
-            <a:pPr indent="0" marL="0">
+            <a:pPr marL="0" indent="0">
               <a:buNone/>
             </a:pPr>
             <a:r>
@@ -16822,7 +17045,7 @@
             <a:endParaRPr lang="en-US" sz="1200" dirty="0"/>
           </a:p>
           <a:p>
-            <a:pPr indent="0" marL="0">
+            <a:pPr marL="0" indent="0">
               <a:buNone/>
             </a:pPr>
             <a:r>
@@ -16839,7 +17062,7 @@
             <a:endParaRPr lang="en-US" sz="1200" dirty="0"/>
           </a:p>
           <a:p>
-            <a:pPr indent="0" marL="0">
+            <a:pPr marL="0" indent="0">
               <a:buNone/>
             </a:pPr>
             <a:r>
@@ -16856,7 +17079,7 @@
             <a:endParaRPr lang="en-US" sz="1200" dirty="0"/>
           </a:p>
           <a:p>
-            <a:pPr indent="0" marL="0">
+            <a:pPr marL="0" indent="0">
               <a:buNone/>
             </a:pPr>
             <a:r>
@@ -16895,7 +17118,7 @@
           <a:bodyPr wrap="square" lIns="0" tIns="0" rIns="0" bIns="0" rtlCol="0" anchor="ctr"/>
           <a:lstStyle/>
           <a:p>
-            <a:pPr indent="0" marL="0">
+            <a:pPr marL="0" indent="0">
               <a:buNone/>
             </a:pPr>
             <a:r>
@@ -16930,7 +17153,7 @@
           </a:prstGeom>
           <a:extLst>
             <a:ext uri="{C572A759-6A51-4108-AA02-DFA0A04FC94B}">
-              <ma14:wrappingTextBoxFlag xmlns:ma14="http://schemas.microsoft.com/office/mac/drawingml/2011/main" val="0"/>
+              <ma14:wrappingTextBoxFlag xmlns:ma14="http://schemas.microsoft.com/office/mac/drawingml/2011/main" xmlns="" val="0"/>
             </a:ext>
           </a:extLst>
         </p:spPr>
@@ -16948,7 +17171,7 @@
           <a:p>
             <a:pPr algn="r"/>
             <a:fld id="{F7021451-1387-4CA6-816F-3879F97B5CBC}" type="slidenum">
-              <a:rPr b="0" lang="en-US"/>
+              <a:rPr lang="en-US" b="0"/>
               <a:t>29</a:t>
             </a:fld>
             <a:endParaRPr lang="en-US"/>
@@ -16983,9 +17206,11 @@
       <p:sp>
         <p:nvSpPr>
           <p:cNvPr id="2" name="Text 0"/>
-          <p:cNvSpPr/>
+          <p:cNvSpPr>
+            <a:spLocks noGrp="1"/>
+          </p:cNvSpPr>
           <p:nvPr>
-            <p:ph idx="100" type="title" hasCustomPrompt="1"/>
+            <p:ph type="title" idx="100" hasCustomPrompt="1"/>
           </p:nvPr>
         </p:nvSpPr>
         <p:spPr>
@@ -17003,7 +17228,7 @@
           <a:bodyPr wrap="square" lIns="0" tIns="0" rIns="0" bIns="0" rtlCol="0" anchor="ctr"/>
           <a:lstStyle/>
           <a:p>
-            <a:pPr algn="l" indent="0" marL="0">
+            <a:pPr marL="0" indent="0" algn="l">
               <a:buNone/>
             </a:pPr>
             <a:r>
@@ -17039,17 +17264,24 @@
           </a:solidFill>
           <a:ln/>
         </p:spPr>
+        <p:txBody>
+          <a:bodyPr/>
+          <a:lstStyle/>
+          <a:p>
+            <a:endParaRPr lang="en-US"/>
+          </a:p>
+        </p:txBody>
       </p:sp>
       <p:pic>
         <p:nvPicPr>
-          <p:cNvPr id="5" name="Image 0" descr="preencoded.png">    </p:cNvPr>
+          <p:cNvPr id="5" name="Image 0" descr="preencoded.png"/>
           <p:cNvPicPr>
             <a:picLocks noChangeAspect="1"/>
           </p:cNvPicPr>
           <p:nvPr/>
         </p:nvPicPr>
         <p:blipFill>
-          <a:blip r:embed="rId1"/>
+          <a:blip r:embed="rId3"/>
           <a:stretch>
             <a:fillRect/>
           </a:stretch>
@@ -17085,7 +17317,7 @@
           <a:bodyPr wrap="square" lIns="0" tIns="0" rIns="0" bIns="0" rtlCol="0" anchor="t"/>
           <a:lstStyle/>
           <a:p>
-            <a:pPr algn="ctr" indent="0" marL="0">
+            <a:pPr marL="0" indent="0" algn="ctr">
               <a:buNone/>
             </a:pPr>
             <a:r>
@@ -17121,7 +17353,7 @@
           <a:bodyPr wrap="square" lIns="0" tIns="0" rIns="0" bIns="0" rtlCol="0" anchor="t"/>
           <a:lstStyle/>
           <a:p>
-            <a:pPr algn="ctr" indent="0" marL="0">
+            <a:pPr marL="0" indent="0" algn="ctr">
               <a:buNone/>
             </a:pPr>
             <a:r>
@@ -17135,7 +17367,7 @@
             <a:endParaRPr lang="en-US" sz="1200" dirty="0"/>
           </a:p>
           <a:p>
-            <a:pPr algn="ctr" indent="0" marL="0">
+            <a:pPr marL="0" indent="0" algn="ctr">
               <a:buNone/>
             </a:pPr>
             <a:r>
@@ -17173,6 +17405,13 @@
             <a:tailEnd type="triangle"/>
           </a:ln>
         </p:spPr>
+        <p:txBody>
+          <a:bodyPr/>
+          <a:lstStyle/>
+          <a:p>
+            <a:endParaRPr lang="en-US"/>
+          </a:p>
+        </p:txBody>
       </p:sp>
       <p:sp>
         <p:nvSpPr>
@@ -17195,17 +17434,24 @@
           </a:solidFill>
           <a:ln/>
         </p:spPr>
+        <p:txBody>
+          <a:bodyPr/>
+          <a:lstStyle/>
+          <a:p>
+            <a:endParaRPr lang="en-US"/>
+          </a:p>
+        </p:txBody>
       </p:sp>
       <p:pic>
         <p:nvPicPr>
-          <p:cNvPr id="10" name="Image 1" descr="preencoded.png">    </p:cNvPr>
+          <p:cNvPr id="10" name="Image 1" descr="preencoded.png"/>
           <p:cNvPicPr>
             <a:picLocks noChangeAspect="1"/>
           </p:cNvPicPr>
           <p:nvPr/>
         </p:nvPicPr>
         <p:blipFill>
-          <a:blip r:embed="rId2"/>
+          <a:blip r:embed="rId4"/>
           <a:stretch>
             <a:fillRect/>
           </a:stretch>
@@ -17241,7 +17487,7 @@
           <a:bodyPr wrap="square" lIns="0" tIns="0" rIns="0" bIns="0" rtlCol="0" anchor="t"/>
           <a:lstStyle/>
           <a:p>
-            <a:pPr algn="ctr" indent="0" marL="0">
+            <a:pPr marL="0" indent="0" algn="ctr">
               <a:buNone/>
             </a:pPr>
             <a:r>
@@ -17277,7 +17523,7 @@
           <a:bodyPr wrap="square" lIns="0" tIns="0" rIns="0" bIns="0" rtlCol="0" anchor="t"/>
           <a:lstStyle/>
           <a:p>
-            <a:pPr algn="ctr" indent="0" marL="0">
+            <a:pPr marL="0" indent="0" algn="ctr">
               <a:buNone/>
             </a:pPr>
             <a:r>
@@ -17291,7 +17537,7 @@
             <a:endParaRPr lang="en-US" sz="1200" dirty="0"/>
           </a:p>
           <a:p>
-            <a:pPr algn="ctr" indent="0" marL="0">
+            <a:pPr marL="0" indent="0" algn="ctr">
               <a:buNone/>
             </a:pPr>
             <a:r>
@@ -17305,7 +17551,7 @@
             <a:endParaRPr lang="en-US" sz="1200" dirty="0"/>
           </a:p>
           <a:p>
-            <a:pPr algn="ctr" indent="0" marL="0">
+            <a:pPr marL="0" indent="0" algn="ctr">
               <a:buNone/>
             </a:pPr>
             <a:r>
@@ -17343,6 +17589,13 @@
             <a:tailEnd type="triangle"/>
           </a:ln>
         </p:spPr>
+        <p:txBody>
+          <a:bodyPr/>
+          <a:lstStyle/>
+          <a:p>
+            <a:endParaRPr lang="en-US"/>
+          </a:p>
+        </p:txBody>
       </p:sp>
       <p:sp>
         <p:nvSpPr>
@@ -17365,17 +17618,24 @@
           </a:solidFill>
           <a:ln/>
         </p:spPr>
+        <p:txBody>
+          <a:bodyPr/>
+          <a:lstStyle/>
+          <a:p>
+            <a:endParaRPr lang="en-US"/>
+          </a:p>
+        </p:txBody>
       </p:sp>
       <p:pic>
         <p:nvPicPr>
-          <p:cNvPr id="15" name="Image 2" descr="preencoded.png">    </p:cNvPr>
+          <p:cNvPr id="15" name="Image 2" descr="preencoded.png"/>
           <p:cNvPicPr>
             <a:picLocks noChangeAspect="1"/>
           </p:cNvPicPr>
           <p:nvPr/>
         </p:nvPicPr>
         <p:blipFill>
-          <a:blip r:embed="rId3"/>
+          <a:blip r:embed="rId5"/>
           <a:stretch>
             <a:fillRect/>
           </a:stretch>
@@ -17411,7 +17671,7 @@
           <a:bodyPr wrap="square" lIns="0" tIns="0" rIns="0" bIns="0" rtlCol="0" anchor="t"/>
           <a:lstStyle/>
           <a:p>
-            <a:pPr algn="ctr" indent="0" marL="0">
+            <a:pPr marL="0" indent="0" algn="ctr">
               <a:buNone/>
             </a:pPr>
             <a:r>
@@ -17447,7 +17707,7 @@
           <a:bodyPr wrap="square" lIns="0" tIns="0" rIns="0" bIns="0" rtlCol="0" anchor="t"/>
           <a:lstStyle/>
           <a:p>
-            <a:pPr algn="ctr" indent="0" marL="0">
+            <a:pPr marL="0" indent="0" algn="ctr">
               <a:buNone/>
             </a:pPr>
             <a:r>
@@ -17461,7 +17721,7 @@
             <a:endParaRPr lang="en-US" sz="1200" dirty="0"/>
           </a:p>
           <a:p>
-            <a:pPr algn="ctr" indent="0" marL="0">
+            <a:pPr marL="0" indent="0" algn="ctr">
               <a:buNone/>
             </a:pPr>
             <a:r>
@@ -17499,6 +17759,13 @@
             <a:tailEnd type="triangle"/>
           </a:ln>
         </p:spPr>
+        <p:txBody>
+          <a:bodyPr/>
+          <a:lstStyle/>
+          <a:p>
+            <a:endParaRPr lang="en-US"/>
+          </a:p>
+        </p:txBody>
       </p:sp>
       <p:sp>
         <p:nvSpPr>
@@ -17521,17 +17788,24 @@
           </a:solidFill>
           <a:ln/>
         </p:spPr>
+        <p:txBody>
+          <a:bodyPr/>
+          <a:lstStyle/>
+          <a:p>
+            <a:endParaRPr lang="en-US"/>
+          </a:p>
+        </p:txBody>
       </p:sp>
       <p:pic>
         <p:nvPicPr>
-          <p:cNvPr id="20" name="Image 3" descr="preencoded.png">    </p:cNvPr>
+          <p:cNvPr id="20" name="Image 3" descr="preencoded.png"/>
           <p:cNvPicPr>
             <a:picLocks noChangeAspect="1"/>
           </p:cNvPicPr>
           <p:nvPr/>
         </p:nvPicPr>
         <p:blipFill>
-          <a:blip r:embed="rId4"/>
+          <a:blip r:embed="rId6"/>
           <a:stretch>
             <a:fillRect/>
           </a:stretch>
@@ -17567,7 +17841,7 @@
           <a:bodyPr wrap="square" lIns="0" tIns="0" rIns="0" bIns="0" rtlCol="0" anchor="t"/>
           <a:lstStyle/>
           <a:p>
-            <a:pPr algn="ctr" indent="0" marL="0">
+            <a:pPr marL="0" indent="0" algn="ctr">
               <a:buNone/>
             </a:pPr>
             <a:r>
@@ -17603,7 +17877,7 @@
           <a:bodyPr wrap="square" lIns="0" tIns="0" rIns="0" bIns="0" rtlCol="0" anchor="t"/>
           <a:lstStyle/>
           <a:p>
-            <a:pPr algn="ctr" indent="0" marL="0">
+            <a:pPr marL="0" indent="0" algn="ctr">
               <a:buNone/>
             </a:pPr>
             <a:r>
@@ -17617,7 +17891,7 @@
             <a:endParaRPr lang="en-US" sz="1200" dirty="0"/>
           </a:p>
           <a:p>
-            <a:pPr algn="ctr" indent="0" marL="0">
+            <a:pPr marL="0" indent="0" algn="ctr">
               <a:buNone/>
             </a:pPr>
             <a:r>
@@ -17655,6 +17929,13 @@
             <a:tailEnd type="triangle"/>
           </a:ln>
         </p:spPr>
+        <p:txBody>
+          <a:bodyPr/>
+          <a:lstStyle/>
+          <a:p>
+            <a:endParaRPr lang="en-US"/>
+          </a:p>
+        </p:txBody>
       </p:sp>
       <p:sp>
         <p:nvSpPr>
@@ -17677,17 +17958,24 @@
           </a:solidFill>
           <a:ln/>
         </p:spPr>
+        <p:txBody>
+          <a:bodyPr/>
+          <a:lstStyle/>
+          <a:p>
+            <a:endParaRPr lang="en-US"/>
+          </a:p>
+        </p:txBody>
       </p:sp>
       <p:pic>
         <p:nvPicPr>
-          <p:cNvPr id="25" name="Image 4" descr="preencoded.png">    </p:cNvPr>
+          <p:cNvPr id="25" name="Image 4" descr="preencoded.png"/>
           <p:cNvPicPr>
             <a:picLocks noChangeAspect="1"/>
           </p:cNvPicPr>
           <p:nvPr/>
         </p:nvPicPr>
         <p:blipFill>
-          <a:blip r:embed="rId5"/>
+          <a:blip r:embed="rId7"/>
           <a:stretch>
             <a:fillRect/>
           </a:stretch>
@@ -17723,7 +18011,7 @@
           <a:bodyPr wrap="square" lIns="0" tIns="0" rIns="0" bIns="0" rtlCol="0" anchor="t"/>
           <a:lstStyle/>
           <a:p>
-            <a:pPr algn="ctr" indent="0" marL="0">
+            <a:pPr marL="0" indent="0" algn="ctr">
               <a:buNone/>
             </a:pPr>
             <a:r>
@@ -17759,7 +18047,7 @@
           <a:bodyPr wrap="square" lIns="0" tIns="0" rIns="0" bIns="0" rtlCol="0" anchor="t"/>
           <a:lstStyle/>
           <a:p>
-            <a:pPr algn="ctr" indent="0" marL="0">
+            <a:pPr marL="0" indent="0" algn="ctr">
               <a:buNone/>
             </a:pPr>
             <a:r>
@@ -17773,7 +18061,7 @@
             <a:endParaRPr lang="en-US" sz="1200" dirty="0"/>
           </a:p>
           <a:p>
-            <a:pPr algn="ctr" indent="0" marL="0">
+            <a:pPr marL="0" indent="0" algn="ctr">
               <a:buNone/>
             </a:pPr>
             <a:r>
@@ -17809,7 +18097,7 @@
           <a:bodyPr wrap="square" lIns="0" tIns="0" rIns="0" bIns="0" rtlCol="0" anchor="ctr"/>
           <a:lstStyle/>
           <a:p>
-            <a:pPr indent="0" marL="0">
+            <a:pPr marL="0" indent="0">
               <a:buNone/>
             </a:pPr>
             <a:r>
@@ -17820,9 +18108,6 @@
               </a:rPr>
               <a:t>One repo for the whole day: </a:t>
             </a:r>
-            <a:pPr indent="0" marL="0">
-              <a:buNone/>
-            </a:pPr>
             <a:r>
               <a:rPr lang="en-US" sz="1600" b="1" dirty="0">
                 <a:solidFill>
@@ -17856,7 +18141,7 @@
           <a:bodyPr wrap="square" lIns="0" tIns="0" rIns="0" bIns="0" rtlCol="0" anchor="t"/>
           <a:lstStyle/>
           <a:p>
-            <a:pPr algn="l" indent="0" marL="0">
+            <a:pPr marL="0" indent="0" algn="l">
               <a:buNone/>
             </a:pPr>
             <a:r>
@@ -17873,7 +18158,7 @@
       </p:sp>
       <p:sp>
         <p:nvSpPr>
-          <p:cNvPr id="25" name="Slide Number Placeholder 0"/>
+          <p:cNvPr id="3" name="Slide Number Placeholder 0"/>
           <p:cNvSpPr>
             <a:spLocks noGrp="1"/>
           </p:cNvSpPr>
@@ -17891,7 +18176,7 @@
           </a:prstGeom>
           <a:extLst>
             <a:ext uri="{C572A759-6A51-4108-AA02-DFA0A04FC94B}">
-              <ma14:wrappingTextBoxFlag xmlns:ma14="http://schemas.microsoft.com/office/mac/drawingml/2011/main" val="0"/>
+              <ma14:wrappingTextBoxFlag xmlns:ma14="http://schemas.microsoft.com/office/mac/drawingml/2011/main" xmlns="" val="0"/>
             </a:ext>
           </a:extLst>
         </p:spPr>
@@ -17909,7 +18194,7 @@
           <a:p>
             <a:pPr algn="r"/>
             <a:fld id="{F7021451-1387-4CA6-816F-3879F97B5CBC}" type="slidenum">
-              <a:rPr b="0" lang="en-US"/>
+              <a:rPr lang="en-US" b="0"/>
               <a:t>3</a:t>
             </a:fld>
             <a:endParaRPr lang="en-US"/>
@@ -17966,7 +18251,7 @@
           <a:bodyPr wrap="square" lIns="0" tIns="0" rIns="0" bIns="0" rtlCol="0" anchor="ctr"/>
           <a:lstStyle/>
           <a:p>
-            <a:pPr algn="ctr" indent="0" marL="0">
+            <a:pPr marL="0" indent="0" algn="ctr">
               <a:buNone/>
             </a:pPr>
             <a:r>
@@ -17984,9 +18269,11 @@
       <p:sp>
         <p:nvSpPr>
           <p:cNvPr id="3" name="Text 0"/>
-          <p:cNvSpPr/>
+          <p:cNvSpPr>
+            <a:spLocks noGrp="1"/>
+          </p:cNvSpPr>
           <p:nvPr>
-            <p:ph idx="100" type="title" hasCustomPrompt="1"/>
+            <p:ph type="title" idx="100" hasCustomPrompt="1"/>
           </p:nvPr>
         </p:nvSpPr>
         <p:spPr>
@@ -18004,7 +18291,7 @@
           <a:bodyPr wrap="square" lIns="0" tIns="0" rIns="0" bIns="0" rtlCol="0" anchor="b"/>
           <a:lstStyle/>
           <a:p>
-            <a:pPr algn="l" indent="0" marL="0">
+            <a:pPr marL="0" indent="0" algn="l">
               <a:buNone/>
             </a:pPr>
             <a:r>
@@ -18022,9 +18309,11 @@
       <p:sp>
         <p:nvSpPr>
           <p:cNvPr id="4" name="Text 0"/>
-          <p:cNvSpPr/>
+          <p:cNvSpPr>
+            <a:spLocks noGrp="1"/>
+          </p:cNvSpPr>
           <p:nvPr>
-            <p:ph idx="101" type="body" hasCustomPrompt="1"/>
+            <p:ph type="body" idx="101" hasCustomPrompt="1"/>
           </p:nvPr>
         </p:nvSpPr>
         <p:spPr>
@@ -18042,7 +18331,7 @@
           <a:bodyPr wrap="square" lIns="0" tIns="0" rIns="0" bIns="0" rtlCol="0" anchor="t"/>
           <a:lstStyle/>
           <a:p>
-            <a:pPr indent="0" marL="0">
+            <a:pPr marL="0" indent="0">
               <a:buNone/>
             </a:pPr>
             <a:r>
@@ -18085,9 +18374,11 @@
       <p:sp>
         <p:nvSpPr>
           <p:cNvPr id="2" name="Text 0"/>
-          <p:cNvSpPr/>
+          <p:cNvSpPr>
+            <a:spLocks noGrp="1"/>
+          </p:cNvSpPr>
           <p:nvPr>
-            <p:ph idx="100" type="title" hasCustomPrompt="1"/>
+            <p:ph type="title" idx="100" hasCustomPrompt="1"/>
           </p:nvPr>
         </p:nvSpPr>
         <p:spPr>
@@ -18105,7 +18396,7 @@
           <a:bodyPr wrap="square" lIns="0" tIns="0" rIns="0" bIns="0" rtlCol="0" anchor="ctr"/>
           <a:lstStyle/>
           <a:p>
-            <a:pPr algn="l" indent="0" marL="0">
+            <a:pPr marL="0" indent="0" algn="l">
               <a:buNone/>
             </a:pPr>
             <a:r>
@@ -18145,7 +18436,7 @@
           <a:bodyPr wrap="square" lIns="0" tIns="0" rIns="0" bIns="0" rtlCol="0" anchor="ctr"/>
           <a:lstStyle/>
           <a:p>
-            <a:pPr algn="ctr" indent="0" marL="0">
+            <a:pPr marL="0" indent="0" algn="ctr">
               <a:buNone/>
             </a:pPr>
             <a:r>
@@ -18185,7 +18476,7 @@
           <a:bodyPr wrap="square" lIns="0" tIns="0" rIns="0" bIns="0" rtlCol="0" anchor="ctr"/>
           <a:lstStyle/>
           <a:p>
-            <a:pPr algn="ctr" indent="0" marL="0">
+            <a:pPr marL="0" indent="0" algn="ctr">
               <a:buNone/>
             </a:pPr>
             <a:r>
@@ -18221,7 +18512,7 @@
           <a:bodyPr wrap="square" lIns="0" tIns="0" rIns="0" bIns="0" rtlCol="0" anchor="t"/>
           <a:lstStyle/>
           <a:p>
-            <a:pPr algn="ctr" indent="0" marL="0">
+            <a:pPr marL="0" indent="0" algn="ctr">
               <a:buNone/>
             </a:pPr>
             <a:r>
@@ -18257,6 +18548,13 @@
           </a:solidFill>
           <a:ln/>
         </p:spPr>
+        <p:txBody>
+          <a:bodyPr/>
+          <a:lstStyle/>
+          <a:p>
+            <a:endParaRPr lang="en-US"/>
+          </a:p>
+        </p:txBody>
       </p:sp>
       <p:sp>
         <p:nvSpPr>
@@ -18279,7 +18577,7 @@
           <a:bodyPr wrap="square" lIns="0" tIns="0" rIns="0" bIns="0" rtlCol="0" anchor="t"/>
           <a:lstStyle/>
           <a:p>
-            <a:pPr indent="0" marL="0">
+            <a:pPr marL="0" indent="0">
               <a:buNone/>
             </a:pPr>
             <a:r>
@@ -18315,7 +18613,7 @@
           <a:bodyPr wrap="square" lIns="0" tIns="0" rIns="0" bIns="0" rtlCol="0" anchor="t"/>
           <a:lstStyle/>
           <a:p>
-            <a:pPr indent="0" marL="0">
+            <a:pPr marL="0" indent="0">
               <a:buNone/>
             </a:pPr>
             <a:r>
@@ -18351,6 +18649,13 @@
           </a:solidFill>
           <a:ln/>
         </p:spPr>
+        <p:txBody>
+          <a:bodyPr/>
+          <a:lstStyle/>
+          <a:p>
+            <a:endParaRPr lang="en-US"/>
+          </a:p>
+        </p:txBody>
       </p:sp>
       <p:sp>
         <p:nvSpPr>
@@ -18373,7 +18678,7 @@
           <a:bodyPr wrap="square" lIns="0" tIns="0" rIns="0" bIns="0" rtlCol="0" anchor="t"/>
           <a:lstStyle/>
           <a:p>
-            <a:pPr indent="0" marL="0">
+            <a:pPr marL="0" indent="0">
               <a:buNone/>
             </a:pPr>
             <a:r>
@@ -18409,7 +18714,7 @@
           <a:bodyPr wrap="square" lIns="0" tIns="0" rIns="0" bIns="0" rtlCol="0" anchor="t"/>
           <a:lstStyle/>
           <a:p>
-            <a:pPr indent="0" marL="0">
+            <a:pPr marL="0" indent="0">
               <a:buNone/>
             </a:pPr>
             <a:r>
@@ -18448,6 +18753,13 @@
             <a:tailEnd type="triangle"/>
           </a:ln>
         </p:spPr>
+        <p:txBody>
+          <a:bodyPr/>
+          <a:lstStyle/>
+          <a:p>
+            <a:endParaRPr lang="en-US"/>
+          </a:p>
+        </p:txBody>
       </p:sp>
       <p:sp>
         <p:nvSpPr>
@@ -18473,6 +18785,13 @@
             <a:tailEnd type="triangle"/>
           </a:ln>
         </p:spPr>
+        <p:txBody>
+          <a:bodyPr/>
+          <a:lstStyle/>
+          <a:p>
+            <a:endParaRPr lang="en-US"/>
+          </a:p>
+        </p:txBody>
       </p:sp>
       <p:sp>
         <p:nvSpPr>
@@ -18495,7 +18814,7 @@
           <a:bodyPr wrap="square" lIns="0" tIns="0" rIns="0" bIns="0" rtlCol="0" anchor="t"/>
           <a:lstStyle/>
           <a:p>
-            <a:pPr algn="ctr" indent="0" marL="0">
+            <a:pPr marL="0" indent="0" algn="ctr">
               <a:buNone/>
             </a:pPr>
             <a:r>
@@ -18531,6 +18850,13 @@
           </a:solidFill>
           <a:ln/>
         </p:spPr>
+        <p:txBody>
+          <a:bodyPr/>
+          <a:lstStyle/>
+          <a:p>
+            <a:endParaRPr lang="en-US"/>
+          </a:p>
+        </p:txBody>
       </p:sp>
       <p:sp>
         <p:nvSpPr>
@@ -18553,7 +18879,7 @@
           <a:bodyPr wrap="square" lIns="0" tIns="0" rIns="0" bIns="0" rtlCol="0" anchor="t"/>
           <a:lstStyle/>
           <a:p>
-            <a:pPr indent="0" marL="0">
+            <a:pPr marL="0" indent="0">
               <a:buNone/>
             </a:pPr>
             <a:r>
@@ -18570,7 +18896,7 @@
             <a:endParaRPr lang="en-US" sz="1500" dirty="0"/>
           </a:p>
           <a:p>
-            <a:pPr indent="0" marL="0">
+            <a:pPr marL="0" indent="0">
               <a:buNone/>
             </a:pPr>
             <a:r>
@@ -18587,7 +18913,7 @@
             <a:endParaRPr lang="en-US" sz="1500" dirty="0"/>
           </a:p>
           <a:p>
-            <a:pPr indent="0" marL="0">
+            <a:pPr marL="0" indent="0">
               <a:buNone/>
             </a:pPr>
             <a:r>
@@ -18604,7 +18930,7 @@
             <a:endParaRPr lang="en-US" sz="1500" dirty="0"/>
           </a:p>
           <a:p>
-            <a:pPr indent="0" marL="0">
+            <a:pPr marL="0" indent="0">
               <a:buNone/>
             </a:pPr>
             <a:r>
@@ -18643,7 +18969,7 @@
           <a:bodyPr wrap="square" lIns="0" tIns="0" rIns="0" bIns="0" rtlCol="0" anchor="t"/>
           <a:lstStyle/>
           <a:p>
-            <a:pPr algn="l" indent="0" marL="0">
+            <a:pPr marL="0" indent="0" algn="l">
               <a:buNone/>
             </a:pPr>
             <a:r>
@@ -18678,7 +19004,7 @@
           </a:prstGeom>
           <a:extLst>
             <a:ext uri="{C572A759-6A51-4108-AA02-DFA0A04FC94B}">
-              <ma14:wrappingTextBoxFlag xmlns:ma14="http://schemas.microsoft.com/office/mac/drawingml/2011/main" val="0"/>
+              <ma14:wrappingTextBoxFlag xmlns:ma14="http://schemas.microsoft.com/office/mac/drawingml/2011/main" xmlns="" val="0"/>
             </a:ext>
           </a:extLst>
         </p:spPr>
@@ -18696,7 +19022,7 @@
           <a:p>
             <a:pPr algn="r"/>
             <a:fld id="{F7021451-1387-4CA6-816F-3879F97B5CBC}" type="slidenum">
-              <a:rPr b="0" lang="en-US"/>
+              <a:rPr lang="en-US" b="0"/>
               <a:t>31</a:t>
             </a:fld>
             <a:endParaRPr lang="en-US"/>
@@ -18753,7 +19079,7 @@
           <a:bodyPr wrap="square" lIns="0" tIns="0" rIns="0" bIns="0" rtlCol="0" anchor="ctr"/>
           <a:lstStyle/>
           <a:p>
-            <a:pPr algn="ctr" indent="0" marL="0">
+            <a:pPr marL="0" indent="0" algn="ctr">
               <a:buNone/>
             </a:pPr>
             <a:r>
@@ -18771,9 +19097,11 @@
       <p:sp>
         <p:nvSpPr>
           <p:cNvPr id="3" name="Text 0"/>
-          <p:cNvSpPr/>
+          <p:cNvSpPr>
+            <a:spLocks noGrp="1"/>
+          </p:cNvSpPr>
           <p:nvPr>
-            <p:ph idx="100" type="title" hasCustomPrompt="1"/>
+            <p:ph type="title" idx="100" hasCustomPrompt="1"/>
           </p:nvPr>
         </p:nvSpPr>
         <p:spPr>
@@ -18791,7 +19119,7 @@
           <a:bodyPr wrap="square" lIns="0" tIns="0" rIns="0" bIns="0" rtlCol="0" anchor="b"/>
           <a:lstStyle/>
           <a:p>
-            <a:pPr algn="l" indent="0" marL="0">
+            <a:pPr marL="0" indent="0" algn="l">
               <a:buNone/>
             </a:pPr>
             <a:r>
@@ -18809,9 +19137,11 @@
       <p:sp>
         <p:nvSpPr>
           <p:cNvPr id="4" name="Text 0"/>
-          <p:cNvSpPr/>
+          <p:cNvSpPr>
+            <a:spLocks noGrp="1"/>
+          </p:cNvSpPr>
           <p:nvPr>
-            <p:ph idx="101" type="body" hasCustomPrompt="1"/>
+            <p:ph type="body" idx="101" hasCustomPrompt="1"/>
           </p:nvPr>
         </p:nvSpPr>
         <p:spPr>
@@ -18829,7 +19159,7 @@
           <a:bodyPr wrap="square" lIns="0" tIns="0" rIns="0" bIns="0" rtlCol="0" anchor="t"/>
           <a:lstStyle/>
           <a:p>
-            <a:pPr indent="0" marL="0">
+            <a:pPr marL="0" indent="0">
               <a:buNone/>
             </a:pPr>
             <a:r>
@@ -18872,9 +19202,11 @@
       <p:sp>
         <p:nvSpPr>
           <p:cNvPr id="2" name="Text 0"/>
-          <p:cNvSpPr/>
+          <p:cNvSpPr>
+            <a:spLocks noGrp="1"/>
+          </p:cNvSpPr>
           <p:nvPr>
-            <p:ph idx="100" type="title" hasCustomPrompt="1"/>
+            <p:ph type="title" idx="100" hasCustomPrompt="1"/>
           </p:nvPr>
         </p:nvSpPr>
         <p:spPr>
@@ -18892,7 +19224,7 @@
           <a:bodyPr wrap="square" lIns="0" tIns="0" rIns="0" bIns="0" rtlCol="0" anchor="ctr"/>
           <a:lstStyle/>
           <a:p>
-            <a:pPr algn="l" indent="0" marL="0">
+            <a:pPr marL="0" indent="0" algn="l">
               <a:buNone/>
             </a:pPr>
             <a:r>
@@ -18932,7 +19264,7 @@
           <a:bodyPr wrap="square" lIns="0" tIns="0" rIns="0" bIns="0" rtlCol="0" anchor="ctr"/>
           <a:lstStyle/>
           <a:p>
-            <a:pPr algn="ctr" indent="0" marL="0">
+            <a:pPr marL="0" indent="0" algn="ctr">
               <a:buNone/>
             </a:pPr>
             <a:r>
@@ -18968,6 +19300,13 @@
           </a:solidFill>
           <a:ln/>
         </p:spPr>
+        <p:txBody>
+          <a:bodyPr/>
+          <a:lstStyle/>
+          <a:p>
+            <a:endParaRPr lang="en-US"/>
+          </a:p>
+        </p:txBody>
       </p:sp>
       <p:sp>
         <p:nvSpPr>
@@ -18990,7 +19329,7 @@
           <a:bodyPr wrap="square" lIns="0" tIns="0" rIns="0" bIns="0" rtlCol="0" anchor="t"/>
           <a:lstStyle/>
           <a:p>
-            <a:pPr algn="ctr" indent="0" marL="0">
+            <a:pPr marL="0" indent="0" algn="ctr">
               <a:buNone/>
             </a:pPr>
             <a:r>
@@ -19026,7 +19365,7 @@
           <a:bodyPr wrap="square" lIns="0" tIns="0" rIns="0" bIns="0" rtlCol="0" anchor="t"/>
           <a:lstStyle/>
           <a:p>
-            <a:pPr algn="ctr" indent="0" marL="0">
+            <a:pPr marL="0" indent="0" algn="ctr">
               <a:buNone/>
             </a:pPr>
             <a:r>
@@ -19064,6 +19403,13 @@
             <a:tailEnd type="triangle"/>
           </a:ln>
         </p:spPr>
+        <p:txBody>
+          <a:bodyPr/>
+          <a:lstStyle/>
+          <a:p>
+            <a:endParaRPr lang="en-US"/>
+          </a:p>
+        </p:txBody>
       </p:sp>
       <p:sp>
         <p:nvSpPr>
@@ -19086,6 +19432,13 @@
           </a:solidFill>
           <a:ln/>
         </p:spPr>
+        <p:txBody>
+          <a:bodyPr/>
+          <a:lstStyle/>
+          <a:p>
+            <a:endParaRPr lang="en-US"/>
+          </a:p>
+        </p:txBody>
       </p:sp>
       <p:sp>
         <p:nvSpPr>
@@ -19108,7 +19461,7 @@
           <a:bodyPr wrap="square" lIns="0" tIns="0" rIns="0" bIns="0" rtlCol="0" anchor="t"/>
           <a:lstStyle/>
           <a:p>
-            <a:pPr algn="ctr" indent="0" marL="0">
+            <a:pPr marL="0" indent="0" algn="ctr">
               <a:buNone/>
             </a:pPr>
             <a:r>
@@ -19144,7 +19497,7 @@
           <a:bodyPr wrap="square" lIns="0" tIns="0" rIns="0" bIns="0" rtlCol="0" anchor="t"/>
           <a:lstStyle/>
           <a:p>
-            <a:pPr algn="ctr" indent="0" marL="0">
+            <a:pPr marL="0" indent="0" algn="ctr">
               <a:buNone/>
             </a:pPr>
             <a:r>
@@ -19182,6 +19535,13 @@
             <a:tailEnd type="triangle"/>
           </a:ln>
         </p:spPr>
+        <p:txBody>
+          <a:bodyPr/>
+          <a:lstStyle/>
+          <a:p>
+            <a:endParaRPr lang="en-US"/>
+          </a:p>
+        </p:txBody>
       </p:sp>
       <p:sp>
         <p:nvSpPr>
@@ -19204,6 +19564,13 @@
           </a:solidFill>
           <a:ln/>
         </p:spPr>
+        <p:txBody>
+          <a:bodyPr/>
+          <a:lstStyle/>
+          <a:p>
+            <a:endParaRPr lang="en-US"/>
+          </a:p>
+        </p:txBody>
       </p:sp>
       <p:sp>
         <p:nvSpPr>
@@ -19226,7 +19593,7 @@
           <a:bodyPr wrap="square" lIns="0" tIns="0" rIns="0" bIns="0" rtlCol="0" anchor="t"/>
           <a:lstStyle/>
           <a:p>
-            <a:pPr algn="ctr" indent="0" marL="0">
+            <a:pPr marL="0" indent="0" algn="ctr">
               <a:buNone/>
             </a:pPr>
             <a:r>
@@ -19262,7 +19629,7 @@
           <a:bodyPr wrap="square" lIns="0" tIns="0" rIns="0" bIns="0" rtlCol="0" anchor="t"/>
           <a:lstStyle/>
           <a:p>
-            <a:pPr algn="ctr" indent="0" marL="0">
+            <a:pPr marL="0" indent="0" algn="ctr">
               <a:buNone/>
             </a:pPr>
             <a:r>
@@ -19300,6 +19667,13 @@
             <a:tailEnd type="triangle"/>
           </a:ln>
         </p:spPr>
+        <p:txBody>
+          <a:bodyPr/>
+          <a:lstStyle/>
+          <a:p>
+            <a:endParaRPr lang="en-US"/>
+          </a:p>
+        </p:txBody>
       </p:sp>
       <p:sp>
         <p:nvSpPr>
@@ -19322,6 +19696,13 @@
           </a:solidFill>
           <a:ln/>
         </p:spPr>
+        <p:txBody>
+          <a:bodyPr/>
+          <a:lstStyle/>
+          <a:p>
+            <a:endParaRPr lang="en-US"/>
+          </a:p>
+        </p:txBody>
       </p:sp>
       <p:sp>
         <p:nvSpPr>
@@ -19344,7 +19725,7 @@
           <a:bodyPr wrap="square" lIns="0" tIns="0" rIns="0" bIns="0" rtlCol="0" anchor="t"/>
           <a:lstStyle/>
           <a:p>
-            <a:pPr algn="ctr" indent="0" marL="0">
+            <a:pPr marL="0" indent="0" algn="ctr">
               <a:buNone/>
             </a:pPr>
             <a:r>
@@ -19380,7 +19761,7 @@
           <a:bodyPr wrap="square" lIns="0" tIns="0" rIns="0" bIns="0" rtlCol="0" anchor="t"/>
           <a:lstStyle/>
           <a:p>
-            <a:pPr algn="ctr" indent="0" marL="0">
+            <a:pPr marL="0" indent="0" algn="ctr">
               <a:buNone/>
             </a:pPr>
             <a:r>
@@ -19418,6 +19799,13 @@
             <a:tailEnd type="triangle"/>
           </a:ln>
         </p:spPr>
+        <p:txBody>
+          <a:bodyPr/>
+          <a:lstStyle/>
+          <a:p>
+            <a:endParaRPr lang="en-US"/>
+          </a:p>
+        </p:txBody>
       </p:sp>
       <p:sp>
         <p:nvSpPr>
@@ -19440,6 +19828,13 @@
           </a:solidFill>
           <a:ln/>
         </p:spPr>
+        <p:txBody>
+          <a:bodyPr/>
+          <a:lstStyle/>
+          <a:p>
+            <a:endParaRPr lang="en-US"/>
+          </a:p>
+        </p:txBody>
       </p:sp>
       <p:sp>
         <p:nvSpPr>
@@ -19462,7 +19857,7 @@
           <a:bodyPr wrap="square" lIns="0" tIns="0" rIns="0" bIns="0" rtlCol="0" anchor="t"/>
           <a:lstStyle/>
           <a:p>
-            <a:pPr algn="ctr" indent="0" marL="0">
+            <a:pPr marL="0" indent="0" algn="ctr">
               <a:buNone/>
             </a:pPr>
             <a:r>
@@ -19498,7 +19893,7 @@
           <a:bodyPr wrap="square" lIns="0" tIns="0" rIns="0" bIns="0" rtlCol="0" anchor="t"/>
           <a:lstStyle/>
           <a:p>
-            <a:pPr algn="ctr" indent="0" marL="0">
+            <a:pPr marL="0" indent="0" algn="ctr">
               <a:buNone/>
             </a:pPr>
             <a:r>
@@ -19536,6 +19931,13 @@
             <a:tailEnd type="triangle"/>
           </a:ln>
         </p:spPr>
+        <p:txBody>
+          <a:bodyPr/>
+          <a:lstStyle/>
+          <a:p>
+            <a:endParaRPr lang="en-US"/>
+          </a:p>
+        </p:txBody>
       </p:sp>
       <p:sp>
         <p:nvSpPr>
@@ -19558,6 +19960,13 @@
           </a:solidFill>
           <a:ln/>
         </p:spPr>
+        <p:txBody>
+          <a:bodyPr/>
+          <a:lstStyle/>
+          <a:p>
+            <a:endParaRPr lang="en-US"/>
+          </a:p>
+        </p:txBody>
       </p:sp>
       <p:sp>
         <p:nvSpPr>
@@ -19580,7 +19989,7 @@
           <a:bodyPr wrap="square" lIns="0" tIns="0" rIns="0" bIns="0" rtlCol="0" anchor="t"/>
           <a:lstStyle/>
           <a:p>
-            <a:pPr algn="ctr" indent="0" marL="0">
+            <a:pPr marL="0" indent="0" algn="ctr">
               <a:buNone/>
             </a:pPr>
             <a:r>
@@ -19616,7 +20025,7 @@
           <a:bodyPr wrap="square" lIns="0" tIns="0" rIns="0" bIns="0" rtlCol="0" anchor="t"/>
           <a:lstStyle/>
           <a:p>
-            <a:pPr algn="ctr" indent="0" marL="0">
+            <a:pPr marL="0" indent="0" algn="ctr">
               <a:buNone/>
             </a:pPr>
             <a:r>
@@ -19654,6 +20063,13 @@
             <a:tailEnd type="triangle"/>
           </a:ln>
         </p:spPr>
+        <p:txBody>
+          <a:bodyPr/>
+          <a:lstStyle/>
+          <a:p>
+            <a:endParaRPr lang="en-US"/>
+          </a:p>
+        </p:txBody>
       </p:sp>
       <p:sp>
         <p:nvSpPr>
@@ -19676,6 +20092,13 @@
           </a:solidFill>
           <a:ln/>
         </p:spPr>
+        <p:txBody>
+          <a:bodyPr/>
+          <a:lstStyle/>
+          <a:p>
+            <a:endParaRPr lang="en-US"/>
+          </a:p>
+        </p:txBody>
       </p:sp>
       <p:sp>
         <p:nvSpPr>
@@ -19698,7 +20121,7 @@
           <a:bodyPr wrap="square" lIns="0" tIns="0" rIns="0" bIns="0" rtlCol="0" anchor="t"/>
           <a:lstStyle/>
           <a:p>
-            <a:pPr algn="ctr" indent="0" marL="0">
+            <a:pPr marL="0" indent="0" algn="ctr">
               <a:buNone/>
             </a:pPr>
             <a:r>
@@ -19734,7 +20157,7 @@
           <a:bodyPr wrap="square" lIns="0" tIns="0" rIns="0" bIns="0" rtlCol="0" anchor="t"/>
           <a:lstStyle/>
           <a:p>
-            <a:pPr algn="ctr" indent="0" marL="0">
+            <a:pPr marL="0" indent="0" algn="ctr">
               <a:buNone/>
             </a:pPr>
             <a:r>
@@ -19770,6 +20193,13 @@
           </a:solidFill>
           <a:ln/>
         </p:spPr>
+        <p:txBody>
+          <a:bodyPr/>
+          <a:lstStyle/>
+          <a:p>
+            <a:endParaRPr lang="en-US"/>
+          </a:p>
+        </p:txBody>
       </p:sp>
       <p:sp>
         <p:nvSpPr>
@@ -19792,7 +20222,7 @@
           <a:bodyPr wrap="square" lIns="0" tIns="0" rIns="0" bIns="0" rtlCol="0" anchor="ctr"/>
           <a:lstStyle/>
           <a:p>
-            <a:pPr algn="l" indent="0" marL="0">
+            <a:pPr marL="0" indent="0" algn="l">
               <a:buNone/>
             </a:pPr>
             <a:r>
@@ -19809,7 +20239,7 @@
       </p:sp>
       <p:sp>
         <p:nvSpPr>
-          <p:cNvPr id="25" name="Slide Number Placeholder 0"/>
+          <p:cNvPr id="4" name="Slide Number Placeholder 0"/>
           <p:cNvSpPr>
             <a:spLocks noGrp="1"/>
           </p:cNvSpPr>
@@ -19827,7 +20257,7 @@
           </a:prstGeom>
           <a:extLst>
             <a:ext uri="{C572A759-6A51-4108-AA02-DFA0A04FC94B}">
-              <ma14:wrappingTextBoxFlag xmlns:ma14="http://schemas.microsoft.com/office/mac/drawingml/2011/main" val="0"/>
+              <ma14:wrappingTextBoxFlag xmlns:ma14="http://schemas.microsoft.com/office/mac/drawingml/2011/main" xmlns="" val="0"/>
             </a:ext>
           </a:extLst>
         </p:spPr>
@@ -19845,7 +20275,7 @@
           <a:p>
             <a:pPr algn="r"/>
             <a:fld id="{F7021451-1387-4CA6-816F-3879F97B5CBC}" type="slidenum">
-              <a:rPr b="0" lang="en-US"/>
+              <a:rPr lang="en-US" b="0"/>
               <a:t>33</a:t>
             </a:fld>
             <a:endParaRPr lang="en-US"/>
@@ -19880,9 +20310,11 @@
       <p:sp>
         <p:nvSpPr>
           <p:cNvPr id="2" name="Text 0"/>
-          <p:cNvSpPr/>
+          <p:cNvSpPr>
+            <a:spLocks noGrp="1"/>
+          </p:cNvSpPr>
           <p:nvPr>
-            <p:ph idx="100" type="title" hasCustomPrompt="1"/>
+            <p:ph type="title" idx="100" hasCustomPrompt="1"/>
           </p:nvPr>
         </p:nvSpPr>
         <p:spPr>
@@ -19900,7 +20332,7 @@
           <a:bodyPr wrap="square" lIns="0" tIns="0" rIns="0" bIns="0" rtlCol="0" anchor="ctr"/>
           <a:lstStyle/>
           <a:p>
-            <a:pPr algn="l" indent="0" marL="0">
+            <a:pPr marL="0" indent="0" algn="l">
               <a:buNone/>
             </a:pPr>
             <a:r>
@@ -19940,7 +20372,7 @@
           <a:bodyPr wrap="square" lIns="0" tIns="0" rIns="0" bIns="0" rtlCol="0" anchor="ctr"/>
           <a:lstStyle/>
           <a:p>
-            <a:pPr algn="ctr" indent="0" marL="0">
+            <a:pPr marL="0" indent="0" algn="ctr">
               <a:buNone/>
             </a:pPr>
             <a:r>
@@ -19978,7 +20410,7 @@
           <a:bodyPr wrap="square" lIns="0" tIns="0" rIns="0" bIns="0" rtlCol="0" anchor="ctr"/>
           <a:lstStyle/>
           <a:p>
-            <a:pPr algn="ctr" indent="0" marL="0">
+            <a:pPr marL="0" indent="0" algn="ctr">
               <a:buNone/>
             </a:pPr>
             <a:r>
@@ -20014,7 +20446,7 @@
           <a:bodyPr wrap="square" lIns="0" tIns="0" rIns="0" bIns="0" rtlCol="0" anchor="t"/>
           <a:lstStyle/>
           <a:p>
-            <a:pPr indent="0" marL="0">
+            <a:pPr marL="0" indent="0">
               <a:buNone/>
             </a:pPr>
             <a:r>
@@ -20052,7 +20484,7 @@
           <a:bodyPr wrap="square" lIns="0" tIns="0" rIns="0" bIns="0" rtlCol="0" anchor="ctr"/>
           <a:lstStyle/>
           <a:p>
-            <a:pPr algn="ctr" indent="0" marL="0">
+            <a:pPr marL="0" indent="0" algn="ctr">
               <a:buNone/>
             </a:pPr>
             <a:r>
@@ -20088,7 +20520,7 @@
           <a:bodyPr wrap="square" lIns="0" tIns="0" rIns="0" bIns="0" rtlCol="0" anchor="t"/>
           <a:lstStyle/>
           <a:p>
-            <a:pPr indent="0" marL="0">
+            <a:pPr marL="0" indent="0">
               <a:buNone/>
             </a:pPr>
             <a:r>
@@ -20126,7 +20558,7 @@
           <a:bodyPr wrap="square" lIns="0" tIns="0" rIns="0" bIns="0" rtlCol="0" anchor="ctr"/>
           <a:lstStyle/>
           <a:p>
-            <a:pPr algn="ctr" indent="0" marL="0">
+            <a:pPr marL="0" indent="0" algn="ctr">
               <a:buNone/>
             </a:pPr>
             <a:r>
@@ -20162,7 +20594,7 @@
           <a:bodyPr wrap="square" lIns="0" tIns="0" rIns="0" bIns="0" rtlCol="0" anchor="t"/>
           <a:lstStyle/>
           <a:p>
-            <a:pPr indent="0" marL="0">
+            <a:pPr marL="0" indent="0">
               <a:buNone/>
             </a:pPr>
             <a:r>
@@ -20200,7 +20632,7 @@
           <a:bodyPr wrap="square" lIns="0" tIns="0" rIns="0" bIns="0" rtlCol="0" anchor="ctr"/>
           <a:lstStyle/>
           <a:p>
-            <a:pPr algn="ctr" indent="0" marL="0">
+            <a:pPr marL="0" indent="0" algn="ctr">
               <a:buNone/>
             </a:pPr>
             <a:r>
@@ -20236,7 +20668,7 @@
           <a:bodyPr wrap="square" lIns="0" tIns="0" rIns="0" bIns="0" rtlCol="0" anchor="t"/>
           <a:lstStyle/>
           <a:p>
-            <a:pPr indent="0" marL="0">
+            <a:pPr marL="0" indent="0">
               <a:buNone/>
             </a:pPr>
             <a:r>
@@ -20274,7 +20706,7 @@
           <a:bodyPr wrap="square" lIns="0" tIns="0" rIns="0" bIns="0" rtlCol="0" anchor="ctr"/>
           <a:lstStyle/>
           <a:p>
-            <a:pPr algn="ctr" indent="0" marL="0">
+            <a:pPr marL="0" indent="0" algn="ctr">
               <a:buNone/>
             </a:pPr>
             <a:r>
@@ -20310,7 +20742,7 @@
           <a:bodyPr wrap="square" lIns="0" tIns="0" rIns="0" bIns="0" rtlCol="0" anchor="t"/>
           <a:lstStyle/>
           <a:p>
-            <a:pPr indent="0" marL="0">
+            <a:pPr marL="0" indent="0">
               <a:buNone/>
             </a:pPr>
             <a:r>
@@ -20348,7 +20780,7 @@
           <a:bodyPr wrap="square" lIns="0" tIns="0" rIns="0" bIns="0" rtlCol="0" anchor="ctr"/>
           <a:lstStyle/>
           <a:p>
-            <a:pPr algn="ctr" indent="0" marL="0">
+            <a:pPr marL="0" indent="0" algn="ctr">
               <a:buNone/>
             </a:pPr>
             <a:r>
@@ -20384,7 +20816,7 @@
           <a:bodyPr wrap="square" lIns="0" tIns="0" rIns="0" bIns="0" rtlCol="0" anchor="t"/>
           <a:lstStyle/>
           <a:p>
-            <a:pPr indent="0" marL="0">
+            <a:pPr marL="0" indent="0">
               <a:buNone/>
             </a:pPr>
             <a:r>
@@ -20420,6 +20852,13 @@
           </a:solidFill>
           <a:ln/>
         </p:spPr>
+        <p:txBody>
+          <a:bodyPr/>
+          <a:lstStyle/>
+          <a:p>
+            <a:endParaRPr lang="en-US"/>
+          </a:p>
+        </p:txBody>
       </p:sp>
       <p:sp>
         <p:nvSpPr>
@@ -20442,7 +20881,7 @@
           <a:bodyPr wrap="square" lIns="0" tIns="0" rIns="0" bIns="0" rtlCol="0" anchor="t"/>
           <a:lstStyle/>
           <a:p>
-            <a:pPr indent="0" marL="0">
+            <a:pPr marL="0" indent="0">
               <a:buNone/>
             </a:pPr>
             <a:r>
@@ -20459,7 +20898,7 @@
             <a:endParaRPr lang="en-US" sz="1400" dirty="0"/>
           </a:p>
           <a:p>
-            <a:pPr indent="0" marL="0">
+            <a:pPr marL="0" indent="0">
               <a:buNone/>
             </a:pPr>
             <a:r>
@@ -20476,7 +20915,7 @@
             <a:endParaRPr lang="en-US" sz="1400" dirty="0"/>
           </a:p>
           <a:p>
-            <a:pPr indent="0" marL="0">
+            <a:pPr marL="0" indent="0">
               <a:buNone/>
             </a:pPr>
             <a:r>
@@ -20493,7 +20932,7 @@
             <a:endParaRPr lang="en-US" sz="1400" dirty="0"/>
           </a:p>
           <a:p>
-            <a:pPr indent="0" marL="0">
+            <a:pPr marL="0" indent="0">
               <a:buNone/>
             </a:pPr>
             <a:r>
@@ -20510,7 +20949,7 @@
             <a:endParaRPr lang="en-US" sz="1400" dirty="0"/>
           </a:p>
           <a:p>
-            <a:pPr indent="0" marL="0">
+            <a:pPr marL="0" indent="0">
               <a:buNone/>
             </a:pPr>
             <a:r>
@@ -20549,7 +20988,7 @@
           <a:bodyPr wrap="square" lIns="0" tIns="0" rIns="0" bIns="0" rtlCol="0" anchor="ctr"/>
           <a:lstStyle/>
           <a:p>
-            <a:pPr indent="0" marL="0">
+            <a:pPr marL="0" indent="0">
               <a:buNone/>
             </a:pPr>
             <a:r>
@@ -20584,7 +21023,7 @@
           </a:prstGeom>
           <a:extLst>
             <a:ext uri="{C572A759-6A51-4108-AA02-DFA0A04FC94B}">
-              <ma14:wrappingTextBoxFlag xmlns:ma14="http://schemas.microsoft.com/office/mac/drawingml/2011/main" val="0"/>
+              <ma14:wrappingTextBoxFlag xmlns:ma14="http://schemas.microsoft.com/office/mac/drawingml/2011/main" xmlns="" val="0"/>
             </a:ext>
           </a:extLst>
         </p:spPr>
@@ -20602,7 +21041,7 @@
           <a:p>
             <a:pPr algn="r"/>
             <a:fld id="{F7021451-1387-4CA6-816F-3879F97B5CBC}" type="slidenum">
-              <a:rPr b="0" lang="en-US"/>
+              <a:rPr lang="en-US" b="0"/>
               <a:t>34</a:t>
             </a:fld>
             <a:endParaRPr lang="en-US"/>
@@ -20637,9 +21076,11 @@
       <p:sp>
         <p:nvSpPr>
           <p:cNvPr id="2" name="Text 0"/>
-          <p:cNvSpPr/>
+          <p:cNvSpPr>
+            <a:spLocks noGrp="1"/>
+          </p:cNvSpPr>
           <p:nvPr>
-            <p:ph idx="100" type="title" hasCustomPrompt="1"/>
+            <p:ph type="title" idx="100" hasCustomPrompt="1"/>
           </p:nvPr>
         </p:nvSpPr>
         <p:spPr>
@@ -20657,7 +21098,7 @@
           <a:bodyPr wrap="square" lIns="0" tIns="0" rIns="0" bIns="0" rtlCol="0" anchor="ctr"/>
           <a:lstStyle/>
           <a:p>
-            <a:pPr algn="l" indent="0" marL="0">
+            <a:pPr marL="0" indent="0" algn="l">
               <a:buNone/>
             </a:pPr>
             <a:r>
@@ -20697,7 +21138,7 @@
           <a:bodyPr wrap="square" lIns="0" tIns="0" rIns="0" bIns="0" rtlCol="0" anchor="ctr"/>
           <a:lstStyle/>
           <a:p>
-            <a:pPr algn="ctr" indent="0" marL="0">
+            <a:pPr marL="0" indent="0" algn="ctr">
               <a:buNone/>
             </a:pPr>
             <a:r>
@@ -20733,6 +21174,13 @@
           </a:solidFill>
           <a:ln/>
         </p:spPr>
+        <p:txBody>
+          <a:bodyPr/>
+          <a:lstStyle/>
+          <a:p>
+            <a:endParaRPr lang="en-US"/>
+          </a:p>
+        </p:txBody>
       </p:sp>
       <p:sp>
         <p:nvSpPr>
@@ -20755,7 +21203,7 @@
           <a:bodyPr wrap="square" lIns="0" tIns="0" rIns="0" bIns="0" rtlCol="0" anchor="t"/>
           <a:lstStyle/>
           <a:p>
-            <a:pPr indent="0" marL="0">
+            <a:pPr marL="0" indent="0">
               <a:buNone/>
             </a:pPr>
             <a:r>
@@ -20791,7 +21239,7 @@
           <a:bodyPr wrap="square" lIns="0" tIns="0" rIns="0" bIns="0" rtlCol="0" anchor="t"/>
           <a:lstStyle/>
           <a:p>
-            <a:pPr indent="0" marL="0">
+            <a:pPr marL="0" indent="0">
               <a:buNone/>
             </a:pPr>
             <a:r>
@@ -20827,6 +21275,13 @@
           </a:solidFill>
           <a:ln/>
         </p:spPr>
+        <p:txBody>
+          <a:bodyPr/>
+          <a:lstStyle/>
+          <a:p>
+            <a:endParaRPr lang="en-US"/>
+          </a:p>
+        </p:txBody>
       </p:sp>
       <p:sp>
         <p:nvSpPr>
@@ -20849,7 +21304,7 @@
           <a:bodyPr wrap="square" lIns="0" tIns="0" rIns="0" bIns="0" rtlCol="0" anchor="t"/>
           <a:lstStyle/>
           <a:p>
-            <a:pPr indent="0" marL="0">
+            <a:pPr marL="0" indent="0">
               <a:buNone/>
             </a:pPr>
             <a:r>
@@ -20885,7 +21340,7 @@
           <a:bodyPr wrap="square" lIns="0" tIns="0" rIns="0" bIns="0" rtlCol="0" anchor="t"/>
           <a:lstStyle/>
           <a:p>
-            <a:pPr indent="0" marL="0">
+            <a:pPr marL="0" indent="0">
               <a:buNone/>
             </a:pPr>
             <a:r>
@@ -20921,6 +21376,13 @@
           </a:solidFill>
           <a:ln/>
         </p:spPr>
+        <p:txBody>
+          <a:bodyPr/>
+          <a:lstStyle/>
+          <a:p>
+            <a:endParaRPr lang="en-US"/>
+          </a:p>
+        </p:txBody>
       </p:sp>
       <p:sp>
         <p:nvSpPr>
@@ -20943,7 +21405,7 @@
           <a:bodyPr wrap="square" lIns="0" tIns="0" rIns="0" bIns="0" rtlCol="0" anchor="t"/>
           <a:lstStyle/>
           <a:p>
-            <a:pPr indent="0" marL="0">
+            <a:pPr marL="0" indent="0">
               <a:buNone/>
             </a:pPr>
             <a:r>
@@ -20979,7 +21441,7 @@
           <a:bodyPr wrap="square" lIns="0" tIns="0" rIns="0" bIns="0" rtlCol="0" anchor="t"/>
           <a:lstStyle/>
           <a:p>
-            <a:pPr indent="0" marL="0">
+            <a:pPr marL="0" indent="0">
               <a:buNone/>
             </a:pPr>
             <a:r>
@@ -21015,6 +21477,13 @@
           </a:solidFill>
           <a:ln/>
         </p:spPr>
+        <p:txBody>
+          <a:bodyPr/>
+          <a:lstStyle/>
+          <a:p>
+            <a:endParaRPr lang="en-US"/>
+          </a:p>
+        </p:txBody>
       </p:sp>
       <p:sp>
         <p:nvSpPr>
@@ -21037,7 +21506,7 @@
           <a:bodyPr wrap="square" lIns="0" tIns="0" rIns="0" bIns="0" rtlCol="0" anchor="t"/>
           <a:lstStyle/>
           <a:p>
-            <a:pPr indent="0" marL="0">
+            <a:pPr marL="0" indent="0">
               <a:buNone/>
             </a:pPr>
             <a:r>
@@ -21073,7 +21542,7 @@
           <a:bodyPr wrap="square" lIns="0" tIns="0" rIns="0" bIns="0" rtlCol="0" anchor="t"/>
           <a:lstStyle/>
           <a:p>
-            <a:pPr indent="0" marL="0">
+            <a:pPr marL="0" indent="0">
               <a:buNone/>
             </a:pPr>
             <a:r>
@@ -21109,6 +21578,13 @@
           </a:solidFill>
           <a:ln/>
         </p:spPr>
+        <p:txBody>
+          <a:bodyPr/>
+          <a:lstStyle/>
+          <a:p>
+            <a:endParaRPr lang="en-US"/>
+          </a:p>
+        </p:txBody>
       </p:sp>
       <p:sp>
         <p:nvSpPr>
@@ -21131,7 +21607,7 @@
           <a:bodyPr wrap="square" lIns="0" tIns="0" rIns="0" bIns="0" rtlCol="0" anchor="t"/>
           <a:lstStyle/>
           <a:p>
-            <a:pPr indent="0" marL="0">
+            <a:pPr marL="0" indent="0">
               <a:buNone/>
             </a:pPr>
             <a:r>
@@ -21167,7 +21643,7 @@
           <a:bodyPr wrap="square" lIns="0" tIns="0" rIns="0" bIns="0" rtlCol="0" anchor="t"/>
           <a:lstStyle/>
           <a:p>
-            <a:pPr indent="0" marL="0">
+            <a:pPr marL="0" indent="0">
               <a:buNone/>
             </a:pPr>
             <a:r>
@@ -21203,6 +21679,13 @@
           </a:solidFill>
           <a:ln/>
         </p:spPr>
+        <p:txBody>
+          <a:bodyPr/>
+          <a:lstStyle/>
+          <a:p>
+            <a:endParaRPr lang="en-US"/>
+          </a:p>
+        </p:txBody>
       </p:sp>
       <p:sp>
         <p:nvSpPr>
@@ -21225,7 +21708,7 @@
           <a:bodyPr wrap="square" lIns="0" tIns="0" rIns="0" bIns="0" rtlCol="0" anchor="t"/>
           <a:lstStyle/>
           <a:p>
-            <a:pPr indent="0" marL="0">
+            <a:pPr marL="0" indent="0">
               <a:buNone/>
             </a:pPr>
             <a:r>
@@ -21261,7 +21744,7 @@
           <a:bodyPr wrap="square" lIns="0" tIns="0" rIns="0" bIns="0" rtlCol="0" anchor="t"/>
           <a:lstStyle/>
           <a:p>
-            <a:pPr indent="0" marL="0">
+            <a:pPr marL="0" indent="0">
               <a:buNone/>
             </a:pPr>
             <a:r>
@@ -21297,7 +21780,7 @@
           <a:bodyPr wrap="square" lIns="0" tIns="0" rIns="0" bIns="0" rtlCol="0" anchor="t"/>
           <a:lstStyle/>
           <a:p>
-            <a:pPr algn="l" indent="0" marL="0">
+            <a:pPr marL="0" indent="0" algn="l">
               <a:buNone/>
             </a:pPr>
             <a:r>
@@ -21332,7 +21815,7 @@
           </a:prstGeom>
           <a:extLst>
             <a:ext uri="{C572A759-6A51-4108-AA02-DFA0A04FC94B}">
-              <ma14:wrappingTextBoxFlag xmlns:ma14="http://schemas.microsoft.com/office/mac/drawingml/2011/main" val="0"/>
+              <ma14:wrappingTextBoxFlag xmlns:ma14="http://schemas.microsoft.com/office/mac/drawingml/2011/main" xmlns="" val="0"/>
             </a:ext>
           </a:extLst>
         </p:spPr>
@@ -21350,7 +21833,7 @@
           <a:p>
             <a:pPr algn="r"/>
             <a:fld id="{F7021451-1387-4CA6-816F-3879F97B5CBC}" type="slidenum">
-              <a:rPr b="0" lang="en-US"/>
+              <a:rPr lang="en-US" b="0"/>
               <a:t>35</a:t>
             </a:fld>
             <a:endParaRPr lang="en-US"/>
@@ -21407,7 +21890,7 @@
           <a:bodyPr wrap="square" lIns="0" tIns="0" rIns="0" bIns="0" rtlCol="0" anchor="ctr"/>
           <a:lstStyle/>
           <a:p>
-            <a:pPr algn="ctr" indent="0" marL="0">
+            <a:pPr marL="0" indent="0" algn="ctr">
               <a:buNone/>
             </a:pPr>
             <a:r>
@@ -21425,9 +21908,11 @@
       <p:sp>
         <p:nvSpPr>
           <p:cNvPr id="3" name="Text 0"/>
-          <p:cNvSpPr/>
+          <p:cNvSpPr>
+            <a:spLocks noGrp="1"/>
+          </p:cNvSpPr>
           <p:nvPr>
-            <p:ph idx="100" type="title" hasCustomPrompt="1"/>
+            <p:ph type="title" idx="100" hasCustomPrompt="1"/>
           </p:nvPr>
         </p:nvSpPr>
         <p:spPr>
@@ -21445,7 +21930,7 @@
           <a:bodyPr wrap="square" lIns="0" tIns="0" rIns="0" bIns="0" rtlCol="0" anchor="b"/>
           <a:lstStyle/>
           <a:p>
-            <a:pPr algn="l" indent="0" marL="0">
+            <a:pPr marL="0" indent="0" algn="l">
               <a:buNone/>
             </a:pPr>
             <a:r>
@@ -21463,9 +21948,11 @@
       <p:sp>
         <p:nvSpPr>
           <p:cNvPr id="4" name="Text 0"/>
-          <p:cNvSpPr/>
+          <p:cNvSpPr>
+            <a:spLocks noGrp="1"/>
+          </p:cNvSpPr>
           <p:nvPr>
-            <p:ph idx="101" type="body" hasCustomPrompt="1"/>
+            <p:ph type="body" idx="101" hasCustomPrompt="1"/>
           </p:nvPr>
         </p:nvSpPr>
         <p:spPr>
@@ -21483,7 +21970,7 @@
           <a:bodyPr wrap="square" lIns="0" tIns="0" rIns="0" bIns="0" rtlCol="0" anchor="t"/>
           <a:lstStyle/>
           <a:p>
-            <a:pPr indent="0" marL="0">
+            <a:pPr marL="0" indent="0">
               <a:buNone/>
             </a:pPr>
             <a:r>
@@ -21526,9 +22013,11 @@
       <p:sp>
         <p:nvSpPr>
           <p:cNvPr id="2" name="Text 0"/>
-          <p:cNvSpPr/>
+          <p:cNvSpPr>
+            <a:spLocks noGrp="1"/>
+          </p:cNvSpPr>
           <p:nvPr>
-            <p:ph idx="100" type="title" hasCustomPrompt="1"/>
+            <p:ph type="title" idx="100" hasCustomPrompt="1"/>
           </p:nvPr>
         </p:nvSpPr>
         <p:spPr>
@@ -21546,7 +22035,7 @@
           <a:bodyPr wrap="square" lIns="0" tIns="0" rIns="0" bIns="0" rtlCol="0" anchor="ctr"/>
           <a:lstStyle/>
           <a:p>
-            <a:pPr algn="l" indent="0" marL="0">
+            <a:pPr marL="0" indent="0" algn="l">
               <a:buNone/>
             </a:pPr>
             <a:r>
@@ -21586,7 +22075,7 @@
           <a:bodyPr wrap="square" lIns="0" tIns="0" rIns="0" bIns="0" rtlCol="0" anchor="ctr"/>
           <a:lstStyle/>
           <a:p>
-            <a:pPr algn="ctr" indent="0" marL="0">
+            <a:pPr marL="0" indent="0" algn="ctr">
               <a:buNone/>
             </a:pPr>
             <a:r>
@@ -21622,6 +22111,13 @@
           </a:solidFill>
           <a:ln/>
         </p:spPr>
+        <p:txBody>
+          <a:bodyPr/>
+          <a:lstStyle/>
+          <a:p>
+            <a:endParaRPr lang="en-US"/>
+          </a:p>
+        </p:txBody>
       </p:sp>
       <p:sp>
         <p:nvSpPr>
@@ -21644,7 +22140,7 @@
           <a:bodyPr wrap="square" lIns="0" tIns="0" rIns="0" bIns="0" rtlCol="0" anchor="t"/>
           <a:lstStyle/>
           <a:p>
-            <a:pPr indent="0" marL="0">
+            <a:pPr marL="0" indent="0">
               <a:buNone/>
             </a:pPr>
             <a:r>
@@ -21680,7 +22176,7 @@
           <a:bodyPr wrap="square" lIns="0" tIns="0" rIns="0" bIns="0" rtlCol="0" anchor="t"/>
           <a:lstStyle/>
           <a:p>
-            <a:pPr indent="0" marL="0">
+            <a:pPr marL="0" indent="0">
               <a:buNone/>
             </a:pPr>
             <a:r>
@@ -21716,6 +22212,13 @@
           </a:solidFill>
           <a:ln/>
         </p:spPr>
+        <p:txBody>
+          <a:bodyPr/>
+          <a:lstStyle/>
+          <a:p>
+            <a:endParaRPr lang="en-US"/>
+          </a:p>
+        </p:txBody>
       </p:sp>
       <p:sp>
         <p:nvSpPr>
@@ -21738,7 +22241,7 @@
           <a:bodyPr wrap="square" lIns="0" tIns="0" rIns="0" bIns="0" rtlCol="0" anchor="t"/>
           <a:lstStyle/>
           <a:p>
-            <a:pPr indent="0" marL="0">
+            <a:pPr marL="0" indent="0">
               <a:buNone/>
             </a:pPr>
             <a:r>
@@ -21774,7 +22277,7 @@
           <a:bodyPr wrap="square" lIns="0" tIns="0" rIns="0" bIns="0" rtlCol="0" anchor="t"/>
           <a:lstStyle/>
           <a:p>
-            <a:pPr indent="0" marL="0">
+            <a:pPr marL="0" indent="0">
               <a:buNone/>
             </a:pPr>
             <a:r>
@@ -21810,6 +22313,13 @@
           </a:solidFill>
           <a:ln/>
         </p:spPr>
+        <p:txBody>
+          <a:bodyPr/>
+          <a:lstStyle/>
+          <a:p>
+            <a:endParaRPr lang="en-US"/>
+          </a:p>
+        </p:txBody>
       </p:sp>
       <p:sp>
         <p:nvSpPr>
@@ -21832,7 +22342,7 @@
           <a:bodyPr wrap="square" lIns="0" tIns="0" rIns="0" bIns="0" rtlCol="0" anchor="t"/>
           <a:lstStyle/>
           <a:p>
-            <a:pPr indent="0" marL="0">
+            <a:pPr marL="0" indent="0">
               <a:buNone/>
             </a:pPr>
             <a:r>
@@ -21868,7 +22378,7 @@
           <a:bodyPr wrap="square" lIns="0" tIns="0" rIns="0" bIns="0" rtlCol="0" anchor="t"/>
           <a:lstStyle/>
           <a:p>
-            <a:pPr indent="0" marL="0">
+            <a:pPr marL="0" indent="0">
               <a:buNone/>
             </a:pPr>
             <a:r>
@@ -21904,6 +22414,13 @@
           </a:solidFill>
           <a:ln/>
         </p:spPr>
+        <p:txBody>
+          <a:bodyPr/>
+          <a:lstStyle/>
+          <a:p>
+            <a:endParaRPr lang="en-US"/>
+          </a:p>
+        </p:txBody>
       </p:sp>
       <p:sp>
         <p:nvSpPr>
@@ -21926,7 +22443,7 @@
           <a:bodyPr wrap="square" lIns="0" tIns="0" rIns="0" bIns="0" rtlCol="0" anchor="t"/>
           <a:lstStyle/>
           <a:p>
-            <a:pPr indent="0" marL="0">
+            <a:pPr marL="0" indent="0">
               <a:buNone/>
             </a:pPr>
             <a:r>
@@ -21962,7 +22479,7 @@
           <a:bodyPr wrap="square" lIns="0" tIns="0" rIns="0" bIns="0" rtlCol="0" anchor="t"/>
           <a:lstStyle/>
           <a:p>
-            <a:pPr indent="0" marL="0">
+            <a:pPr marL="0" indent="0">
               <a:buNone/>
             </a:pPr>
             <a:r>
@@ -21997,7 +22514,7 @@
           </a:prstGeom>
           <a:extLst>
             <a:ext uri="{C572A759-6A51-4108-AA02-DFA0A04FC94B}">
-              <ma14:wrappingTextBoxFlag xmlns:ma14="http://schemas.microsoft.com/office/mac/drawingml/2011/main" val="0"/>
+              <ma14:wrappingTextBoxFlag xmlns:ma14="http://schemas.microsoft.com/office/mac/drawingml/2011/main" xmlns="" val="0"/>
             </a:ext>
           </a:extLst>
         </p:spPr>
@@ -22015,7 +22532,7 @@
           <a:p>
             <a:pPr algn="r"/>
             <a:fld id="{F7021451-1387-4CA6-816F-3879F97B5CBC}" type="slidenum">
-              <a:rPr b="0" lang="en-US"/>
+              <a:rPr lang="en-US" b="0"/>
               <a:t>37</a:t>
             </a:fld>
             <a:endParaRPr lang="en-US"/>
@@ -22050,9 +22567,11 @@
       <p:sp>
         <p:nvSpPr>
           <p:cNvPr id="2" name="Text 0"/>
-          <p:cNvSpPr/>
+          <p:cNvSpPr>
+            <a:spLocks noGrp="1"/>
+          </p:cNvSpPr>
           <p:nvPr>
-            <p:ph idx="100" type="title" hasCustomPrompt="1"/>
+            <p:ph type="title" idx="100" hasCustomPrompt="1"/>
           </p:nvPr>
         </p:nvSpPr>
         <p:spPr>
@@ -22070,7 +22589,7 @@
           <a:bodyPr wrap="square" lIns="0" tIns="0" rIns="0" bIns="0" rtlCol="0" anchor="ctr"/>
           <a:lstStyle/>
           <a:p>
-            <a:pPr algn="l" indent="0" marL="0">
+            <a:pPr marL="0" indent="0" algn="l">
               <a:buNone/>
             </a:pPr>
             <a:r>
@@ -22110,7 +22629,7 @@
           <a:bodyPr wrap="square" lIns="0" tIns="0" rIns="0" bIns="0" rtlCol="0" anchor="ctr"/>
           <a:lstStyle/>
           <a:p>
-            <a:pPr algn="ctr" indent="0" marL="0">
+            <a:pPr marL="0" indent="0" algn="ctr">
               <a:buNone/>
             </a:pPr>
             <a:r>
@@ -22146,6 +22665,13 @@
           </a:solidFill>
           <a:ln/>
         </p:spPr>
+        <p:txBody>
+          <a:bodyPr/>
+          <a:lstStyle/>
+          <a:p>
+            <a:endParaRPr lang="en-US"/>
+          </a:p>
+        </p:txBody>
       </p:sp>
       <p:sp>
         <p:nvSpPr>
@@ -22168,7 +22694,7 @@
           <a:bodyPr wrap="square" lIns="0" tIns="0" rIns="0" bIns="0" rtlCol="0" anchor="t"/>
           <a:lstStyle/>
           <a:p>
-            <a:pPr indent="0" marL="0">
+            <a:pPr marL="0" indent="0">
               <a:buNone/>
             </a:pPr>
             <a:r>
@@ -22298,6 +22824,13 @@
           </a:solidFill>
           <a:ln/>
         </p:spPr>
+        <p:txBody>
+          <a:bodyPr/>
+          <a:lstStyle/>
+          <a:p>
+            <a:endParaRPr lang="en-US"/>
+          </a:p>
+        </p:txBody>
       </p:sp>
       <p:sp>
         <p:nvSpPr>
@@ -22320,7 +22853,7 @@
           <a:bodyPr wrap="square" lIns="0" tIns="0" rIns="0" bIns="0" rtlCol="0" anchor="t"/>
           <a:lstStyle/>
           <a:p>
-            <a:pPr indent="0" marL="0">
+            <a:pPr marL="0" indent="0">
               <a:buNone/>
             </a:pPr>
             <a:r>
@@ -22431,7 +22964,7 @@
           </a:prstGeom>
           <a:extLst>
             <a:ext uri="{C572A759-6A51-4108-AA02-DFA0A04FC94B}">
-              <ma14:wrappingTextBoxFlag xmlns:ma14="http://schemas.microsoft.com/office/mac/drawingml/2011/main" val="0"/>
+              <ma14:wrappingTextBoxFlag xmlns:ma14="http://schemas.microsoft.com/office/mac/drawingml/2011/main" xmlns="" val="0"/>
             </a:ext>
           </a:extLst>
         </p:spPr>
@@ -22449,7 +22982,7 @@
           <a:p>
             <a:pPr algn="r"/>
             <a:fld id="{F7021451-1387-4CA6-816F-3879F97B5CBC}" type="slidenum">
-              <a:rPr b="0" lang="en-US"/>
+              <a:rPr lang="en-US" b="0"/>
               <a:t>38</a:t>
             </a:fld>
             <a:endParaRPr lang="en-US"/>
@@ -22483,14 +23016,14 @@
       </p:grpSpPr>
       <p:pic>
         <p:nvPicPr>
-          <p:cNvPr id="2" name="penguin" descr="preencoded.png">    </p:cNvPr>
+          <p:cNvPr id="2" name="penguin" descr="preencoded.png"/>
           <p:cNvPicPr>
             <a:picLocks noChangeAspect="1"/>
           </p:cNvPicPr>
           <p:nvPr/>
         </p:nvPicPr>
         <p:blipFill>
-          <a:blip r:embed="rId1"/>
+          <a:blip r:embed="rId3"/>
           <a:stretch>
             <a:fillRect/>
           </a:stretch>
@@ -22508,9 +23041,11 @@
       <p:sp>
         <p:nvSpPr>
           <p:cNvPr id="3" name="Text 0"/>
-          <p:cNvSpPr/>
+          <p:cNvSpPr>
+            <a:spLocks noGrp="1"/>
+          </p:cNvSpPr>
           <p:nvPr>
-            <p:ph idx="100" type="title" hasCustomPrompt="1"/>
+            <p:ph type="title" idx="100" hasCustomPrompt="1"/>
           </p:nvPr>
         </p:nvSpPr>
         <p:spPr>
@@ -22528,7 +23063,7 @@
           <a:bodyPr wrap="square" lIns="0" tIns="0" rIns="0" bIns="0" rtlCol="0" anchor="b"/>
           <a:lstStyle/>
           <a:p>
-            <a:pPr algn="l" indent="0" marL="0">
+            <a:pPr marL="0" indent="0" algn="l">
               <a:buNone/>
             </a:pPr>
             <a:r>
@@ -22546,9 +23081,11 @@
       <p:sp>
         <p:nvSpPr>
           <p:cNvPr id="4" name="Text 0"/>
-          <p:cNvSpPr/>
+          <p:cNvSpPr>
+            <a:spLocks noGrp="1"/>
+          </p:cNvSpPr>
           <p:nvPr>
-            <p:ph idx="101" type="body" hasCustomPrompt="1"/>
+            <p:ph type="body" idx="101" hasCustomPrompt="1"/>
           </p:nvPr>
         </p:nvSpPr>
         <p:spPr>
@@ -22566,7 +23103,7 @@
           <a:bodyPr wrap="square" lIns="0" tIns="0" rIns="0" bIns="0" rtlCol="0" anchor="t"/>
           <a:lstStyle/>
           <a:p>
-            <a:pPr indent="0" marL="0">
+            <a:pPr marL="0" indent="0">
               <a:buNone/>
             </a:pPr>
             <a:r>
@@ -22577,9 +23114,6 @@
               </a:rPr>
               <a:t>Your repo: </a:t>
             </a:r>
-            <a:pPr indent="0" marL="0">
-              <a:buNone/>
-            </a:pPr>
             <a:r>
               <a:rPr lang="en-US" sz="1800" b="1" dirty="0">
                 <a:solidFill>
@@ -22591,7 +23125,7 @@
             <a:endParaRPr lang="en-US" sz="1800" dirty="0"/>
           </a:p>
           <a:p>
-            <a:pPr indent="0" marL="0">
+            <a:pPr marL="0" indent="0">
               <a:buNone/>
             </a:pPr>
             <a:r>
@@ -22634,9 +23168,11 @@
       <p:sp>
         <p:nvSpPr>
           <p:cNvPr id="2" name="Text 0"/>
-          <p:cNvSpPr/>
+          <p:cNvSpPr>
+            <a:spLocks noGrp="1"/>
+          </p:cNvSpPr>
           <p:nvPr>
-            <p:ph idx="100" type="title" hasCustomPrompt="1"/>
+            <p:ph type="title" idx="100" hasCustomPrompt="1"/>
           </p:nvPr>
         </p:nvSpPr>
         <p:spPr>
@@ -22654,7 +23190,7 @@
           <a:bodyPr wrap="square" lIns="0" tIns="0" rIns="0" bIns="0" rtlCol="0" anchor="ctr"/>
           <a:lstStyle/>
           <a:p>
-            <a:pPr algn="l" indent="0" marL="0">
+            <a:pPr marL="0" indent="0" algn="l">
               <a:buNone/>
             </a:pPr>
             <a:r>
@@ -22690,246 +23226,17 @@
           </a:solidFill>
           <a:ln/>
         </p:spPr>
+        <p:txBody>
+          <a:bodyPr/>
+          <a:lstStyle/>
+          <a:p>
+            <a:endParaRPr lang="en-US"/>
+          </a:p>
+        </p:txBody>
       </p:sp>
       <p:pic>
         <p:nvPicPr>
-          <p:cNvPr id="5" name="icon I do" descr="preencoded.png">    </p:cNvPr>
-          <p:cNvPicPr>
-            <a:picLocks noChangeAspect="1"/>
-          </p:cNvPicPr>
-          <p:nvPr/>
-        </p:nvPicPr>
-        <p:blipFill>
-          <a:blip r:embed="rId1"/>
-          <a:stretch>
-            <a:fillRect/>
-          </a:stretch>
-        </p:blipFill>
-        <p:spPr>
-          <a:xfrm>
-            <a:off x="658368" y="1371600"/>
-            <a:ext cx="411480" cy="411480"/>
-          </a:xfrm>
-          <a:prstGeom prst="rect">
-            <a:avLst/>
-          </a:prstGeom>
-        </p:spPr>
-      </p:pic>
-      <p:sp>
-        <p:nvSpPr>
-          <p:cNvPr id="6" name="Text 2"/>
-          <p:cNvSpPr txBox="1"/>
-          <p:nvPr/>
-        </p:nvSpPr>
-        <p:spPr>
-          <a:xfrm>
-            <a:off x="658368" y="1901952"/>
-            <a:ext cx="2157984" cy="365760"/>
-          </a:xfrm>
-          <a:prstGeom prst="rect">
-            <a:avLst/>
-          </a:prstGeom>
-          <a:noFill/>
-          <a:ln/>
-        </p:spPr>
-        <p:txBody>
-          <a:bodyPr wrap="square" lIns="0" tIns="0" rIns="0" bIns="0" rtlCol="0" anchor="t"/>
-          <a:lstStyle/>
-          <a:p>
-            <a:pPr indent="0" marL="0">
-              <a:buNone/>
-            </a:pPr>
-            <a:r>
-              <a:rPr lang="en-US" sz="1600" b="1" dirty="0">
-                <a:solidFill>
-                  <a:schemeClr val="tx1"/>
-                </a:solidFill>
-              </a:rPr>
-              <a:t>I do</a:t>
-            </a:r>
-            <a:endParaRPr lang="en-US" sz="1600" dirty="0"/>
-          </a:p>
-        </p:txBody>
-      </p:sp>
-      <p:sp>
-        <p:nvSpPr>
-          <p:cNvPr id="7" name="Text 3"/>
-          <p:cNvSpPr txBox="1"/>
-          <p:nvPr/>
-        </p:nvSpPr>
-        <p:spPr>
-          <a:xfrm>
-            <a:off x="658368" y="2313432"/>
-            <a:ext cx="2157984" cy="914400"/>
-          </a:xfrm>
-          <a:prstGeom prst="rect">
-            <a:avLst/>
-          </a:prstGeom>
-          <a:noFill/>
-          <a:ln/>
-        </p:spPr>
-        <p:txBody>
-          <a:bodyPr wrap="square" lIns="0" tIns="0" rIns="0" bIns="0" rtlCol="0" anchor="t"/>
-          <a:lstStyle/>
-          <a:p>
-            <a:pPr indent="0" marL="0">
-              <a:buNone/>
-            </a:pPr>
-            <a:r>
-              <a:rPr lang="en-US" sz="1600" dirty="0">
-                <a:solidFill>
-                  <a:schemeClr val="tx2"/>
-                </a:solidFill>
-              </a:rPr>
-              <a:t>Watch the demo first. No typing yet.</a:t>
-            </a:r>
-            <a:endParaRPr lang="en-US" sz="1600" dirty="0"/>
-          </a:p>
-        </p:txBody>
-      </p:sp>
-      <p:sp>
-        <p:nvSpPr>
-          <p:cNvPr id="8" name="card We do"/>
-          <p:cNvSpPr/>
-          <p:nvPr/>
-        </p:nvSpPr>
-        <p:spPr>
-          <a:xfrm>
-            <a:off x="3291840" y="1188720"/>
-            <a:ext cx="2560320" cy="2148840"/>
-          </a:xfrm>
-          <a:prstGeom prst="roundRect">
-            <a:avLst>
-              <a:gd name="adj" fmla="val 3404"/>
-            </a:avLst>
-          </a:prstGeom>
-          <a:solidFill>
-            <a:schemeClr val="bg2"/>
-          </a:solidFill>
-          <a:ln/>
-        </p:spPr>
-      </p:sp>
-      <p:pic>
-        <p:nvPicPr>
-          <p:cNvPr id="9" name="icon We do" descr="preencoded.png">    </p:cNvPr>
-          <p:cNvPicPr>
-            <a:picLocks noChangeAspect="1"/>
-          </p:cNvPicPr>
-          <p:nvPr/>
-        </p:nvPicPr>
-        <p:blipFill>
-          <a:blip r:embed="rId2"/>
-          <a:stretch>
-            <a:fillRect/>
-          </a:stretch>
-        </p:blipFill>
-        <p:spPr>
-          <a:xfrm>
-            <a:off x="3493008" y="1371600"/>
-            <a:ext cx="411480" cy="411480"/>
-          </a:xfrm>
-          <a:prstGeom prst="rect">
-            <a:avLst/>
-          </a:prstGeom>
-        </p:spPr>
-      </p:pic>
-      <p:sp>
-        <p:nvSpPr>
-          <p:cNvPr id="10" name="Text 5"/>
-          <p:cNvSpPr txBox="1"/>
-          <p:nvPr/>
-        </p:nvSpPr>
-        <p:spPr>
-          <a:xfrm>
-            <a:off x="3493008" y="1901952"/>
-            <a:ext cx="2157984" cy="365760"/>
-          </a:xfrm>
-          <a:prstGeom prst="rect">
-            <a:avLst/>
-          </a:prstGeom>
-          <a:noFill/>
-          <a:ln/>
-        </p:spPr>
-        <p:txBody>
-          <a:bodyPr wrap="square" lIns="0" tIns="0" rIns="0" bIns="0" rtlCol="0" anchor="t"/>
-          <a:lstStyle/>
-          <a:p>
-            <a:pPr indent="0" marL="0">
-              <a:buNone/>
-            </a:pPr>
-            <a:r>
-              <a:rPr lang="en-US" sz="1600" b="1" dirty="0">
-                <a:solidFill>
-                  <a:schemeClr val="tx1"/>
-                </a:solidFill>
-              </a:rPr>
-              <a:t>We do</a:t>
-            </a:r>
-            <a:endParaRPr lang="en-US" sz="1600" dirty="0"/>
-          </a:p>
-        </p:txBody>
-      </p:sp>
-      <p:sp>
-        <p:nvSpPr>
-          <p:cNvPr id="11" name="Text 6"/>
-          <p:cNvSpPr txBox="1"/>
-          <p:nvPr/>
-        </p:nvSpPr>
-        <p:spPr>
-          <a:xfrm>
-            <a:off x="3493008" y="2313432"/>
-            <a:ext cx="2157984" cy="914400"/>
-          </a:xfrm>
-          <a:prstGeom prst="rect">
-            <a:avLst/>
-          </a:prstGeom>
-          <a:noFill/>
-          <a:ln/>
-        </p:spPr>
-        <p:txBody>
-          <a:bodyPr wrap="square" lIns="0" tIns="0" rIns="0" bIns="0" rtlCol="0" anchor="t"/>
-          <a:lstStyle/>
-          <a:p>
-            <a:pPr indent="0" marL="0">
-              <a:buNone/>
-            </a:pPr>
-            <a:r>
-              <a:rPr lang="en-US" sz="1600" dirty="0">
-                <a:solidFill>
-                  <a:schemeClr val="tx2"/>
-                </a:solidFill>
-              </a:rPr>
-              <a:t>Same steps together, at the same pace.</a:t>
-            </a:r>
-            <a:endParaRPr lang="en-US" sz="1600" dirty="0"/>
-          </a:p>
-        </p:txBody>
-      </p:sp>
-      <p:sp>
-        <p:nvSpPr>
-          <p:cNvPr id="12" name="card You do"/>
-          <p:cNvSpPr/>
-          <p:nvPr/>
-        </p:nvSpPr>
-        <p:spPr>
-          <a:xfrm>
-            <a:off x="6126480" y="1188720"/>
-            <a:ext cx="2560320" cy="2148840"/>
-          </a:xfrm>
-          <a:prstGeom prst="roundRect">
-            <a:avLst>
-              <a:gd name="adj" fmla="val 3404"/>
-            </a:avLst>
-          </a:prstGeom>
-          <a:solidFill>
-            <a:schemeClr val="bg2"/>
-          </a:solidFill>
-          <a:ln/>
-        </p:spPr>
-      </p:sp>
-      <p:pic>
-        <p:nvPicPr>
-          <p:cNvPr id="13" name="icon You do" descr="preencoded.png">    </p:cNvPr>
+          <p:cNvPr id="5" name="icon I do" descr="preencoded.png"/>
           <p:cNvPicPr>
             <a:picLocks noChangeAspect="1"/>
           </p:cNvPicPr>
@@ -22943,6 +23250,256 @@
         </p:blipFill>
         <p:spPr>
           <a:xfrm>
+            <a:off x="658368" y="1371600"/>
+            <a:ext cx="411480" cy="411480"/>
+          </a:xfrm>
+          <a:prstGeom prst="rect">
+            <a:avLst/>
+          </a:prstGeom>
+        </p:spPr>
+      </p:pic>
+      <p:sp>
+        <p:nvSpPr>
+          <p:cNvPr id="6" name="Text 2"/>
+          <p:cNvSpPr txBox="1"/>
+          <p:nvPr/>
+        </p:nvSpPr>
+        <p:spPr>
+          <a:xfrm>
+            <a:off x="658368" y="1901952"/>
+            <a:ext cx="2157984" cy="365760"/>
+          </a:xfrm>
+          <a:prstGeom prst="rect">
+            <a:avLst/>
+          </a:prstGeom>
+          <a:noFill/>
+          <a:ln/>
+        </p:spPr>
+        <p:txBody>
+          <a:bodyPr wrap="square" lIns="0" tIns="0" rIns="0" bIns="0" rtlCol="0" anchor="t"/>
+          <a:lstStyle/>
+          <a:p>
+            <a:pPr marL="0" indent="0">
+              <a:buNone/>
+            </a:pPr>
+            <a:r>
+              <a:rPr lang="en-US" sz="1600" b="1" dirty="0">
+                <a:solidFill>
+                  <a:schemeClr val="tx1"/>
+                </a:solidFill>
+              </a:rPr>
+              <a:t>I do</a:t>
+            </a:r>
+            <a:endParaRPr lang="en-US" sz="1600" dirty="0"/>
+          </a:p>
+        </p:txBody>
+      </p:sp>
+      <p:sp>
+        <p:nvSpPr>
+          <p:cNvPr id="7" name="Text 3"/>
+          <p:cNvSpPr txBox="1"/>
+          <p:nvPr/>
+        </p:nvSpPr>
+        <p:spPr>
+          <a:xfrm>
+            <a:off x="658368" y="2313432"/>
+            <a:ext cx="2157984" cy="914400"/>
+          </a:xfrm>
+          <a:prstGeom prst="rect">
+            <a:avLst/>
+          </a:prstGeom>
+          <a:noFill/>
+          <a:ln/>
+        </p:spPr>
+        <p:txBody>
+          <a:bodyPr wrap="square" lIns="0" tIns="0" rIns="0" bIns="0" rtlCol="0" anchor="t"/>
+          <a:lstStyle/>
+          <a:p>
+            <a:pPr marL="0" indent="0">
+              <a:buNone/>
+            </a:pPr>
+            <a:r>
+              <a:rPr lang="en-US" sz="1600" dirty="0">
+                <a:solidFill>
+                  <a:schemeClr val="tx2"/>
+                </a:solidFill>
+              </a:rPr>
+              <a:t>Watch the demo first. No typing yet.</a:t>
+            </a:r>
+            <a:endParaRPr lang="en-US" sz="1600" dirty="0"/>
+          </a:p>
+        </p:txBody>
+      </p:sp>
+      <p:sp>
+        <p:nvSpPr>
+          <p:cNvPr id="8" name="card We do"/>
+          <p:cNvSpPr/>
+          <p:nvPr/>
+        </p:nvSpPr>
+        <p:spPr>
+          <a:xfrm>
+            <a:off x="3291840" y="1188720"/>
+            <a:ext cx="2560320" cy="2148840"/>
+          </a:xfrm>
+          <a:prstGeom prst="roundRect">
+            <a:avLst>
+              <a:gd name="adj" fmla="val 3404"/>
+            </a:avLst>
+          </a:prstGeom>
+          <a:solidFill>
+            <a:schemeClr val="bg2"/>
+          </a:solidFill>
+          <a:ln/>
+        </p:spPr>
+        <p:txBody>
+          <a:bodyPr/>
+          <a:lstStyle/>
+          <a:p>
+            <a:endParaRPr lang="en-US"/>
+          </a:p>
+        </p:txBody>
+      </p:sp>
+      <p:pic>
+        <p:nvPicPr>
+          <p:cNvPr id="9" name="icon We do" descr="preencoded.png"/>
+          <p:cNvPicPr>
+            <a:picLocks noChangeAspect="1"/>
+          </p:cNvPicPr>
+          <p:nvPr/>
+        </p:nvPicPr>
+        <p:blipFill>
+          <a:blip r:embed="rId4"/>
+          <a:stretch>
+            <a:fillRect/>
+          </a:stretch>
+        </p:blipFill>
+        <p:spPr>
+          <a:xfrm>
+            <a:off x="3493008" y="1371600"/>
+            <a:ext cx="411480" cy="411480"/>
+          </a:xfrm>
+          <a:prstGeom prst="rect">
+            <a:avLst/>
+          </a:prstGeom>
+        </p:spPr>
+      </p:pic>
+      <p:sp>
+        <p:nvSpPr>
+          <p:cNvPr id="10" name="Text 5"/>
+          <p:cNvSpPr txBox="1"/>
+          <p:nvPr/>
+        </p:nvSpPr>
+        <p:spPr>
+          <a:xfrm>
+            <a:off x="3493008" y="1901952"/>
+            <a:ext cx="2157984" cy="365760"/>
+          </a:xfrm>
+          <a:prstGeom prst="rect">
+            <a:avLst/>
+          </a:prstGeom>
+          <a:noFill/>
+          <a:ln/>
+        </p:spPr>
+        <p:txBody>
+          <a:bodyPr wrap="square" lIns="0" tIns="0" rIns="0" bIns="0" rtlCol="0" anchor="t"/>
+          <a:lstStyle/>
+          <a:p>
+            <a:pPr marL="0" indent="0">
+              <a:buNone/>
+            </a:pPr>
+            <a:r>
+              <a:rPr lang="en-US" sz="1600" b="1" dirty="0">
+                <a:solidFill>
+                  <a:schemeClr val="tx1"/>
+                </a:solidFill>
+              </a:rPr>
+              <a:t>We do</a:t>
+            </a:r>
+            <a:endParaRPr lang="en-US" sz="1600" dirty="0"/>
+          </a:p>
+        </p:txBody>
+      </p:sp>
+      <p:sp>
+        <p:nvSpPr>
+          <p:cNvPr id="11" name="Text 6"/>
+          <p:cNvSpPr txBox="1"/>
+          <p:nvPr/>
+        </p:nvSpPr>
+        <p:spPr>
+          <a:xfrm>
+            <a:off x="3493008" y="2313432"/>
+            <a:ext cx="2157984" cy="914400"/>
+          </a:xfrm>
+          <a:prstGeom prst="rect">
+            <a:avLst/>
+          </a:prstGeom>
+          <a:noFill/>
+          <a:ln/>
+        </p:spPr>
+        <p:txBody>
+          <a:bodyPr wrap="square" lIns="0" tIns="0" rIns="0" bIns="0" rtlCol="0" anchor="t"/>
+          <a:lstStyle/>
+          <a:p>
+            <a:pPr marL="0" indent="0">
+              <a:buNone/>
+            </a:pPr>
+            <a:r>
+              <a:rPr lang="en-US" sz="1600" dirty="0">
+                <a:solidFill>
+                  <a:schemeClr val="tx2"/>
+                </a:solidFill>
+              </a:rPr>
+              <a:t>Same steps together, at the same pace.</a:t>
+            </a:r>
+            <a:endParaRPr lang="en-US" sz="1600" dirty="0"/>
+          </a:p>
+        </p:txBody>
+      </p:sp>
+      <p:sp>
+        <p:nvSpPr>
+          <p:cNvPr id="12" name="card You do"/>
+          <p:cNvSpPr/>
+          <p:nvPr/>
+        </p:nvSpPr>
+        <p:spPr>
+          <a:xfrm>
+            <a:off x="6126480" y="1188720"/>
+            <a:ext cx="2560320" cy="2148840"/>
+          </a:xfrm>
+          <a:prstGeom prst="roundRect">
+            <a:avLst>
+              <a:gd name="adj" fmla="val 3404"/>
+            </a:avLst>
+          </a:prstGeom>
+          <a:solidFill>
+            <a:schemeClr val="bg2"/>
+          </a:solidFill>
+          <a:ln/>
+        </p:spPr>
+        <p:txBody>
+          <a:bodyPr/>
+          <a:lstStyle/>
+          <a:p>
+            <a:endParaRPr lang="en-US"/>
+          </a:p>
+        </p:txBody>
+      </p:sp>
+      <p:pic>
+        <p:nvPicPr>
+          <p:cNvPr id="13" name="icon You do" descr="preencoded.png"/>
+          <p:cNvPicPr>
+            <a:picLocks noChangeAspect="1"/>
+          </p:cNvPicPr>
+          <p:nvPr/>
+        </p:nvPicPr>
+        <p:blipFill>
+          <a:blip r:embed="rId5"/>
+          <a:stretch>
+            <a:fillRect/>
+          </a:stretch>
+        </p:blipFill>
+        <p:spPr>
+          <a:xfrm>
             <a:off x="6327648" y="1371600"/>
             <a:ext cx="411480" cy="411480"/>
           </a:xfrm>
@@ -22972,7 +23529,7 @@
           <a:bodyPr wrap="square" lIns="0" tIns="0" rIns="0" bIns="0" rtlCol="0" anchor="t"/>
           <a:lstStyle/>
           <a:p>
-            <a:pPr indent="0" marL="0">
+            <a:pPr marL="0" indent="0">
               <a:buNone/>
             </a:pPr>
             <a:r>
@@ -23008,7 +23565,7 @@
           <a:bodyPr wrap="square" lIns="0" tIns="0" rIns="0" bIns="0" rtlCol="0" anchor="t"/>
           <a:lstStyle/>
           <a:p>
-            <a:pPr indent="0" marL="0">
+            <a:pPr marL="0" indent="0">
               <a:buNone/>
             </a:pPr>
             <a:r>
@@ -23044,6 +23601,13 @@
           </a:solidFill>
           <a:ln/>
         </p:spPr>
+        <p:txBody>
+          <a:bodyPr/>
+          <a:lstStyle/>
+          <a:p>
+            <a:endParaRPr lang="en-US"/>
+          </a:p>
+        </p:txBody>
       </p:sp>
       <p:sp>
         <p:nvSpPr>
@@ -23066,7 +23630,7 @@
           <a:bodyPr wrap="square" lIns="0" tIns="0" rIns="0" bIns="0" rtlCol="0" anchor="ctr"/>
           <a:lstStyle/>
           <a:p>
-            <a:pPr algn="l" indent="0" marL="0">
+            <a:pPr marL="0" indent="0" algn="l">
               <a:buNone/>
             </a:pPr>
             <a:r>
@@ -23101,7 +23665,7 @@
           </a:prstGeom>
           <a:extLst>
             <a:ext uri="{C572A759-6A51-4108-AA02-DFA0A04FC94B}">
-              <ma14:wrappingTextBoxFlag xmlns:ma14="http://schemas.microsoft.com/office/mac/drawingml/2011/main" val="0"/>
+              <ma14:wrappingTextBoxFlag xmlns:ma14="http://schemas.microsoft.com/office/mac/drawingml/2011/main" xmlns="" val="0"/>
             </a:ext>
           </a:extLst>
         </p:spPr>
@@ -23119,7 +23683,7 @@
           <a:p>
             <a:pPr algn="r"/>
             <a:fld id="{F7021451-1387-4CA6-816F-3879F97B5CBC}" type="slidenum">
-              <a:rPr b="0" lang="en-US"/>
+              <a:rPr lang="en-US" b="0"/>
               <a:t>4</a:t>
             </a:fld>
             <a:endParaRPr lang="en-US"/>
@@ -23176,7 +23740,7 @@
           <a:bodyPr wrap="square" lIns="0" tIns="0" rIns="0" bIns="0" rtlCol="0" anchor="ctr"/>
           <a:lstStyle/>
           <a:p>
-            <a:pPr algn="ctr" indent="0" marL="0">
+            <a:pPr marL="0" indent="0" algn="ctr">
               <a:buNone/>
             </a:pPr>
             <a:r>
@@ -23194,9 +23758,11 @@
       <p:sp>
         <p:nvSpPr>
           <p:cNvPr id="3" name="Text 0"/>
-          <p:cNvSpPr/>
+          <p:cNvSpPr>
+            <a:spLocks noGrp="1"/>
+          </p:cNvSpPr>
           <p:nvPr>
-            <p:ph idx="100" type="title" hasCustomPrompt="1"/>
+            <p:ph type="title" idx="100" hasCustomPrompt="1"/>
           </p:nvPr>
         </p:nvSpPr>
         <p:spPr>
@@ -23214,7 +23780,7 @@
           <a:bodyPr wrap="square" lIns="0" tIns="0" rIns="0" bIns="0" rtlCol="0" anchor="b"/>
           <a:lstStyle/>
           <a:p>
-            <a:pPr algn="l" indent="0" marL="0">
+            <a:pPr marL="0" indent="0" algn="l">
               <a:buNone/>
             </a:pPr>
             <a:r>
@@ -23232,9 +23798,11 @@
       <p:sp>
         <p:nvSpPr>
           <p:cNvPr id="4" name="Text 0"/>
-          <p:cNvSpPr/>
+          <p:cNvSpPr>
+            <a:spLocks noGrp="1"/>
+          </p:cNvSpPr>
           <p:nvPr>
-            <p:ph idx="101" type="body" hasCustomPrompt="1"/>
+            <p:ph type="body" idx="101" hasCustomPrompt="1"/>
           </p:nvPr>
         </p:nvSpPr>
         <p:spPr>
@@ -23252,7 +23820,7 @@
           <a:bodyPr wrap="square" lIns="0" tIns="0" rIns="0" bIns="0" rtlCol="0" anchor="t"/>
           <a:lstStyle/>
           <a:p>
-            <a:pPr indent="0" marL="0">
+            <a:pPr marL="0" indent="0">
               <a:buNone/>
             </a:pPr>
             <a:r>
@@ -23295,9 +23863,11 @@
       <p:sp>
         <p:nvSpPr>
           <p:cNvPr id="2" name="Text 0"/>
-          <p:cNvSpPr/>
+          <p:cNvSpPr>
+            <a:spLocks noGrp="1"/>
+          </p:cNvSpPr>
           <p:nvPr>
-            <p:ph idx="100" type="title" hasCustomPrompt="1"/>
+            <p:ph type="title" idx="100" hasCustomPrompt="1"/>
           </p:nvPr>
         </p:nvSpPr>
         <p:spPr>
@@ -23315,7 +23885,7 @@
           <a:bodyPr wrap="square" lIns="0" tIns="0" rIns="0" bIns="0" rtlCol="0" anchor="ctr"/>
           <a:lstStyle/>
           <a:p>
-            <a:pPr algn="l" indent="0" marL="0">
+            <a:pPr marL="0" indent="0" algn="l">
               <a:buNone/>
             </a:pPr>
             <a:r>
@@ -23355,7 +23925,7 @@
           <a:bodyPr wrap="square" lIns="0" tIns="0" rIns="0" bIns="0" rtlCol="0" anchor="ctr"/>
           <a:lstStyle/>
           <a:p>
-            <a:pPr algn="ctr" indent="0" marL="0">
+            <a:pPr marL="0" indent="0" algn="ctr">
               <a:buNone/>
             </a:pPr>
             <a:r>
@@ -23391,6 +23961,13 @@
           </a:solidFill>
           <a:ln/>
         </p:spPr>
+        <p:txBody>
+          <a:bodyPr/>
+          <a:lstStyle/>
+          <a:p>
+            <a:endParaRPr lang="en-US"/>
+          </a:p>
+        </p:txBody>
       </p:sp>
       <p:sp>
         <p:nvSpPr>
@@ -23413,7 +23990,7 @@
           <a:bodyPr wrap="square" lIns="0" tIns="0" rIns="0" bIns="0" rtlCol="0" anchor="t"/>
           <a:lstStyle/>
           <a:p>
-            <a:pPr algn="ctr" indent="0" marL="0">
+            <a:pPr marL="0" indent="0" algn="ctr">
               <a:buNone/>
             </a:pPr>
             <a:r>
@@ -23449,7 +24026,7 @@
           <a:bodyPr wrap="square" lIns="0" tIns="0" rIns="0" bIns="0" rtlCol="0" anchor="t"/>
           <a:lstStyle/>
           <a:p>
-            <a:pPr algn="ctr" indent="0" marL="0">
+            <a:pPr marL="0" indent="0" algn="ctr">
               <a:buNone/>
             </a:pPr>
             <a:r>
@@ -23487,6 +24064,13 @@
             <a:tailEnd type="triangle"/>
           </a:ln>
         </p:spPr>
+        <p:txBody>
+          <a:bodyPr/>
+          <a:lstStyle/>
+          <a:p>
+            <a:endParaRPr lang="en-US"/>
+          </a:p>
+        </p:txBody>
       </p:sp>
       <p:sp>
         <p:nvSpPr>
@@ -23509,6 +24093,13 @@
           </a:solidFill>
           <a:ln/>
         </p:spPr>
+        <p:txBody>
+          <a:bodyPr/>
+          <a:lstStyle/>
+          <a:p>
+            <a:endParaRPr lang="en-US"/>
+          </a:p>
+        </p:txBody>
       </p:sp>
       <p:sp>
         <p:nvSpPr>
@@ -23531,7 +24122,7 @@
           <a:bodyPr wrap="square" lIns="0" tIns="0" rIns="0" bIns="0" rtlCol="0" anchor="t"/>
           <a:lstStyle/>
           <a:p>
-            <a:pPr algn="ctr" indent="0" marL="0">
+            <a:pPr marL="0" indent="0" algn="ctr">
               <a:buNone/>
             </a:pPr>
             <a:r>
@@ -23567,7 +24158,7 @@
           <a:bodyPr wrap="square" lIns="0" tIns="0" rIns="0" bIns="0" rtlCol="0" anchor="t"/>
           <a:lstStyle/>
           <a:p>
-            <a:pPr algn="ctr" indent="0" marL="0">
+            <a:pPr marL="0" indent="0" algn="ctr">
               <a:buNone/>
             </a:pPr>
             <a:r>
@@ -23605,6 +24196,13 @@
             <a:tailEnd type="triangle"/>
           </a:ln>
         </p:spPr>
+        <p:txBody>
+          <a:bodyPr/>
+          <a:lstStyle/>
+          <a:p>
+            <a:endParaRPr lang="en-US"/>
+          </a:p>
+        </p:txBody>
       </p:sp>
       <p:sp>
         <p:nvSpPr>
@@ -23627,6 +24225,13 @@
           </a:solidFill>
           <a:ln/>
         </p:spPr>
+        <p:txBody>
+          <a:bodyPr/>
+          <a:lstStyle/>
+          <a:p>
+            <a:endParaRPr lang="en-US"/>
+          </a:p>
+        </p:txBody>
       </p:sp>
       <p:sp>
         <p:nvSpPr>
@@ -23649,7 +24254,7 @@
           <a:bodyPr wrap="square" lIns="0" tIns="0" rIns="0" bIns="0" rtlCol="0" anchor="t"/>
           <a:lstStyle/>
           <a:p>
-            <a:pPr algn="ctr" indent="0" marL="0">
+            <a:pPr marL="0" indent="0" algn="ctr">
               <a:buNone/>
             </a:pPr>
             <a:r>
@@ -23685,7 +24290,7 @@
           <a:bodyPr wrap="square" lIns="0" tIns="0" rIns="0" bIns="0" rtlCol="0" anchor="t"/>
           <a:lstStyle/>
           <a:p>
-            <a:pPr algn="ctr" indent="0" marL="0">
+            <a:pPr marL="0" indent="0" algn="ctr">
               <a:buNone/>
             </a:pPr>
             <a:r>
@@ -23723,6 +24328,13 @@
             <a:tailEnd type="triangle"/>
           </a:ln>
         </p:spPr>
+        <p:txBody>
+          <a:bodyPr/>
+          <a:lstStyle/>
+          <a:p>
+            <a:endParaRPr lang="en-US"/>
+          </a:p>
+        </p:txBody>
       </p:sp>
       <p:sp>
         <p:nvSpPr>
@@ -23745,6 +24357,13 @@
           </a:solidFill>
           <a:ln/>
         </p:spPr>
+        <p:txBody>
+          <a:bodyPr/>
+          <a:lstStyle/>
+          <a:p>
+            <a:endParaRPr lang="en-US"/>
+          </a:p>
+        </p:txBody>
       </p:sp>
       <p:sp>
         <p:nvSpPr>
@@ -23767,7 +24386,7 @@
           <a:bodyPr wrap="square" lIns="0" tIns="0" rIns="0" bIns="0" rtlCol="0" anchor="t"/>
           <a:lstStyle/>
           <a:p>
-            <a:pPr algn="ctr" indent="0" marL="0">
+            <a:pPr marL="0" indent="0" algn="ctr">
               <a:buNone/>
             </a:pPr>
             <a:r>
@@ -23803,7 +24422,7 @@
           <a:bodyPr wrap="square" lIns="0" tIns="0" rIns="0" bIns="0" rtlCol="0" anchor="t"/>
           <a:lstStyle/>
           <a:p>
-            <a:pPr algn="ctr" indent="0" marL="0">
+            <a:pPr marL="0" indent="0" algn="ctr">
               <a:buNone/>
             </a:pPr>
             <a:r>
@@ -23841,6 +24460,13 @@
             <a:tailEnd type="triangle"/>
           </a:ln>
         </p:spPr>
+        <p:txBody>
+          <a:bodyPr/>
+          <a:lstStyle/>
+          <a:p>
+            <a:endParaRPr lang="en-US"/>
+          </a:p>
+        </p:txBody>
       </p:sp>
       <p:sp>
         <p:nvSpPr>
@@ -23863,6 +24489,13 @@
           </a:solidFill>
           <a:ln/>
         </p:spPr>
+        <p:txBody>
+          <a:bodyPr/>
+          <a:lstStyle/>
+          <a:p>
+            <a:endParaRPr lang="en-US"/>
+          </a:p>
+        </p:txBody>
       </p:sp>
       <p:sp>
         <p:nvSpPr>
@@ -23885,7 +24518,7 @@
           <a:bodyPr wrap="square" lIns="0" tIns="0" rIns="0" bIns="0" rtlCol="0" anchor="t"/>
           <a:lstStyle/>
           <a:p>
-            <a:pPr algn="ctr" indent="0" marL="0">
+            <a:pPr marL="0" indent="0" algn="ctr">
               <a:buNone/>
             </a:pPr>
             <a:r>
@@ -23921,7 +24554,7 @@
           <a:bodyPr wrap="square" lIns="0" tIns="0" rIns="0" bIns="0" rtlCol="0" anchor="t"/>
           <a:lstStyle/>
           <a:p>
-            <a:pPr algn="ctr" indent="0" marL="0">
+            <a:pPr marL="0" indent="0" algn="ctr">
               <a:buNone/>
             </a:pPr>
             <a:r>
@@ -23958,6 +24591,13 @@
             <a:prstDash val="solid"/>
           </a:ln>
         </p:spPr>
+        <p:txBody>
+          <a:bodyPr/>
+          <a:lstStyle/>
+          <a:p>
+            <a:endParaRPr lang="en-US"/>
+          </a:p>
+        </p:txBody>
       </p:sp>
       <p:sp>
         <p:nvSpPr>
@@ -23981,6 +24621,13 @@
             <a:prstDash val="solid"/>
           </a:ln>
         </p:spPr>
+        <p:txBody>
+          <a:bodyPr/>
+          <a:lstStyle/>
+          <a:p>
+            <a:endParaRPr lang="en-US"/>
+          </a:p>
+        </p:txBody>
       </p:sp>
       <p:sp>
         <p:nvSpPr>
@@ -24005,6 +24652,13 @@
             <a:headEnd type="triangle"/>
           </a:ln>
         </p:spPr>
+        <p:txBody>
+          <a:bodyPr/>
+          <a:lstStyle/>
+          <a:p>
+            <a:endParaRPr lang="en-US"/>
+          </a:p>
+        </p:txBody>
       </p:sp>
       <p:sp>
         <p:nvSpPr>
@@ -24027,7 +24681,7 @@
           <a:bodyPr wrap="square" lIns="0" tIns="0" rIns="0" bIns="0" rtlCol="0" anchor="t"/>
           <a:lstStyle/>
           <a:p>
-            <a:pPr algn="ctr" indent="0" marL="0">
+            <a:pPr marL="0" indent="0" algn="ctr">
               <a:buNone/>
             </a:pPr>
             <a:r>
@@ -24063,6 +24717,13 @@
           </a:solidFill>
           <a:ln/>
         </p:spPr>
+        <p:txBody>
+          <a:bodyPr/>
+          <a:lstStyle/>
+          <a:p>
+            <a:endParaRPr lang="en-US"/>
+          </a:p>
+        </p:txBody>
       </p:sp>
       <p:sp>
         <p:nvSpPr>
@@ -24085,7 +24746,7 @@
           <a:bodyPr wrap="square" lIns="0" tIns="0" rIns="0" bIns="0" rtlCol="0" anchor="ctr"/>
           <a:lstStyle/>
           <a:p>
-            <a:pPr algn="l" indent="0" marL="0">
+            <a:pPr marL="0" indent="0" algn="l">
               <a:buNone/>
             </a:pPr>
             <a:r>
@@ -24102,7 +24763,7 @@
       </p:sp>
       <p:sp>
         <p:nvSpPr>
-          <p:cNvPr id="25" name="Slide Number Placeholder 0"/>
+          <p:cNvPr id="4" name="Slide Number Placeholder 0"/>
           <p:cNvSpPr>
             <a:spLocks noGrp="1"/>
           </p:cNvSpPr>
@@ -24120,7 +24781,7 @@
           </a:prstGeom>
           <a:extLst>
             <a:ext uri="{C572A759-6A51-4108-AA02-DFA0A04FC94B}">
-              <ma14:wrappingTextBoxFlag xmlns:ma14="http://schemas.microsoft.com/office/mac/drawingml/2011/main" val="0"/>
+              <ma14:wrappingTextBoxFlag xmlns:ma14="http://schemas.microsoft.com/office/mac/drawingml/2011/main" xmlns="" val="0"/>
             </a:ext>
           </a:extLst>
         </p:spPr>
@@ -24138,7 +24799,7 @@
           <a:p>
             <a:pPr algn="r"/>
             <a:fld id="{F7021451-1387-4CA6-816F-3879F97B5CBC}" type="slidenum">
-              <a:rPr b="0" lang="en-US"/>
+              <a:rPr lang="en-US" b="0"/>
               <a:t>6</a:t>
             </a:fld>
             <a:endParaRPr lang="en-US"/>
@@ -24173,9 +24834,11 @@
       <p:sp>
         <p:nvSpPr>
           <p:cNvPr id="2" name="Text 0"/>
-          <p:cNvSpPr/>
+          <p:cNvSpPr>
+            <a:spLocks noGrp="1"/>
+          </p:cNvSpPr>
           <p:nvPr>
-            <p:ph idx="100" type="title" hasCustomPrompt="1"/>
+            <p:ph type="title" idx="100" hasCustomPrompt="1"/>
           </p:nvPr>
         </p:nvSpPr>
         <p:spPr>
@@ -24193,7 +24856,7 @@
           <a:bodyPr wrap="square" lIns="0" tIns="0" rIns="0" bIns="0" rtlCol="0" anchor="ctr"/>
           <a:lstStyle/>
           <a:p>
-            <a:pPr algn="l" indent="0" marL="0">
+            <a:pPr marL="0" indent="0" algn="l">
               <a:buNone/>
             </a:pPr>
             <a:r>
@@ -24233,7 +24896,7 @@
           <a:bodyPr wrap="square" lIns="0" tIns="0" rIns="0" bIns="0" rtlCol="0" anchor="ctr"/>
           <a:lstStyle/>
           <a:p>
-            <a:pPr algn="ctr" indent="0" marL="0">
+            <a:pPr marL="0" indent="0" algn="ctr">
               <a:buNone/>
             </a:pPr>
             <a:r>
@@ -24269,6 +24932,13 @@
           </a:solidFill>
           <a:ln/>
         </p:spPr>
+        <p:txBody>
+          <a:bodyPr/>
+          <a:lstStyle/>
+          <a:p>
+            <a:endParaRPr lang="en-US"/>
+          </a:p>
+        </p:txBody>
       </p:sp>
       <p:sp>
         <p:nvSpPr>
@@ -24291,7 +24961,7 @@
           <a:bodyPr wrap="square" lIns="0" tIns="0" rIns="0" bIns="0" rtlCol="0" anchor="t"/>
           <a:lstStyle/>
           <a:p>
-            <a:pPr indent="0" marL="0">
+            <a:pPr marL="0" indent="0">
               <a:buNone/>
             </a:pPr>
             <a:r>
@@ -24403,6 +25073,13 @@
           </a:solidFill>
           <a:ln/>
         </p:spPr>
+        <p:txBody>
+          <a:bodyPr/>
+          <a:lstStyle/>
+          <a:p>
+            <a:endParaRPr lang="en-US"/>
+          </a:p>
+        </p:txBody>
       </p:sp>
       <p:sp>
         <p:nvSpPr>
@@ -24425,7 +25102,7 @@
           <a:bodyPr wrap="square" lIns="0" tIns="0" rIns="0" bIns="0" rtlCol="0" anchor="t"/>
           <a:lstStyle/>
           <a:p>
-            <a:pPr indent="0" marL="0">
+            <a:pPr marL="0" indent="0">
               <a:buNone/>
             </a:pPr>
             <a:r>
@@ -24536,7 +25213,7 @@
           </a:prstGeom>
           <a:extLst>
             <a:ext uri="{C572A759-6A51-4108-AA02-DFA0A04FC94B}">
-              <ma14:wrappingTextBoxFlag xmlns:ma14="http://schemas.microsoft.com/office/mac/drawingml/2011/main" val="0"/>
+              <ma14:wrappingTextBoxFlag xmlns:ma14="http://schemas.microsoft.com/office/mac/drawingml/2011/main" xmlns="" val="0"/>
             </a:ext>
           </a:extLst>
         </p:spPr>
@@ -24554,7 +25231,7 @@
           <a:p>
             <a:pPr algn="r"/>
             <a:fld id="{F7021451-1387-4CA6-816F-3879F97B5CBC}" type="slidenum">
-              <a:rPr b="0" lang="en-US"/>
+              <a:rPr lang="en-US" b="0"/>
               <a:t>7</a:t>
             </a:fld>
             <a:endParaRPr lang="en-US"/>
@@ -24589,9 +25266,11 @@
       <p:sp>
         <p:nvSpPr>
           <p:cNvPr id="2" name="Text 0"/>
-          <p:cNvSpPr/>
+          <p:cNvSpPr>
+            <a:spLocks noGrp="1"/>
+          </p:cNvSpPr>
           <p:nvPr>
-            <p:ph idx="100" type="title" hasCustomPrompt="1"/>
+            <p:ph type="title" idx="100" hasCustomPrompt="1"/>
           </p:nvPr>
         </p:nvSpPr>
         <p:spPr>
@@ -24609,7 +25288,7 @@
           <a:bodyPr wrap="square" lIns="0" tIns="0" rIns="0" bIns="0" rtlCol="0" anchor="ctr"/>
           <a:lstStyle/>
           <a:p>
-            <a:pPr algn="l" indent="0" marL="0">
+            <a:pPr marL="0" indent="0" algn="l">
               <a:buNone/>
             </a:pPr>
             <a:r>
@@ -24649,7 +25328,7 @@
           <a:bodyPr wrap="square" lIns="0" tIns="0" rIns="0" bIns="0" rtlCol="0" anchor="ctr"/>
           <a:lstStyle/>
           <a:p>
-            <a:pPr algn="ctr" indent="0" marL="0">
+            <a:pPr marL="0" indent="0" algn="ctr">
               <a:buNone/>
             </a:pPr>
             <a:r>
@@ -24689,7 +25368,7 @@
           <a:bodyPr wrap="square" lIns="0" tIns="0" rIns="0" bIns="0" rtlCol="0" anchor="ctr"/>
           <a:lstStyle/>
           <a:p>
-            <a:pPr algn="ctr" indent="0" marL="0">
+            <a:pPr marL="0" indent="0" algn="ctr">
               <a:buNone/>
             </a:pPr>
             <a:r>
@@ -24729,7 +25408,7 @@
           <a:bodyPr wrap="square" lIns="0" tIns="0" rIns="0" bIns="0" rtlCol="0" anchor="ctr"/>
           <a:lstStyle/>
           <a:p>
-            <a:pPr algn="ctr" indent="0" marL="0">
+            <a:pPr marL="0" indent="0" algn="ctr">
               <a:buNone/>
             </a:pPr>
             <a:r>
@@ -24952,7 +25631,7 @@
           </a:prstGeom>
           <a:extLst>
             <a:ext uri="{C572A759-6A51-4108-AA02-DFA0A04FC94B}">
-              <ma14:wrappingTextBoxFlag xmlns:ma14="http://schemas.microsoft.com/office/mac/drawingml/2011/main" val="0"/>
+              <ma14:wrappingTextBoxFlag xmlns:ma14="http://schemas.microsoft.com/office/mac/drawingml/2011/main" xmlns="" val="0"/>
             </a:ext>
           </a:extLst>
         </p:spPr>
@@ -24970,7 +25649,7 @@
           <a:p>
             <a:pPr algn="r"/>
             <a:fld id="{F7021451-1387-4CA6-816F-3879F97B5CBC}" type="slidenum">
-              <a:rPr b="0" lang="en-US"/>
+              <a:rPr lang="en-US" b="0"/>
               <a:t>8</a:t>
             </a:fld>
             <a:endParaRPr lang="en-US"/>
@@ -25027,7 +25706,7 @@
           <a:bodyPr wrap="square" lIns="0" tIns="0" rIns="0" bIns="0" rtlCol="0" anchor="ctr"/>
           <a:lstStyle/>
           <a:p>
-            <a:pPr algn="ctr" indent="0" marL="0">
+            <a:pPr marL="0" indent="0" algn="ctr">
               <a:buNone/>
             </a:pPr>
             <a:r>
@@ -25045,9 +25724,11 @@
       <p:sp>
         <p:nvSpPr>
           <p:cNvPr id="3" name="Text 0"/>
-          <p:cNvSpPr/>
+          <p:cNvSpPr>
+            <a:spLocks noGrp="1"/>
+          </p:cNvSpPr>
           <p:nvPr>
-            <p:ph idx="100" type="title" hasCustomPrompt="1"/>
+            <p:ph type="title" idx="100" hasCustomPrompt="1"/>
           </p:nvPr>
         </p:nvSpPr>
         <p:spPr>
@@ -25065,7 +25746,7 @@
           <a:bodyPr wrap="square" lIns="0" tIns="0" rIns="0" bIns="0" rtlCol="0" anchor="b"/>
           <a:lstStyle/>
           <a:p>
-            <a:pPr algn="l" indent="0" marL="0">
+            <a:pPr marL="0" indent="0" algn="l">
               <a:buNone/>
             </a:pPr>
             <a:r>
@@ -25083,9 +25764,11 @@
       <p:sp>
         <p:nvSpPr>
           <p:cNvPr id="4" name="Text 0"/>
-          <p:cNvSpPr/>
+          <p:cNvSpPr>
+            <a:spLocks noGrp="1"/>
+          </p:cNvSpPr>
           <p:nvPr>
-            <p:ph idx="101" type="body" hasCustomPrompt="1"/>
+            <p:ph type="body" idx="101" hasCustomPrompt="1"/>
           </p:nvPr>
         </p:nvSpPr>
         <p:spPr>
@@ -25103,7 +25786,7 @@
           <a:bodyPr wrap="square" lIns="0" tIns="0" rIns="0" bIns="0" rtlCol="0" anchor="t"/>
           <a:lstStyle/>
           <a:p>
-            <a:pPr indent="0" marL="0">
+            <a:pPr marL="0" indent="0">
               <a:buNone/>
             </a:pPr>
             <a:r>
@@ -25419,4 +26102,319 @@
     </a:ext>
   </a:extLst>
 </a:theme>
+</file>
+
+<file path=ppt/theme/theme2.xml><?xml version="1.0" encoding="utf-8"?>
+<a:theme xmlns:a="http://schemas.openxmlformats.org/drawingml/2006/main" name="Office Theme">
+  <a:themeElements>
+    <a:clrScheme name="Office">
+      <a:dk1>
+        <a:sysClr val="windowText" lastClr="000000"/>
+      </a:dk1>
+      <a:lt1>
+        <a:sysClr val="window" lastClr="FFFFFF"/>
+      </a:lt1>
+      <a:dk2>
+        <a:srgbClr val="0E2841"/>
+      </a:dk2>
+      <a:lt2>
+        <a:srgbClr val="E8E8E8"/>
+      </a:lt2>
+      <a:accent1>
+        <a:srgbClr val="156082"/>
+      </a:accent1>
+      <a:accent2>
+        <a:srgbClr val="E97132"/>
+      </a:accent2>
+      <a:accent3>
+        <a:srgbClr val="196B24"/>
+      </a:accent3>
+      <a:accent4>
+        <a:srgbClr val="0F9ED5"/>
+      </a:accent4>
+      <a:accent5>
+        <a:srgbClr val="A02B93"/>
+      </a:accent5>
+      <a:accent6>
+        <a:srgbClr val="4EA72E"/>
+      </a:accent6>
+      <a:hlink>
+        <a:srgbClr val="467886"/>
+      </a:hlink>
+      <a:folHlink>
+        <a:srgbClr val="96607D"/>
+      </a:folHlink>
+    </a:clrScheme>
+    <a:fontScheme name="Office">
+      <a:majorFont>
+        <a:latin typeface="Aptos Display" panose="02110004020202020204"/>
+        <a:ea typeface=""/>
+        <a:cs typeface=""/>
+        <a:font script="Jpan" typeface="游ゴシック Light"/>
+        <a:font script="Hang" typeface="맑은 고딕"/>
+        <a:font script="Hans" typeface="等线 Light"/>
+        <a:font script="Hant" typeface="新細明體"/>
+        <a:font script="Arab" typeface="Times New Roman"/>
+        <a:font script="Hebr" typeface="Times New Roman"/>
+        <a:font script="Thai" typeface="Angsana New"/>
+        <a:font script="Ethi" typeface="Nyala"/>
+        <a:font script="Beng" typeface="Vrinda"/>
+        <a:font script="Gujr" typeface="Shruti"/>
+        <a:font script="Khmr" typeface="MoolBoran"/>
+        <a:font script="Knda" typeface="Tunga"/>
+        <a:font script="Guru" typeface="Raavi"/>
+        <a:font script="Cans" typeface="Euphemia"/>
+        <a:font script="Cher" typeface="Plantagenet Cherokee"/>
+        <a:font script="Yiii" typeface="Microsoft Yi Baiti"/>
+        <a:font script="Tibt" typeface="Microsoft Himalaya"/>
+        <a:font script="Thaa" typeface="MV Boli"/>
+        <a:font script="Deva" typeface="Mangal"/>
+        <a:font script="Telu" typeface="Gautami"/>
+        <a:font script="Taml" typeface="Latha"/>
+        <a:font script="Syrc" typeface="Estrangelo Edessa"/>
+        <a:font script="Orya" typeface="Kalinga"/>
+        <a:font script="Mlym" typeface="Kartika"/>
+        <a:font script="Laoo" typeface="DokChampa"/>
+        <a:font script="Sinh" typeface="Iskoola Pota"/>
+        <a:font script="Mong" typeface="Mongolian Baiti"/>
+        <a:font script="Viet" typeface="Times New Roman"/>
+        <a:font script="Uigh" typeface="Microsoft Uighur"/>
+        <a:font script="Geor" typeface="Sylfaen"/>
+        <a:font script="Armn" typeface="Arial"/>
+        <a:font script="Bugi" typeface="Leelawadee UI"/>
+        <a:font script="Bopo" typeface="Microsoft JhengHei"/>
+        <a:font script="Java" typeface="Javanese Text"/>
+        <a:font script="Lisu" typeface="Segoe UI"/>
+        <a:font script="Mymr" typeface="Myanmar Text"/>
+        <a:font script="Nkoo" typeface="Ebrima"/>
+        <a:font script="Olck" typeface="Nirmala UI"/>
+        <a:font script="Osma" typeface="Ebrima"/>
+        <a:font script="Phag" typeface="Phagspa"/>
+        <a:font script="Syrn" typeface="Estrangelo Edessa"/>
+        <a:font script="Syrj" typeface="Estrangelo Edessa"/>
+        <a:font script="Syre" typeface="Estrangelo Edessa"/>
+        <a:font script="Sora" typeface="Nirmala UI"/>
+        <a:font script="Tale" typeface="Microsoft Tai Le"/>
+        <a:font script="Talu" typeface="Microsoft New Tai Lue"/>
+        <a:font script="Tfng" typeface="Ebrima"/>
+      </a:majorFont>
+      <a:minorFont>
+        <a:latin typeface="Aptos" panose="02110004020202020204"/>
+        <a:ea typeface=""/>
+        <a:cs typeface=""/>
+        <a:font script="Jpan" typeface="游ゴシック"/>
+        <a:font script="Hang" typeface="맑은 고딕"/>
+        <a:font script="Hans" typeface="等线"/>
+        <a:font script="Hant" typeface="新細明體"/>
+        <a:font script="Arab" typeface="Arial"/>
+        <a:font script="Hebr" typeface="Arial"/>
+        <a:font script="Thai" typeface="Cordia New"/>
+        <a:font script="Ethi" typeface="Nyala"/>
+        <a:font script="Beng" typeface="Vrinda"/>
+        <a:font script="Gujr" typeface="Shruti"/>
+        <a:font script="Khmr" typeface="DaunPenh"/>
+        <a:font script="Knda" typeface="Tunga"/>
+        <a:font script="Guru" typeface="Raavi"/>
+        <a:font script="Cans" typeface="Euphemia"/>
+        <a:font script="Cher" typeface="Plantagenet Cherokee"/>
+        <a:font script="Yiii" typeface="Microsoft Yi Baiti"/>
+        <a:font script="Tibt" typeface="Microsoft Himalaya"/>
+        <a:font script="Thaa" typeface="MV Boli"/>
+        <a:font script="Deva" typeface="Mangal"/>
+        <a:font script="Telu" typeface="Gautami"/>
+        <a:font script="Taml" typeface="Latha"/>
+        <a:font script="Syrc" typeface="Estrangelo Edessa"/>
+        <a:font script="Orya" typeface="Kalinga"/>
+        <a:font script="Mlym" typeface="Kartika"/>
+        <a:font script="Laoo" typeface="DokChampa"/>
+        <a:font script="Sinh" typeface="Iskoola Pota"/>
+        <a:font script="Mong" typeface="Mongolian Baiti"/>
+        <a:font script="Viet" typeface="Arial"/>
+        <a:font script="Uigh" typeface="Microsoft Uighur"/>
+        <a:font script="Geor" typeface="Sylfaen"/>
+        <a:font script="Armn" typeface="Arial"/>
+        <a:font script="Bugi" typeface="Leelawadee UI"/>
+        <a:font script="Bopo" typeface="Microsoft JhengHei"/>
+        <a:font script="Java" typeface="Javanese Text"/>
+        <a:font script="Lisu" typeface="Segoe UI"/>
+        <a:font script="Mymr" typeface="Myanmar Text"/>
+        <a:font script="Nkoo" typeface="Ebrima"/>
+        <a:font script="Olck" typeface="Nirmala UI"/>
+        <a:font script="Osma" typeface="Ebrima"/>
+        <a:font script="Phag" typeface="Phagspa"/>
+        <a:font script="Syrn" typeface="Estrangelo Edessa"/>
+        <a:font script="Syrj" typeface="Estrangelo Edessa"/>
+        <a:font script="Syre" typeface="Estrangelo Edessa"/>
+        <a:font script="Sora" typeface="Nirmala UI"/>
+        <a:font script="Tale" typeface="Microsoft Tai Le"/>
+        <a:font script="Talu" typeface="Microsoft New Tai Lue"/>
+        <a:font script="Tfng" typeface="Ebrima"/>
+      </a:minorFont>
+    </a:fontScheme>
+    <a:fmtScheme name="Office">
+      <a:fillStyleLst>
+        <a:solidFill>
+          <a:schemeClr val="phClr"/>
+        </a:solidFill>
+        <a:gradFill rotWithShape="1">
+          <a:gsLst>
+            <a:gs pos="0">
+              <a:schemeClr val="phClr">
+                <a:lumMod val="110000"/>
+                <a:satMod val="105000"/>
+                <a:tint val="67000"/>
+              </a:schemeClr>
+            </a:gs>
+            <a:gs pos="50000">
+              <a:schemeClr val="phClr">
+                <a:lumMod val="105000"/>
+                <a:satMod val="103000"/>
+                <a:tint val="73000"/>
+              </a:schemeClr>
+            </a:gs>
+            <a:gs pos="100000">
+              <a:schemeClr val="phClr">
+                <a:lumMod val="105000"/>
+                <a:satMod val="109000"/>
+                <a:tint val="81000"/>
+              </a:schemeClr>
+            </a:gs>
+          </a:gsLst>
+          <a:lin ang="5400000" scaled="0"/>
+        </a:gradFill>
+        <a:gradFill rotWithShape="1">
+          <a:gsLst>
+            <a:gs pos="0">
+              <a:schemeClr val="phClr">
+                <a:satMod val="103000"/>
+                <a:lumMod val="102000"/>
+                <a:tint val="94000"/>
+              </a:schemeClr>
+            </a:gs>
+            <a:gs pos="50000">
+              <a:schemeClr val="phClr">
+                <a:satMod val="110000"/>
+                <a:lumMod val="100000"/>
+                <a:shade val="100000"/>
+              </a:schemeClr>
+            </a:gs>
+            <a:gs pos="100000">
+              <a:schemeClr val="phClr">
+                <a:lumMod val="99000"/>
+                <a:satMod val="120000"/>
+                <a:shade val="78000"/>
+              </a:schemeClr>
+            </a:gs>
+          </a:gsLst>
+          <a:lin ang="5400000" scaled="0"/>
+        </a:gradFill>
+      </a:fillStyleLst>
+      <a:lnStyleLst>
+        <a:ln w="12700" cap="flat" cmpd="sng" algn="ctr">
+          <a:solidFill>
+            <a:schemeClr val="phClr"/>
+          </a:solidFill>
+          <a:prstDash val="solid"/>
+          <a:miter lim="800000"/>
+        </a:ln>
+        <a:ln w="19050" cap="flat" cmpd="sng" algn="ctr">
+          <a:solidFill>
+            <a:schemeClr val="phClr"/>
+          </a:solidFill>
+          <a:prstDash val="solid"/>
+          <a:miter lim="800000"/>
+        </a:ln>
+        <a:ln w="25400" cap="flat" cmpd="sng" algn="ctr">
+          <a:solidFill>
+            <a:schemeClr val="phClr"/>
+          </a:solidFill>
+          <a:prstDash val="solid"/>
+          <a:miter lim="800000"/>
+        </a:ln>
+      </a:lnStyleLst>
+      <a:effectStyleLst>
+        <a:effectStyle>
+          <a:effectLst/>
+        </a:effectStyle>
+        <a:effectStyle>
+          <a:effectLst/>
+        </a:effectStyle>
+        <a:effectStyle>
+          <a:effectLst>
+            <a:outerShdw blurRad="57150" dist="19050" dir="5400000" algn="ctr" rotWithShape="0">
+              <a:srgbClr val="000000">
+                <a:alpha val="63000"/>
+              </a:srgbClr>
+            </a:outerShdw>
+          </a:effectLst>
+        </a:effectStyle>
+      </a:effectStyleLst>
+      <a:bgFillStyleLst>
+        <a:solidFill>
+          <a:schemeClr val="phClr"/>
+        </a:solidFill>
+        <a:solidFill>
+          <a:schemeClr val="phClr">
+            <a:tint val="95000"/>
+            <a:satMod val="170000"/>
+          </a:schemeClr>
+        </a:solidFill>
+        <a:gradFill rotWithShape="1">
+          <a:gsLst>
+            <a:gs pos="0">
+              <a:schemeClr val="phClr">
+                <a:tint val="93000"/>
+                <a:satMod val="150000"/>
+                <a:shade val="98000"/>
+                <a:lumMod val="102000"/>
+              </a:schemeClr>
+            </a:gs>
+            <a:gs pos="50000">
+              <a:schemeClr val="phClr">
+                <a:tint val="98000"/>
+                <a:satMod val="130000"/>
+                <a:shade val="90000"/>
+                <a:lumMod val="103000"/>
+              </a:schemeClr>
+            </a:gs>
+            <a:gs pos="100000">
+              <a:schemeClr val="phClr">
+                <a:shade val="63000"/>
+                <a:satMod val="120000"/>
+              </a:schemeClr>
+            </a:gs>
+          </a:gsLst>
+          <a:lin ang="5400000" scaled="0"/>
+        </a:gradFill>
+      </a:bgFillStyleLst>
+    </a:fmtScheme>
+  </a:themeElements>
+  <a:objectDefaults>
+    <a:lnDef>
+      <a:spPr/>
+      <a:bodyPr/>
+      <a:lstStyle/>
+      <a:style>
+        <a:lnRef idx="2">
+          <a:schemeClr val="accent1"/>
+        </a:lnRef>
+        <a:fillRef idx="0">
+          <a:schemeClr val="accent1"/>
+        </a:fillRef>
+        <a:effectRef idx="1">
+          <a:schemeClr val="accent1"/>
+        </a:effectRef>
+        <a:fontRef idx="minor">
+          <a:schemeClr val="tx1"/>
+        </a:fontRef>
+      </a:style>
+    </a:lnDef>
+  </a:objectDefaults>
+  <a:extraClrSchemeLst/>
+  <a:extLst>
+    <a:ext uri="{05A4C25C-085E-4340-85A3-A5531E510DB2}">
+      <thm15:themeFamily xmlns:thm15="http://schemas.microsoft.com/office/thememl/2012/main" name="Office Theme" id="{2E142A2C-CD16-42D6-873A-C26D2A0506FA}" vid="{1BDDFF52-6CD6-40A5-AB3C-68EB2F1E4D0A}"/>
+    </a:ext>
+  </a:extLst>
+</a:theme>
 </file>